--- a/Supervisado/Supervisado 3.pptx
+++ b/Supervisado/Supervisado 3.pptx
@@ -55,6 +55,21 @@
     <p:sldId id="302" r:id="rId50"/>
     <p:sldId id="303" r:id="rId51"/>
     <p:sldId id="304" r:id="rId52"/>
+    <p:sldId id="305" r:id="rId53"/>
+    <p:sldId id="306" r:id="rId54"/>
+    <p:sldId id="307" r:id="rId55"/>
+    <p:sldId id="308" r:id="rId56"/>
+    <p:sldId id="309" r:id="rId57"/>
+    <p:sldId id="310" r:id="rId58"/>
+    <p:sldId id="311" r:id="rId59"/>
+    <p:sldId id="312" r:id="rId60"/>
+    <p:sldId id="313" r:id="rId61"/>
+    <p:sldId id="314" r:id="rId62"/>
+    <p:sldId id="315" r:id="rId63"/>
+    <p:sldId id="316" r:id="rId64"/>
+    <p:sldId id="317" r:id="rId65"/>
+    <p:sldId id="318" r:id="rId66"/>
+    <p:sldId id="319" r:id="rId67"/>
   </p:sldIdLst>
   <p:sldSz cx="12192000" cy="6858000"/>
   <p:notesSz cx="7559675" cy="10691813"/>
@@ -3168,7 +3183,13 @@
               <a:rPr b="0" lang="en-US" sz="4400" spc="-1" strike="noStrike">
                 <a:latin typeface="Arial"/>
               </a:rPr>
-              <a:t>Pulse para editar el formato del texto de título</a:t>
+              <a:t>Pulse para editar el formato del texto de </a:t>
+            </a:r>
+            <a:r>
+              <a:rPr b="0" lang="en-US" sz="4400" spc="-1" strike="noStrike">
+                <a:latin typeface="Arial"/>
+              </a:rPr>
+              <a:t>título</a:t>
             </a:r>
             <a:endParaRPr b="0" lang="en-US" sz="4400" spc="-1" strike="noStrike">
               <a:latin typeface="Arial"/>
@@ -3412,7 +3433,7 @@
         <p:spPr>
           <a:xfrm>
             <a:off x="0" y="6179400"/>
-            <a:ext cx="12184920" cy="685440"/>
+            <a:ext cx="12183840" cy="684360"/>
           </a:xfrm>
           <a:prstGeom prst="rect">
             <a:avLst/>
@@ -3451,8 +3472,8 @@
         </p:blipFill>
         <p:spPr>
           <a:xfrm flipH="1">
-            <a:off x="1686600" y="5883840"/>
-            <a:ext cx="595440" cy="597600"/>
+            <a:off x="1687680" y="5883840"/>
+            <a:ext cx="594360" cy="596520"/>
           </a:xfrm>
           <a:prstGeom prst="rect">
             <a:avLst/>
@@ -3475,7 +3496,7 @@
         <p:spPr>
           <a:xfrm>
             <a:off x="9936360" y="6184800"/>
-            <a:ext cx="1360440" cy="645480"/>
+            <a:ext cx="1359360" cy="644400"/>
           </a:xfrm>
           <a:prstGeom prst="rect">
             <a:avLst/>
@@ -3520,7 +3541,13 @@
               <a:rPr b="0" lang="en-US" sz="4400" spc="-1" strike="noStrike">
                 <a:latin typeface="Arial"/>
               </a:rPr>
-              <a:t>Pulse para editar el formato del texto de título</a:t>
+              <a:t>Pulse para editar el formato del texto de </a:t>
+            </a:r>
+            <a:r>
+              <a:rPr b="0" lang="en-US" sz="4400" spc="-1" strike="noStrike">
+                <a:latin typeface="Arial"/>
+              </a:rPr>
+              <a:t>título</a:t>
             </a:r>
             <a:endParaRPr b="0" lang="en-US" sz="4400" spc="-1" strike="noStrike">
               <a:latin typeface="Arial"/>
@@ -3762,7 +3789,7 @@
         <p:spPr>
           <a:xfrm>
             <a:off x="0" y="0"/>
-            <a:ext cx="12184920" cy="6850800"/>
+            <a:ext cx="12183840" cy="6849720"/>
           </a:xfrm>
           <a:prstGeom prst="rect">
             <a:avLst/>
@@ -3781,7 +3808,7 @@
         <p:spPr>
           <a:xfrm>
             <a:off x="852840" y="6682680"/>
-            <a:ext cx="11385000" cy="345600"/>
+            <a:ext cx="11383920" cy="344520"/>
           </a:xfrm>
           <a:prstGeom prst="rect">
             <a:avLst/>
@@ -3820,8 +3847,8 @@
         </p:blipFill>
         <p:spPr>
           <a:xfrm flipH="1">
-            <a:off x="558720" y="6582960"/>
-            <a:ext cx="595440" cy="597600"/>
+            <a:off x="559800" y="6582960"/>
+            <a:ext cx="594360" cy="596520"/>
           </a:xfrm>
           <a:prstGeom prst="rect">
             <a:avLst/>
@@ -3840,7 +3867,7 @@
         <p:spPr>
           <a:xfrm>
             <a:off x="-96840" y="-99360"/>
-            <a:ext cx="11481840" cy="280800"/>
+            <a:ext cx="11480760" cy="279720"/>
           </a:xfrm>
           <a:prstGeom prst="rect">
             <a:avLst/>
@@ -3879,8 +3906,8 @@
         </p:blipFill>
         <p:spPr>
           <a:xfrm flipH="1">
-            <a:off x="11098080" y="-316440"/>
-            <a:ext cx="595440" cy="597600"/>
+            <a:off x="11099160" y="-316440"/>
+            <a:ext cx="594360" cy="596520"/>
           </a:xfrm>
           <a:prstGeom prst="rect">
             <a:avLst/>
@@ -3899,9 +3926,9 @@
         <p:grpSpPr>
           <a:xfrm>
             <a:off x="504000" y="405720"/>
-            <a:ext cx="5249160" cy="2399760"/>
+            <a:ext cx="5248080" cy="2398680"/>
             <a:chOff x="504000" y="405720"/>
-            <a:chExt cx="5249160" cy="2399760"/>
+            <a:chExt cx="5248080" cy="2398680"/>
           </a:xfrm>
         </p:grpSpPr>
         <p:sp>
@@ -3913,7 +3940,7 @@
           <p:spPr>
             <a:xfrm>
               <a:off x="504000" y="405720"/>
-              <a:ext cx="4847760" cy="2399760"/>
+              <a:ext cx="4846680" cy="2398680"/>
             </a:xfrm>
             <a:prstGeom prst="rect">
               <a:avLst/>
@@ -3951,9 +3978,9 @@
           <p:grpSpPr>
             <a:xfrm>
               <a:off x="734760" y="980640"/>
-              <a:ext cx="5018400" cy="1824840"/>
+              <a:ext cx="5017320" cy="1823760"/>
               <a:chOff x="734760" y="980640"/>
-              <a:chExt cx="5018400" cy="1824840"/>
+              <a:chExt cx="5017320" cy="1823760"/>
             </a:xfrm>
           </p:grpSpPr>
           <p:sp>
@@ -3965,7 +3992,7 @@
             <p:spPr>
               <a:xfrm>
                 <a:off x="778680" y="2277000"/>
-                <a:ext cx="4974480" cy="528480"/>
+                <a:ext cx="4973400" cy="527400"/>
               </a:xfrm>
               <a:prstGeom prst="rect">
                 <a:avLst/>
@@ -4020,7 +4047,7 @@
             <p:spPr>
               <a:xfrm>
                 <a:off x="734760" y="980640"/>
-                <a:ext cx="4010400" cy="1315800"/>
+                <a:ext cx="4009320" cy="1314720"/>
               </a:xfrm>
               <a:prstGeom prst="rect">
                 <a:avLst/>
@@ -4100,7 +4127,7 @@
         <p:spPr>
           <a:xfrm>
             <a:off x="3575880" y="532440"/>
-            <a:ext cx="1647000" cy="801000"/>
+            <a:ext cx="1645920" cy="799920"/>
           </a:xfrm>
           <a:prstGeom prst="rect">
             <a:avLst/>
@@ -4157,7 +4184,7 @@
         <p:spPr>
           <a:xfrm>
             <a:off x="838080" y="365040"/>
-            <a:ext cx="10508400" cy="536400"/>
+            <a:ext cx="10507320" cy="535320"/>
           </a:xfrm>
           <a:prstGeom prst="rect">
             <a:avLst/>
@@ -4206,7 +4233,7 @@
         <p:spPr>
           <a:xfrm>
             <a:off x="838080" y="1124640"/>
-            <a:ext cx="10508400" cy="4344120"/>
+            <a:ext cx="10507320" cy="4343040"/>
           </a:xfrm>
           <a:prstGeom prst="rect">
             <a:avLst/>
@@ -4463,7 +4490,7 @@
         <p:spPr>
           <a:xfrm>
             <a:off x="838080" y="365040"/>
-            <a:ext cx="10508400" cy="536400"/>
+            <a:ext cx="10507320" cy="535320"/>
           </a:xfrm>
           <a:prstGeom prst="rect">
             <a:avLst/>
@@ -4513,7 +4540,7 @@
         <p:spPr>
           <a:xfrm>
             <a:off x="1980000" y="1980000"/>
-            <a:ext cx="7928280" cy="3600000"/>
+            <a:ext cx="7927200" cy="3598920"/>
           </a:xfrm>
           <a:prstGeom prst="rect">
             <a:avLst/>
@@ -4526,30 +4553,46 @@
       <p:sp>
         <p:nvSpPr>
           <p:cNvPr id="118" name=""/>
-          <p:cNvSpPr txBox="1"/>
+          <p:cNvSpPr/>
           <p:nvPr/>
         </p:nvSpPr>
         <p:spPr>
           <a:xfrm>
             <a:off x="1077120" y="1260000"/>
-            <a:ext cx="9182880" cy="540000"/>
-          </a:xfrm>
-          <a:prstGeom prst="rect">
-            <a:avLst/>
-          </a:prstGeom>
-          <a:noFill/>
-          <a:ln w="0">
-            <a:noFill/>
-          </a:ln>
-        </p:spPr>
+            <a:ext cx="9181800" cy="538920"/>
+          </a:xfrm>
+          <a:prstGeom prst="rect">
+            <a:avLst/>
+          </a:prstGeom>
+          <a:noFill/>
+          <a:ln w="0">
+            <a:noFill/>
+          </a:ln>
+        </p:spPr>
+        <p:style>
+          <a:lnRef idx="0"/>
+          <a:fillRef idx="0"/>
+          <a:effectRef idx="0"/>
+          <a:fontRef idx="minor"/>
+        </p:style>
         <p:txBody>
           <a:bodyPr lIns="90000" rIns="90000" tIns="45000" bIns="45000" anchor="t">
             <a:noAutofit/>
           </a:bodyPr>
           <a:p>
+            <a:pPr>
+              <a:lnSpc>
+                <a:spcPct val="100000"/>
+              </a:lnSpc>
+              <a:buNone/>
+            </a:pPr>
             <a:r>
               <a:rPr b="1" lang="es-ES" sz="2400" spc="-1" strike="noStrike">
-                <a:latin typeface="Calibri"/>
+                <a:solidFill>
+                  <a:srgbClr val="000000"/>
+                </a:solidFill>
+                <a:latin typeface="Calibri"/>
+                <a:ea typeface="DejaVu Sans"/>
               </a:rPr>
               <a:t>Homocedasticidad y heterocedasticidad</a:t>
             </a:r>
@@ -4606,7 +4649,7 @@
         <p:spPr>
           <a:xfrm>
             <a:off x="838080" y="365040"/>
-            <a:ext cx="10508400" cy="536400"/>
+            <a:ext cx="10507320" cy="535320"/>
           </a:xfrm>
           <a:prstGeom prst="rect">
             <a:avLst/>
@@ -4655,7 +4698,7 @@
         <p:spPr>
           <a:xfrm>
             <a:off x="1800000" y="2340000"/>
-            <a:ext cx="8879400" cy="3060000"/>
+            <a:ext cx="8878320" cy="3058920"/>
           </a:xfrm>
           <a:prstGeom prst="rect">
             <a:avLst/>
@@ -4668,30 +4711,46 @@
       <p:sp>
         <p:nvSpPr>
           <p:cNvPr id="121" name=""/>
-          <p:cNvSpPr txBox="1"/>
+          <p:cNvSpPr/>
           <p:nvPr/>
         </p:nvSpPr>
         <p:spPr>
           <a:xfrm>
             <a:off x="1080000" y="1440000"/>
-            <a:ext cx="5217480" cy="395640"/>
-          </a:xfrm>
-          <a:prstGeom prst="rect">
-            <a:avLst/>
-          </a:prstGeom>
-          <a:noFill/>
-          <a:ln w="0">
-            <a:noFill/>
-          </a:ln>
-        </p:spPr>
+            <a:ext cx="5216400" cy="394560"/>
+          </a:xfrm>
+          <a:prstGeom prst="rect">
+            <a:avLst/>
+          </a:prstGeom>
+          <a:noFill/>
+          <a:ln w="0">
+            <a:noFill/>
+          </a:ln>
+        </p:spPr>
+        <p:style>
+          <a:lnRef idx="0"/>
+          <a:fillRef idx="0"/>
+          <a:effectRef idx="0"/>
+          <a:fontRef idx="minor"/>
+        </p:style>
         <p:txBody>
           <a:bodyPr lIns="90000" rIns="90000" tIns="45000" bIns="45000" anchor="t">
             <a:noAutofit/>
           </a:bodyPr>
           <a:p>
+            <a:pPr>
+              <a:lnSpc>
+                <a:spcPct val="100000"/>
+              </a:lnSpc>
+              <a:buNone/>
+            </a:pPr>
             <a:r>
               <a:rPr b="1" lang="es-ES" sz="2400" spc="-1" strike="noStrike">
-                <a:latin typeface="Calibri"/>
+                <a:solidFill>
+                  <a:srgbClr val="000000"/>
+                </a:solidFill>
+                <a:latin typeface="Calibri"/>
+                <a:ea typeface="DejaVu Sans"/>
               </a:rPr>
               <a:t>Análisis de residuos</a:t>
             </a:r>
@@ -4748,7 +4807,7 @@
         <p:spPr>
           <a:xfrm>
             <a:off x="838080" y="365040"/>
-            <a:ext cx="10508400" cy="536400"/>
+            <a:ext cx="10507320" cy="535320"/>
           </a:xfrm>
           <a:prstGeom prst="rect">
             <a:avLst/>
@@ -4797,7 +4856,7 @@
         <p:spPr>
           <a:xfrm>
             <a:off x="3960000" y="1664640"/>
-            <a:ext cx="7801200" cy="3194640"/>
+            <a:ext cx="7800120" cy="3193560"/>
           </a:xfrm>
           <a:prstGeom prst="rect">
             <a:avLst/>
@@ -4976,7 +5035,7 @@
         <p:spPr>
           <a:xfrm>
             <a:off x="720000" y="2340000"/>
-            <a:ext cx="2159280" cy="2159280"/>
+            <a:ext cx="2158200" cy="2158200"/>
           </a:xfrm>
           <a:prstGeom prst="rect">
             <a:avLst/>
@@ -5033,7 +5092,7 @@
         <p:spPr>
           <a:xfrm>
             <a:off x="838080" y="365040"/>
-            <a:ext cx="10508400" cy="536400"/>
+            <a:ext cx="10507320" cy="535320"/>
           </a:xfrm>
           <a:prstGeom prst="rect">
             <a:avLst/>
@@ -5082,7 +5141,7 @@
         <p:spPr>
           <a:xfrm>
             <a:off x="3600000" y="902160"/>
-            <a:ext cx="6299280" cy="5213520"/>
+            <a:ext cx="6298200" cy="5212440"/>
           </a:xfrm>
           <a:prstGeom prst="rect">
             <a:avLst/>
@@ -5139,7 +5198,7 @@
         <p:spPr>
           <a:xfrm>
             <a:off x="838080" y="365040"/>
-            <a:ext cx="10508400" cy="536400"/>
+            <a:ext cx="10507320" cy="535320"/>
           </a:xfrm>
           <a:prstGeom prst="rect">
             <a:avLst/>
@@ -5188,7 +5247,7 @@
         <p:spPr>
           <a:xfrm>
             <a:off x="3718080" y="1664640"/>
-            <a:ext cx="8161200" cy="3014640"/>
+            <a:ext cx="8160120" cy="3013560"/>
           </a:xfrm>
           <a:prstGeom prst="rect">
             <a:avLst/>
@@ -5367,7 +5426,7 @@
         <p:spPr>
           <a:xfrm>
             <a:off x="720000" y="2160360"/>
-            <a:ext cx="2207880" cy="2159280"/>
+            <a:ext cx="2206800" cy="2158200"/>
           </a:xfrm>
           <a:prstGeom prst="rect">
             <a:avLst/>
@@ -5424,7 +5483,7 @@
         <p:spPr>
           <a:xfrm>
             <a:off x="838080" y="365040"/>
-            <a:ext cx="10508400" cy="536400"/>
+            <a:ext cx="10507320" cy="535320"/>
           </a:xfrm>
           <a:prstGeom prst="rect">
             <a:avLst/>
@@ -5473,7 +5532,7 @@
         <p:spPr>
           <a:xfrm>
             <a:off x="2557440" y="980280"/>
-            <a:ext cx="6801840" cy="5155200"/>
+            <a:ext cx="6800760" cy="5154120"/>
           </a:xfrm>
           <a:prstGeom prst="rect">
             <a:avLst/>
@@ -5530,7 +5589,7 @@
         <p:spPr>
           <a:xfrm>
             <a:off x="838080" y="365040"/>
-            <a:ext cx="10508400" cy="536400"/>
+            <a:ext cx="10507320" cy="535320"/>
           </a:xfrm>
           <a:prstGeom prst="rect">
             <a:avLst/>
@@ -5579,7 +5638,7 @@
         <p:spPr>
           <a:xfrm>
             <a:off x="838080" y="1124640"/>
-            <a:ext cx="10508400" cy="2294640"/>
+            <a:ext cx="10507320" cy="2293560"/>
           </a:xfrm>
           <a:prstGeom prst="rect">
             <a:avLst/>
@@ -5731,7 +5790,7 @@
         <p:spPr>
           <a:xfrm>
             <a:off x="838080" y="365040"/>
-            <a:ext cx="10508400" cy="536400"/>
+            <a:ext cx="10507320" cy="535320"/>
           </a:xfrm>
           <a:prstGeom prst="rect">
             <a:avLst/>
@@ -5780,7 +5839,7 @@
         <p:spPr>
           <a:xfrm>
             <a:off x="151920" y="1855440"/>
-            <a:ext cx="6147360" cy="3723840"/>
+            <a:ext cx="6146280" cy="3722760"/>
           </a:xfrm>
           <a:prstGeom prst="rect">
             <a:avLst/>
@@ -5803,7 +5862,7 @@
         <p:spPr>
           <a:xfrm>
             <a:off x="6480000" y="1800000"/>
-            <a:ext cx="5272200" cy="3959280"/>
+            <a:ext cx="5271120" cy="3958200"/>
           </a:xfrm>
           <a:prstGeom prst="rect">
             <a:avLst/>
@@ -5860,7 +5919,7 @@
         <p:spPr>
           <a:xfrm>
             <a:off x="838080" y="365040"/>
-            <a:ext cx="10508400" cy="536400"/>
+            <a:ext cx="10507320" cy="535320"/>
           </a:xfrm>
           <a:prstGeom prst="rect">
             <a:avLst/>
@@ -5909,7 +5968,7 @@
         <p:spPr>
           <a:xfrm>
             <a:off x="3420000" y="1215000"/>
-            <a:ext cx="5399640" cy="4819680"/>
+            <a:ext cx="5398560" cy="4818600"/>
           </a:xfrm>
           <a:prstGeom prst="rect">
             <a:avLst/>
@@ -5966,7 +6025,7 @@
         <p:spPr>
           <a:xfrm>
             <a:off x="838080" y="365040"/>
-            <a:ext cx="10508400" cy="536400"/>
+            <a:ext cx="10507320" cy="535320"/>
           </a:xfrm>
           <a:prstGeom prst="rect">
             <a:avLst/>
@@ -6015,7 +6074,7 @@
         <p:spPr>
           <a:xfrm>
             <a:off x="838080" y="1124640"/>
-            <a:ext cx="10508400" cy="1214640"/>
+            <a:ext cx="10507320" cy="1213560"/>
           </a:xfrm>
           <a:prstGeom prst="rect">
             <a:avLst/>
@@ -6093,7 +6152,7 @@
         <p:spPr>
           <a:xfrm>
             <a:off x="3240000" y="2720160"/>
-            <a:ext cx="5749920" cy="3219120"/>
+            <a:ext cx="5748840" cy="3218040"/>
           </a:xfrm>
           <a:prstGeom prst="rect">
             <a:avLst/>
@@ -6150,7 +6209,7 @@
         <p:spPr>
           <a:xfrm>
             <a:off x="838080" y="365040"/>
-            <a:ext cx="10508400" cy="536400"/>
+            <a:ext cx="10507320" cy="535320"/>
           </a:xfrm>
           <a:prstGeom prst="rect">
             <a:avLst/>
@@ -6199,7 +6258,7 @@
         <p:spPr>
           <a:xfrm>
             <a:off x="3240000" y="1980000"/>
-            <a:ext cx="5882400" cy="3959640"/>
+            <a:ext cx="5881320" cy="3958560"/>
           </a:xfrm>
           <a:prstGeom prst="rect">
             <a:avLst/>
@@ -6218,7 +6277,7 @@
         <p:spPr>
           <a:xfrm>
             <a:off x="900000" y="1260000"/>
-            <a:ext cx="8459640" cy="601920"/>
+            <a:ext cx="8458560" cy="600840"/>
           </a:xfrm>
           <a:prstGeom prst="rect">
             <a:avLst/>
@@ -6247,25 +6306,41 @@
             </a:pPr>
             <a:r>
               <a:rPr b="1" lang="es-ES" sz="2400" spc="-1" strike="noStrike">
-                <a:latin typeface="Calibri"/>
+                <a:solidFill>
+                  <a:srgbClr val="000000"/>
+                </a:solidFill>
+                <a:latin typeface="Calibri"/>
+                <a:ea typeface="DejaVu Sans"/>
               </a:rPr>
               <a:t> </a:t>
             </a:r>
             <a:r>
               <a:rPr b="1" lang="es-ES" sz="2400" spc="-1" strike="noStrike">
-                <a:latin typeface="Calibri"/>
+                <a:solidFill>
+                  <a:srgbClr val="000000"/>
+                </a:solidFill>
+                <a:latin typeface="Calibri"/>
+                <a:ea typeface="DejaVu Sans"/>
               </a:rPr>
               <a:t>Función de coste: MSE (Error cuadrático medio)</a:t>
             </a:r>
             <a:r>
               <a:rPr b="1" lang="es-ES" sz="2400" spc="-1" strike="noStrike">
+                <a:solidFill>
+                  <a:srgbClr val="000000"/>
+                </a:solidFill>
                 <a:latin typeface="C059"/>
+                <a:ea typeface="DejaVu Sans"/>
               </a:rPr>
               <a:t> </a:t>
             </a:r>
             <a:r>
               <a:rPr b="0" lang="es-ES" sz="2400" spc="-1" strike="noStrike">
+                <a:solidFill>
+                  <a:srgbClr val="000000"/>
+                </a:solidFill>
                 <a:latin typeface="C059"/>
+                <a:ea typeface="DejaVu Sans"/>
               </a:rPr>
               <a:t> </a:t>
             </a:r>
@@ -6322,7 +6397,7 @@
         <p:spPr>
           <a:xfrm>
             <a:off x="838080" y="365040"/>
-            <a:ext cx="10508400" cy="536400"/>
+            <a:ext cx="10507320" cy="535320"/>
           </a:xfrm>
           <a:prstGeom prst="rect">
             <a:avLst/>
@@ -6371,7 +6446,7 @@
         <p:spPr>
           <a:xfrm>
             <a:off x="3240000" y="1070280"/>
-            <a:ext cx="5399640" cy="5027400"/>
+            <a:ext cx="5398560" cy="5026320"/>
           </a:xfrm>
           <a:prstGeom prst="rect">
             <a:avLst/>
@@ -6428,7 +6503,7 @@
         <p:spPr>
           <a:xfrm>
             <a:off x="838080" y="365040"/>
-            <a:ext cx="10508400" cy="536400"/>
+            <a:ext cx="10507320" cy="535320"/>
           </a:xfrm>
           <a:prstGeom prst="rect">
             <a:avLst/>
@@ -6477,7 +6552,7 @@
         <p:spPr>
           <a:xfrm>
             <a:off x="3593520" y="1804320"/>
-            <a:ext cx="6126120" cy="4315320"/>
+            <a:ext cx="6125040" cy="4314240"/>
           </a:xfrm>
           <a:prstGeom prst="rect">
             <a:avLst/>
@@ -6496,7 +6571,7 @@
         <p:spPr>
           <a:xfrm>
             <a:off x="922680" y="1093320"/>
-            <a:ext cx="7356960" cy="699840"/>
+            <a:ext cx="7355880" cy="698760"/>
           </a:xfrm>
           <a:prstGeom prst="rect">
             <a:avLst/>
@@ -6525,13 +6600,21 @@
             </a:pPr>
             <a:r>
               <a:rPr b="1" lang="es-ES" sz="2400" spc="-1" strike="noStrike">
-                <a:latin typeface="Calibri"/>
+                <a:solidFill>
+                  <a:srgbClr val="000000"/>
+                </a:solidFill>
+                <a:latin typeface="Calibri"/>
+                <a:ea typeface="DejaVu Sans"/>
               </a:rPr>
               <a:t>Función de coste: No lineal (Redes neuronales) </a:t>
             </a:r>
             <a:r>
               <a:rPr b="0" lang="en-US" sz="1800" spc="-1" strike="noStrike">
+                <a:solidFill>
+                  <a:srgbClr val="000000"/>
+                </a:solidFill>
                 <a:latin typeface="Arial"/>
+                <a:ea typeface="DejaVu Sans"/>
               </a:rPr>
               <a:t> </a:t>
             </a:r>
@@ -6588,7 +6671,7 @@
         <p:spPr>
           <a:xfrm>
             <a:off x="838080" y="365040"/>
-            <a:ext cx="10508400" cy="536400"/>
+            <a:ext cx="10507320" cy="535320"/>
           </a:xfrm>
           <a:prstGeom prst="rect">
             <a:avLst/>
@@ -6637,7 +6720,7 @@
         <p:spPr>
           <a:xfrm>
             <a:off x="2160000" y="1260000"/>
-            <a:ext cx="8279280" cy="4635360"/>
+            <a:ext cx="8278200" cy="4634280"/>
           </a:xfrm>
           <a:prstGeom prst="rect">
             <a:avLst/>
@@ -6694,7 +6777,7 @@
         <p:spPr>
           <a:xfrm>
             <a:off x="838080" y="365040"/>
-            <a:ext cx="10508400" cy="536400"/>
+            <a:ext cx="10507320" cy="535320"/>
           </a:xfrm>
           <a:prstGeom prst="rect">
             <a:avLst/>
@@ -6743,7 +6826,7 @@
         <p:spPr>
           <a:xfrm>
             <a:off x="838080" y="1124640"/>
-            <a:ext cx="10508400" cy="4344120"/>
+            <a:ext cx="10507320" cy="4343040"/>
           </a:xfrm>
           <a:prstGeom prst="rect">
             <a:avLst/>
@@ -6939,7 +7022,7 @@
         <p:spPr>
           <a:xfrm>
             <a:off x="838080" y="365040"/>
-            <a:ext cx="10508400" cy="536400"/>
+            <a:ext cx="10507320" cy="535320"/>
           </a:xfrm>
           <a:prstGeom prst="rect">
             <a:avLst/>
@@ -6967,7 +7050,7 @@
                 </a:solidFill>
                 <a:latin typeface="Calibri"/>
               </a:rPr>
-              <a:t>Regresión Logística</a:t>
+              <a:t>Regresión Lineal</a:t>
             </a:r>
             <a:endParaRPr b="0" lang="en-US" sz="2400" spc="-1" strike="noStrike">
               <a:latin typeface="Arial"/>
@@ -6988,7 +7071,7 @@
         <p:spPr>
           <a:xfrm>
             <a:off x="3240000" y="1105920"/>
-            <a:ext cx="5974200" cy="5013720"/>
+            <a:ext cx="5973120" cy="5012640"/>
           </a:xfrm>
           <a:prstGeom prst="rect">
             <a:avLst/>
@@ -7045,7 +7128,7 @@
         <p:spPr>
           <a:xfrm>
             <a:off x="838080" y="365040"/>
-            <a:ext cx="10508400" cy="536400"/>
+            <a:ext cx="10507320" cy="535320"/>
           </a:xfrm>
           <a:prstGeom prst="rect">
             <a:avLst/>
@@ -7073,7 +7156,7 @@
                 </a:solidFill>
                 <a:latin typeface="Calibri"/>
               </a:rPr>
-              <a:t>Regresión Logística</a:t>
+              <a:t>Regresión Lineal</a:t>
             </a:r>
             <a:endParaRPr b="0" lang="en-US" sz="2400" spc="-1" strike="noStrike">
               <a:latin typeface="Arial"/>
@@ -7093,8 +7176,8 @@
         </p:blipFill>
         <p:spPr>
           <a:xfrm>
-            <a:off x="2880000" y="1233360"/>
-            <a:ext cx="6299280" cy="4833000"/>
+            <a:off x="3240000" y="1105920"/>
+            <a:ext cx="5973120" cy="5012640"/>
           </a:xfrm>
           <a:prstGeom prst="rect">
             <a:avLst/>
@@ -7151,7 +7234,7 @@
         <p:spPr>
           <a:xfrm>
             <a:off x="838080" y="365040"/>
-            <a:ext cx="10508400" cy="536400"/>
+            <a:ext cx="10507320" cy="535320"/>
           </a:xfrm>
           <a:prstGeom prst="rect">
             <a:avLst/>
@@ -7179,108 +7262,9 @@
                 </a:solidFill>
                 <a:latin typeface="Calibri"/>
               </a:rPr>
-              <a:t>Regresión Logística</a:t>
+              <a:t>Regresión Lineal</a:t>
             </a:r>
             <a:endParaRPr b="0" lang="en-US" sz="2400" spc="-1" strike="noStrike">
-              <a:latin typeface="Arial"/>
-            </a:endParaRPr>
-          </a:p>
-        </p:txBody>
-      </p:sp>
-      <p:sp>
-        <p:nvSpPr>
-          <p:cNvPr id="156" name="PlaceHolder 2"/>
-          <p:cNvSpPr>
-            <a:spLocks noGrp="1"/>
-          </p:cNvSpPr>
-          <p:nvPr>
-            <p:ph/>
-          </p:nvPr>
-        </p:nvSpPr>
-        <p:spPr>
-          <a:xfrm>
-            <a:off x="838080" y="1124640"/>
-            <a:ext cx="10508400" cy="1754640"/>
-          </a:xfrm>
-          <a:prstGeom prst="rect">
-            <a:avLst/>
-          </a:prstGeom>
-          <a:noFill/>
-          <a:ln w="0">
-            <a:noFill/>
-          </a:ln>
-        </p:spPr>
-        <p:txBody>
-          <a:bodyPr lIns="90000" rIns="90000" tIns="45000" bIns="45000" anchor="t">
-            <a:noAutofit/>
-          </a:bodyPr>
-          <a:p>
-            <a:pPr marL="432000" indent="-324000">
-              <a:lnSpc>
-                <a:spcPct val="100000"/>
-              </a:lnSpc>
-              <a:buClr>
-                <a:srgbClr val="000000"/>
-              </a:buClr>
-              <a:buFont typeface="Wingdings" charset="2"/>
-              <a:buChar char=""/>
-            </a:pPr>
-            <a:r>
-              <a:rPr b="0" lang="es-ES" sz="2000" spc="-1" strike="noStrike">
-                <a:latin typeface="Calibri"/>
-              </a:rPr>
-              <a:t> </a:t>
-            </a:r>
-            <a:r>
-              <a:rPr b="1" lang="es-ES" sz="2400" spc="-1" strike="noStrike">
-                <a:latin typeface="Calibri"/>
-              </a:rPr>
-              <a:t>Regresión logística:</a:t>
-            </a:r>
-            <a:r>
-              <a:rPr b="0" lang="es-ES" sz="2000" spc="-1" strike="noStrike">
-                <a:latin typeface="Calibri"/>
-              </a:rPr>
-              <a:t>  es un modelo paramétrico utilizado principalmente en problemas de </a:t>
-            </a:r>
-            <a:r>
-              <a:rPr b="0" lang="es-ES" sz="2000" spc="-1" strike="noStrike">
-                <a:latin typeface="Calibri"/>
-              </a:rPr>
-              <a:t>clasificación binaria (dos clases).</a:t>
-            </a:r>
-            <a:endParaRPr b="0" lang="en-US" sz="2000" spc="-1" strike="noStrike">
-              <a:latin typeface="Arial"/>
-            </a:endParaRPr>
-          </a:p>
-          <a:p>
-            <a:pPr lvl="1" marL="864000" indent="-324000">
-              <a:lnSpc>
-                <a:spcPct val="100000"/>
-              </a:lnSpc>
-              <a:spcBef>
-                <a:spcPts val="1134"/>
-              </a:spcBef>
-              <a:buClr>
-                <a:srgbClr val="000000"/>
-              </a:buClr>
-              <a:buSzPct val="75000"/>
-              <a:buFont typeface="Symbol"/>
-              <a:buChar char=""/>
-            </a:pPr>
-            <a:r>
-              <a:rPr b="0" lang="es-ES" sz="2000" spc="-1" strike="noStrike">
-                <a:latin typeface="Calibri"/>
-              </a:rPr>
-              <a:t>A diferencia de la regresión lineal, la regresión logística predice la probabilidad de </a:t>
-            </a:r>
-            <a:r>
-              <a:rPr b="0" lang="es-ES" sz="2000" spc="-1" strike="noStrike">
-                <a:latin typeface="Calibri"/>
-              </a:rPr>
-              <a:t>pertenecia a una clase</a:t>
-            </a:r>
-            <a:endParaRPr b="0" lang="en-US" sz="2000" spc="-1" strike="noStrike">
               <a:latin typeface="Arial"/>
             </a:endParaRPr>
           </a:p>
@@ -7288,7 +7272,7 @@
       </p:sp>
       <p:pic>
         <p:nvPicPr>
-          <p:cNvPr id="157" name="" descr=""/>
+          <p:cNvPr id="156" name="" descr=""/>
           <p:cNvPicPr/>
           <p:nvPr/>
         </p:nvPicPr>
@@ -7298,8 +7282,8 @@
         </p:blipFill>
         <p:spPr>
           <a:xfrm>
-            <a:off x="2638440" y="2880000"/>
-            <a:ext cx="7140960" cy="3059280"/>
+            <a:off x="2880000" y="1233360"/>
+            <a:ext cx="6298200" cy="4831920"/>
           </a:xfrm>
           <a:prstGeom prst="rect">
             <a:avLst/>
@@ -7345,7 +7329,7 @@
       </p:grpSpPr>
       <p:sp>
         <p:nvSpPr>
-          <p:cNvPr id="158" name="PlaceHolder 1"/>
+          <p:cNvPr id="157" name="PlaceHolder 1"/>
           <p:cNvSpPr>
             <a:spLocks noGrp="1"/>
           </p:cNvSpPr>
@@ -7356,7 +7340,7 @@
         <p:spPr>
           <a:xfrm>
             <a:off x="838080" y="365040"/>
-            <a:ext cx="10513800" cy="541800"/>
+            <a:ext cx="10507320" cy="535320"/>
           </a:xfrm>
           <a:prstGeom prst="rect">
             <a:avLst/>
@@ -7394,7 +7378,7 @@
       </p:sp>
       <p:sp>
         <p:nvSpPr>
-          <p:cNvPr id="159" name="PlaceHolder 2"/>
+          <p:cNvPr id="158" name="PlaceHolder 2"/>
           <p:cNvSpPr>
             <a:spLocks noGrp="1"/>
           </p:cNvSpPr>
@@ -7404,8 +7388,8 @@
         </p:nvSpPr>
         <p:spPr>
           <a:xfrm>
-            <a:off x="2340000" y="1260000"/>
-            <a:ext cx="7558560" cy="538560"/>
+            <a:off x="838080" y="1124640"/>
+            <a:ext cx="10507320" cy="1753560"/>
           </a:xfrm>
           <a:prstGeom prst="rect">
             <a:avLst/>
@@ -7420,121 +7404,60 @@
             <a:noAutofit/>
           </a:bodyPr>
           <a:p>
-            <a:pPr marL="228600" indent="-228600">
-              <a:lnSpc>
-                <a:spcPct val="90000"/>
+            <a:pPr marL="432000" indent="-324000">
+              <a:lnSpc>
+                <a:spcPct val="100000"/>
+              </a:lnSpc>
+              <a:buClr>
+                <a:srgbClr val="000000"/>
+              </a:buClr>
+              <a:buFont typeface="Wingdings" charset="2"/>
+              <a:buChar char=""/>
+            </a:pPr>
+            <a:r>
+              <a:rPr b="0" lang="es-ES" sz="2000" spc="-1" strike="noStrike">
+                <a:latin typeface="Calibri"/>
+              </a:rPr>
+              <a:t> </a:t>
+            </a:r>
+            <a:r>
+              <a:rPr b="1" lang="es-ES" sz="2400" spc="-1" strike="noStrike">
+                <a:latin typeface="Calibri"/>
+              </a:rPr>
+              <a:t>Regresión logística:</a:t>
+            </a:r>
+            <a:r>
+              <a:rPr b="0" lang="es-ES" sz="2000" spc="-1" strike="noStrike">
+                <a:latin typeface="Calibri"/>
+              </a:rPr>
+              <a:t>  es un modelo paramétrico utilizado principalmente en problemas de clasificación binaria (dos clases).</a:t>
+            </a:r>
+            <a:endParaRPr b="0" lang="en-US" sz="2000" spc="-1" strike="noStrike">
+              <a:latin typeface="Arial"/>
+            </a:endParaRPr>
+          </a:p>
+          <a:p>
+            <a:pPr lvl="1" marL="864000" indent="-324000">
+              <a:lnSpc>
+                <a:spcPct val="100000"/>
               </a:lnSpc>
               <a:spcBef>
-                <a:spcPts val="1001"/>
+                <a:spcPts val="1134"/>
               </a:spcBef>
               <a:buClr>
                 <a:srgbClr val="000000"/>
               </a:buClr>
-              <a:buFont typeface="Arial"/>
-              <a:buChar char="•"/>
-            </a:pPr>
-            <a:r>
-              <a:rPr b="0" lang="es-ES" sz="2800" spc="-1" strike="noStrike">
-                <a:solidFill>
-                  <a:srgbClr val="ff0000"/>
-                </a:solidFill>
-                <a:latin typeface="Calibri"/>
-              </a:rPr>
-              <a:t>ELIMINAR VALORES NULOS ANTES DE USAR REGRESIÓN LOGÍSTICA</a:t>
-            </a:r>
-            <a:endParaRPr b="0" lang="en-US" sz="2800" spc="-1" strike="noStrike">
-              <a:latin typeface="Arial"/>
-            </a:endParaRPr>
-          </a:p>
-        </p:txBody>
-      </p:sp>
-      <p:sp>
-        <p:nvSpPr>
-          <p:cNvPr id="160" name=""/>
-          <p:cNvSpPr/>
-          <p:nvPr/>
-        </p:nvSpPr>
-        <p:spPr>
-          <a:xfrm>
-            <a:off x="889920" y="2160000"/>
-            <a:ext cx="5038560" cy="960480"/>
-          </a:xfrm>
-          <a:prstGeom prst="rect">
-            <a:avLst/>
-          </a:prstGeom>
-          <a:noFill/>
-          <a:ln w="0">
-            <a:noFill/>
-          </a:ln>
-        </p:spPr>
-        <p:style>
-          <a:lnRef idx="0"/>
-          <a:fillRef idx="0"/>
-          <a:effectRef idx="0"/>
-          <a:fontRef idx="minor"/>
-        </p:style>
-        <p:txBody>
-          <a:bodyPr lIns="90000" rIns="90000" tIns="45000" bIns="45000" anchor="t">
-            <a:noAutofit/>
-          </a:bodyPr>
-          <a:p>
-            <a:pPr>
-              <a:lnSpc>
-                <a:spcPct val="100000"/>
-              </a:lnSpc>
-              <a:spcBef>
-                <a:spcPts val="1191"/>
-              </a:spcBef>
-              <a:spcAft>
-                <a:spcPts val="992"/>
-              </a:spcAft>
-              <a:buNone/>
-            </a:pPr>
-            <a:endParaRPr b="0" lang="en-US" sz="2400" spc="-1" strike="noStrike">
-              <a:latin typeface="Arial"/>
-            </a:endParaRPr>
-          </a:p>
-          <a:p>
-            <a:pPr>
-              <a:lnSpc>
-                <a:spcPct val="100000"/>
-              </a:lnSpc>
-              <a:spcBef>
-                <a:spcPts val="1191"/>
-              </a:spcBef>
-              <a:spcAft>
-                <a:spcPts val="992"/>
-              </a:spcAft>
-              <a:buNone/>
-            </a:pPr>
-            <a:endParaRPr b="0" lang="en-US" sz="2400" spc="-1" strike="noStrike">
-              <a:latin typeface="Arial"/>
-            </a:endParaRPr>
-          </a:p>
-          <a:p>
-            <a:pPr>
-              <a:lnSpc>
-                <a:spcPct val="100000"/>
-              </a:lnSpc>
-              <a:spcBef>
-                <a:spcPts val="1191"/>
-              </a:spcBef>
-              <a:spcAft>
-                <a:spcPts val="992"/>
-              </a:spcAft>
-              <a:buNone/>
-            </a:pPr>
-            <a:r>
-              <a:rPr b="1" lang="es-ES" sz="2400" spc="-1" strike="noStrike">
-                <a:solidFill>
-                  <a:srgbClr val="000000"/>
-                </a:solidFill>
-                <a:latin typeface="Calibri"/>
-                <a:ea typeface="DejaVu Sans"/>
-              </a:rPr>
-              <a:t>Los algoritmos de regresión logística fallan cuando se introducen valores nulos</a:t>
-            </a:r>
-            <a:endParaRPr b="0" lang="en-US" sz="2400" spc="-1" strike="noStrike">
+              <a:buSzPct val="75000"/>
+              <a:buFont typeface="Symbol"/>
+              <a:buChar char=""/>
+            </a:pPr>
+            <a:r>
+              <a:rPr b="0" lang="es-ES" sz="2000" spc="-1" strike="noStrike">
+                <a:latin typeface="Calibri"/>
+              </a:rPr>
+              <a:t>A diferencia de la regresión lineal, la regresión logística predice la probabilidad de pertenecia a una clase</a:t>
+            </a:r>
+            <a:endParaRPr b="0" lang="en-US" sz="2000" spc="-1" strike="noStrike">
               <a:latin typeface="Arial"/>
             </a:endParaRPr>
           </a:p>
@@ -7542,7 +7465,7 @@
       </p:sp>
       <p:pic>
         <p:nvPicPr>
-          <p:cNvPr id="161" name="" descr=""/>
+          <p:cNvPr id="159" name="" descr=""/>
           <p:cNvPicPr/>
           <p:nvPr/>
         </p:nvPicPr>
@@ -7552,31 +7475,8 @@
         </p:blipFill>
         <p:spPr>
           <a:xfrm>
-            <a:off x="1260000" y="1331280"/>
-            <a:ext cx="828360" cy="828360"/>
-          </a:xfrm>
-          <a:prstGeom prst="rect">
-            <a:avLst/>
-          </a:prstGeom>
-          <a:ln w="0">
-            <a:noFill/>
-          </a:ln>
-        </p:spPr>
-      </p:pic>
-      <p:pic>
-        <p:nvPicPr>
-          <p:cNvPr id="162" name="" descr=""/>
-          <p:cNvPicPr/>
-          <p:nvPr/>
-        </p:nvPicPr>
-        <p:blipFill>
-          <a:blip r:embed="rId2"/>
-          <a:stretch/>
-        </p:blipFill>
-        <p:spPr>
-          <a:xfrm>
-            <a:off x="7740000" y="2340000"/>
-            <a:ext cx="2699640" cy="3149280"/>
+            <a:off x="2638440" y="2880000"/>
+            <a:ext cx="7139880" cy="3058200"/>
           </a:xfrm>
           <a:prstGeom prst="rect">
             <a:avLst/>
@@ -7622,7 +7522,7 @@
       </p:grpSpPr>
       <p:sp>
         <p:nvSpPr>
-          <p:cNvPr id="163" name="PlaceHolder 1"/>
+          <p:cNvPr id="160" name="PlaceHolder 1"/>
           <p:cNvSpPr>
             <a:spLocks noGrp="1"/>
           </p:cNvSpPr>
@@ -7633,7 +7533,7 @@
         <p:spPr>
           <a:xfrm>
             <a:off x="838080" y="365040"/>
-            <a:ext cx="10513800" cy="541800"/>
+            <a:ext cx="10512720" cy="540720"/>
           </a:xfrm>
           <a:prstGeom prst="rect">
             <a:avLst/>
@@ -7671,7 +7571,7 @@
       </p:sp>
       <p:sp>
         <p:nvSpPr>
-          <p:cNvPr id="164" name="PlaceHolder 2"/>
+          <p:cNvPr id="161" name="PlaceHolder 2"/>
           <p:cNvSpPr>
             <a:spLocks noGrp="1"/>
           </p:cNvSpPr>
@@ -7682,7 +7582,7 @@
         <p:spPr>
           <a:xfrm>
             <a:off x="2340000" y="1260000"/>
-            <a:ext cx="8819640" cy="538560"/>
+            <a:ext cx="7557480" cy="537480"/>
           </a:xfrm>
           <a:prstGeom prst="rect">
             <a:avLst/>
@@ -7711,15 +7611,107 @@
               <a:buChar char="•"/>
             </a:pPr>
             <a:r>
-              <a:rPr b="0" lang="es-ES" sz="2600" spc="-1" strike="noStrike">
+              <a:rPr b="0" lang="es-ES" sz="2800" spc="-1" strike="noStrike">
                 <a:solidFill>
                   <a:srgbClr val="ff0000"/>
                 </a:solidFill>
                 <a:latin typeface="Calibri"/>
               </a:rPr>
-              <a:t>ESCALAR LOS DATOS ANTES DE USAR REGRESIÓN LOGÍSTICA</a:t>
-            </a:r>
-            <a:endParaRPr b="0" lang="en-US" sz="2600" spc="-1" strike="noStrike">
+              <a:t>ELIMINAR VALORES NULOS ANTES DE USAR REGRESIÓN LOGÍSTICA</a:t>
+            </a:r>
+            <a:endParaRPr b="0" lang="en-US" sz="2800" spc="-1" strike="noStrike">
+              <a:latin typeface="Arial"/>
+            </a:endParaRPr>
+          </a:p>
+        </p:txBody>
+      </p:sp>
+      <p:sp>
+        <p:nvSpPr>
+          <p:cNvPr id="162" name=""/>
+          <p:cNvSpPr/>
+          <p:nvPr/>
+        </p:nvSpPr>
+        <p:spPr>
+          <a:xfrm>
+            <a:off x="889920" y="2160000"/>
+            <a:ext cx="5037480" cy="959400"/>
+          </a:xfrm>
+          <a:prstGeom prst="rect">
+            <a:avLst/>
+          </a:prstGeom>
+          <a:noFill/>
+          <a:ln w="0">
+            <a:noFill/>
+          </a:ln>
+        </p:spPr>
+        <p:style>
+          <a:lnRef idx="0"/>
+          <a:fillRef idx="0"/>
+          <a:effectRef idx="0"/>
+          <a:fontRef idx="minor"/>
+        </p:style>
+        <p:txBody>
+          <a:bodyPr lIns="90000" rIns="90000" tIns="45000" bIns="45000" anchor="t">
+            <a:noAutofit/>
+          </a:bodyPr>
+          <a:p>
+            <a:pPr>
+              <a:lnSpc>
+                <a:spcPct val="100000"/>
+              </a:lnSpc>
+              <a:spcBef>
+                <a:spcPts val="1191"/>
+              </a:spcBef>
+              <a:spcAft>
+                <a:spcPts val="992"/>
+              </a:spcAft>
+              <a:buNone/>
+            </a:pPr>
+            <a:endParaRPr b="0" lang="en-US" sz="2400" spc="-1" strike="noStrike">
+              <a:latin typeface="Arial"/>
+            </a:endParaRPr>
+          </a:p>
+          <a:p>
+            <a:pPr>
+              <a:lnSpc>
+                <a:spcPct val="100000"/>
+              </a:lnSpc>
+              <a:spcBef>
+                <a:spcPts val="1191"/>
+              </a:spcBef>
+              <a:spcAft>
+                <a:spcPts val="992"/>
+              </a:spcAft>
+              <a:buNone/>
+            </a:pPr>
+            <a:endParaRPr b="0" lang="en-US" sz="2400" spc="-1" strike="noStrike">
+              <a:latin typeface="Arial"/>
+            </a:endParaRPr>
+          </a:p>
+          <a:p>
+            <a:pPr>
+              <a:lnSpc>
+                <a:spcPct val="100000"/>
+              </a:lnSpc>
+              <a:spcBef>
+                <a:spcPts val="1191"/>
+              </a:spcBef>
+              <a:spcAft>
+                <a:spcPts val="992"/>
+              </a:spcAft>
+              <a:buNone/>
+            </a:pPr>
+            <a:r>
+              <a:rPr b="1" lang="es-ES" sz="2400" spc="-1" strike="noStrike">
+                <a:solidFill>
+                  <a:srgbClr val="000000"/>
+                </a:solidFill>
+                <a:latin typeface="Calibri"/>
+                <a:ea typeface="DejaVu Sans"/>
+              </a:rPr>
+              <a:t>Los algoritmos de regresión logística fallan cuando se introducen valores nulos</a:t>
+            </a:r>
+            <a:endParaRPr b="0" lang="en-US" sz="2400" spc="-1" strike="noStrike">
               <a:latin typeface="Arial"/>
             </a:endParaRPr>
           </a:p>
@@ -7727,7 +7719,7 @@
       </p:sp>
       <p:pic>
         <p:nvPicPr>
-          <p:cNvPr id="165" name="" descr=""/>
+          <p:cNvPr id="163" name="" descr=""/>
           <p:cNvPicPr/>
           <p:nvPr/>
         </p:nvPicPr>
@@ -7737,8 +7729,8 @@
         </p:blipFill>
         <p:spPr>
           <a:xfrm>
-            <a:off x="7094880" y="2700000"/>
-            <a:ext cx="3883680" cy="3109680"/>
+            <a:off x="1260000" y="1331280"/>
+            <a:ext cx="827280" cy="827280"/>
           </a:xfrm>
           <a:prstGeom prst="rect">
             <a:avLst/>
@@ -7748,173 +7740,9 @@
           </a:ln>
         </p:spPr>
       </p:pic>
-      <p:sp>
-        <p:nvSpPr>
-          <p:cNvPr id="166" name=""/>
-          <p:cNvSpPr/>
-          <p:nvPr/>
-        </p:nvSpPr>
-        <p:spPr>
-          <a:xfrm>
-            <a:off x="889920" y="2160000"/>
-            <a:ext cx="5038560" cy="960480"/>
-          </a:xfrm>
-          <a:prstGeom prst="rect">
-            <a:avLst/>
-          </a:prstGeom>
-          <a:noFill/>
-          <a:ln w="0">
-            <a:noFill/>
-          </a:ln>
-        </p:spPr>
-        <p:style>
-          <a:lnRef idx="0"/>
-          <a:fillRef idx="0"/>
-          <a:effectRef idx="0"/>
-          <a:fontRef idx="minor"/>
-        </p:style>
-        <p:txBody>
-          <a:bodyPr lIns="90000" rIns="90000" tIns="45000" bIns="45000" anchor="t">
-            <a:noAutofit/>
-          </a:bodyPr>
-          <a:p>
-            <a:pPr>
-              <a:lnSpc>
-                <a:spcPct val="100000"/>
-              </a:lnSpc>
-              <a:spcBef>
-                <a:spcPts val="1191"/>
-              </a:spcBef>
-              <a:spcAft>
-                <a:spcPts val="992"/>
-              </a:spcAft>
-              <a:buNone/>
-            </a:pPr>
-            <a:r>
-              <a:rPr b="1" lang="en-US" sz="2400" spc="-1" strike="noStrike">
-                <a:solidFill>
-                  <a:srgbClr val="000000"/>
-                </a:solidFill>
-                <a:latin typeface="Arial"/>
-                <a:ea typeface="DejaVu Sans"/>
-              </a:rPr>
-              <a:t>No es obligatorio, pero es una práctica recomendada</a:t>
-            </a:r>
-            <a:endParaRPr b="0" lang="en-US" sz="2400" spc="-1" strike="noStrike">
-              <a:latin typeface="Arial"/>
-            </a:endParaRPr>
-          </a:p>
-          <a:p>
-            <a:pPr>
-              <a:lnSpc>
-                <a:spcPct val="100000"/>
-              </a:lnSpc>
-              <a:spcBef>
-                <a:spcPts val="1191"/>
-              </a:spcBef>
-              <a:spcAft>
-                <a:spcPts val="992"/>
-              </a:spcAft>
-              <a:buNone/>
-            </a:pPr>
-            <a:r>
-              <a:rPr b="1" lang="en-US" sz="2400" spc="-1" strike="noStrike">
-                <a:solidFill>
-                  <a:srgbClr val="000000"/>
-                </a:solidFill>
-                <a:latin typeface="Arial"/>
-                <a:ea typeface="DejaVu Sans"/>
-              </a:rPr>
-              <a:t>StandardScaler</a:t>
-            </a:r>
-            <a:endParaRPr b="0" lang="en-US" sz="2400" spc="-1" strike="noStrike">
-              <a:latin typeface="Arial"/>
-            </a:endParaRPr>
-          </a:p>
-          <a:p>
-            <a:pPr>
-              <a:lnSpc>
-                <a:spcPct val="100000"/>
-              </a:lnSpc>
-              <a:spcBef>
-                <a:spcPts val="1191"/>
-              </a:spcBef>
-              <a:spcAft>
-                <a:spcPts val="992"/>
-              </a:spcAft>
-              <a:buNone/>
-            </a:pPr>
-            <a:r>
-              <a:rPr b="0" lang="es-ES" sz="2000" spc="-1" strike="noStrike">
-                <a:solidFill>
-                  <a:srgbClr val="000000"/>
-                </a:solidFill>
-                <a:latin typeface="Calibri"/>
-                <a:ea typeface="DejaVu Sans"/>
-              </a:rPr>
-              <a:t>Recomendado para la mayoría de los casos</a:t>
-            </a:r>
-            <a:endParaRPr b="0" lang="en-US" sz="2000" spc="-1" strike="noStrike">
-              <a:latin typeface="Arial"/>
-            </a:endParaRPr>
-          </a:p>
-          <a:p>
-            <a:pPr>
-              <a:lnSpc>
-                <a:spcPct val="100000"/>
-              </a:lnSpc>
-              <a:buNone/>
-            </a:pPr>
-            <a:r>
-              <a:rPr b="1" lang="es-ES" sz="2000" spc="-1" strike="noStrike">
-                <a:solidFill>
-                  <a:srgbClr val="000000"/>
-                </a:solidFill>
-                <a:latin typeface="Calibri"/>
-                <a:ea typeface="DejaVu Sans"/>
-              </a:rPr>
-              <a:t>Convergencia más rápida</a:t>
-            </a:r>
-            <a:endParaRPr b="0" lang="en-US" sz="2000" spc="-1" strike="noStrike">
-              <a:latin typeface="Arial"/>
-            </a:endParaRPr>
-          </a:p>
-          <a:p>
-            <a:pPr>
-              <a:lnSpc>
-                <a:spcPct val="100000"/>
-              </a:lnSpc>
-              <a:buNone/>
-            </a:pPr>
-            <a:r>
-              <a:rPr b="1" lang="es-ES" sz="2000" spc="-1" strike="noStrike">
-                <a:solidFill>
-                  <a:srgbClr val="000000"/>
-                </a:solidFill>
-                <a:latin typeface="Calibri"/>
-                <a:ea typeface="DejaVu Sans"/>
-              </a:rPr>
-              <a:t>Regularización:</a:t>
-            </a:r>
-            <a:r>
-              <a:rPr b="0" lang="es-ES" sz="2000" spc="-1" strike="noStrike">
-                <a:solidFill>
-                  <a:srgbClr val="000000"/>
-                </a:solidFill>
-                <a:latin typeface="Calibri"/>
-                <a:ea typeface="DejaVu Sans"/>
-              </a:rPr>
-              <a:t> Todas la características contribuyan por igual  a la penalización de la regulación, evitando que las características con rangos más grandes dominen el modelo</a:t>
-            </a:r>
-            <a:endParaRPr b="0" lang="en-US" sz="2000" spc="-1" strike="noStrike">
-              <a:latin typeface="Arial"/>
-            </a:endParaRPr>
-          </a:p>
-        </p:txBody>
-      </p:sp>
       <p:pic>
         <p:nvPicPr>
-          <p:cNvPr id="167" name="" descr=""/>
+          <p:cNvPr id="164" name="" descr=""/>
           <p:cNvPicPr/>
           <p:nvPr/>
         </p:nvPicPr>
@@ -7924,8 +7752,8 @@
         </p:blipFill>
         <p:spPr>
           <a:xfrm>
-            <a:off x="1260000" y="971280"/>
-            <a:ext cx="828360" cy="828360"/>
+            <a:off x="7740000" y="2340000"/>
+            <a:ext cx="2698560" cy="3148200"/>
           </a:xfrm>
           <a:prstGeom prst="rect">
             <a:avLst/>
@@ -7982,7 +7810,7 @@
         <p:spPr>
           <a:xfrm>
             <a:off x="838080" y="365040"/>
-            <a:ext cx="10508400" cy="536400"/>
+            <a:ext cx="10507320" cy="535320"/>
           </a:xfrm>
           <a:prstGeom prst="rect">
             <a:avLst/>
@@ -8032,7 +7860,7 @@
         <p:spPr>
           <a:xfrm>
             <a:off x="2160000" y="1260000"/>
-            <a:ext cx="8458920" cy="4679280"/>
+            <a:ext cx="8457840" cy="4678200"/>
           </a:xfrm>
           <a:prstGeom prst="rect">
             <a:avLst/>
@@ -8078,7 +7906,7 @@
       </p:grpSpPr>
       <p:sp>
         <p:nvSpPr>
-          <p:cNvPr id="168" name="PlaceHolder 1"/>
+          <p:cNvPr id="165" name="PlaceHolder 1"/>
           <p:cNvSpPr>
             <a:spLocks noGrp="1"/>
           </p:cNvSpPr>
@@ -8089,7 +7917,7 @@
         <p:spPr>
           <a:xfrm>
             <a:off x="838080" y="365040"/>
-            <a:ext cx="10508400" cy="536400"/>
+            <a:ext cx="10512720" cy="540720"/>
           </a:xfrm>
           <a:prstGeom prst="rect">
             <a:avLst/>
@@ -8120,6 +7948,249 @@
               <a:t>Regresión Logística</a:t>
             </a:r>
             <a:endParaRPr b="0" lang="en-US" sz="2400" spc="-1" strike="noStrike">
+              <a:latin typeface="Arial"/>
+            </a:endParaRPr>
+          </a:p>
+        </p:txBody>
+      </p:sp>
+      <p:sp>
+        <p:nvSpPr>
+          <p:cNvPr id="166" name="PlaceHolder 2"/>
+          <p:cNvSpPr>
+            <a:spLocks noGrp="1"/>
+          </p:cNvSpPr>
+          <p:nvPr>
+            <p:ph/>
+          </p:nvPr>
+        </p:nvSpPr>
+        <p:spPr>
+          <a:xfrm>
+            <a:off x="2340000" y="1260000"/>
+            <a:ext cx="8818560" cy="537480"/>
+          </a:xfrm>
+          <a:prstGeom prst="rect">
+            <a:avLst/>
+          </a:prstGeom>
+          <a:noFill/>
+          <a:ln w="0">
+            <a:noFill/>
+          </a:ln>
+        </p:spPr>
+        <p:txBody>
+          <a:bodyPr lIns="90000" rIns="90000" tIns="45000" bIns="45000" anchor="t">
+            <a:noAutofit/>
+          </a:bodyPr>
+          <a:p>
+            <a:pPr marL="228600" indent="-228600">
+              <a:lnSpc>
+                <a:spcPct val="90000"/>
+              </a:lnSpc>
+              <a:spcBef>
+                <a:spcPts val="1001"/>
+              </a:spcBef>
+              <a:buClr>
+                <a:srgbClr val="000000"/>
+              </a:buClr>
+              <a:buFont typeface="Arial"/>
+              <a:buChar char="•"/>
+            </a:pPr>
+            <a:r>
+              <a:rPr b="0" lang="es-ES" sz="2600" spc="-1" strike="noStrike">
+                <a:solidFill>
+                  <a:srgbClr val="ff0000"/>
+                </a:solidFill>
+                <a:latin typeface="Calibri"/>
+              </a:rPr>
+              <a:t>ESCALAR LOS DATOS ANTES DE USAR REGRESIÓN LOGÍSTICA</a:t>
+            </a:r>
+            <a:endParaRPr b="0" lang="en-US" sz="2600" spc="-1" strike="noStrike">
+              <a:latin typeface="Arial"/>
+            </a:endParaRPr>
+          </a:p>
+        </p:txBody>
+      </p:sp>
+      <p:pic>
+        <p:nvPicPr>
+          <p:cNvPr id="167" name="" descr=""/>
+          <p:cNvPicPr/>
+          <p:nvPr/>
+        </p:nvPicPr>
+        <p:blipFill>
+          <a:blip r:embed="rId1"/>
+          <a:stretch/>
+        </p:blipFill>
+        <p:spPr>
+          <a:xfrm>
+            <a:off x="7094880" y="2700000"/>
+            <a:ext cx="3882600" cy="3108600"/>
+          </a:xfrm>
+          <a:prstGeom prst="rect">
+            <a:avLst/>
+          </a:prstGeom>
+          <a:ln w="0">
+            <a:noFill/>
+          </a:ln>
+        </p:spPr>
+      </p:pic>
+      <p:sp>
+        <p:nvSpPr>
+          <p:cNvPr id="168" name=""/>
+          <p:cNvSpPr/>
+          <p:nvPr/>
+        </p:nvSpPr>
+        <p:spPr>
+          <a:xfrm>
+            <a:off x="889920" y="2160000"/>
+            <a:ext cx="5037480" cy="959400"/>
+          </a:xfrm>
+          <a:prstGeom prst="rect">
+            <a:avLst/>
+          </a:prstGeom>
+          <a:noFill/>
+          <a:ln w="0">
+            <a:noFill/>
+          </a:ln>
+        </p:spPr>
+        <p:style>
+          <a:lnRef idx="0"/>
+          <a:fillRef idx="0"/>
+          <a:effectRef idx="0"/>
+          <a:fontRef idx="minor"/>
+        </p:style>
+        <p:txBody>
+          <a:bodyPr lIns="90000" rIns="90000" tIns="45000" bIns="45000" anchor="t">
+            <a:noAutofit/>
+          </a:bodyPr>
+          <a:p>
+            <a:pPr>
+              <a:lnSpc>
+                <a:spcPct val="100000"/>
+              </a:lnSpc>
+              <a:spcBef>
+                <a:spcPts val="1191"/>
+              </a:spcBef>
+              <a:spcAft>
+                <a:spcPts val="992"/>
+              </a:spcAft>
+              <a:buNone/>
+            </a:pPr>
+            <a:r>
+              <a:rPr b="1" lang="en-US" sz="2400" spc="-1" strike="noStrike">
+                <a:solidFill>
+                  <a:srgbClr val="000000"/>
+                </a:solidFill>
+                <a:latin typeface="Arial"/>
+                <a:ea typeface="DejaVu Sans"/>
+              </a:rPr>
+              <a:t>No es obligatorio, pero es una práctica recomendada</a:t>
+            </a:r>
+            <a:endParaRPr b="0" lang="en-US" sz="2400" spc="-1" strike="noStrike">
+              <a:latin typeface="Arial"/>
+            </a:endParaRPr>
+          </a:p>
+          <a:p>
+            <a:pPr>
+              <a:lnSpc>
+                <a:spcPct val="100000"/>
+              </a:lnSpc>
+              <a:spcBef>
+                <a:spcPts val="1191"/>
+              </a:spcBef>
+              <a:spcAft>
+                <a:spcPts val="992"/>
+              </a:spcAft>
+              <a:buNone/>
+            </a:pPr>
+            <a:r>
+              <a:rPr b="1" lang="en-US" sz="2400" spc="-1" strike="noStrike">
+                <a:solidFill>
+                  <a:srgbClr val="000000"/>
+                </a:solidFill>
+                <a:latin typeface="Arial"/>
+                <a:ea typeface="DejaVu Sans"/>
+              </a:rPr>
+              <a:t>StandardScaler</a:t>
+            </a:r>
+            <a:endParaRPr b="0" lang="en-US" sz="2400" spc="-1" strike="noStrike">
+              <a:latin typeface="Arial"/>
+            </a:endParaRPr>
+          </a:p>
+          <a:p>
+            <a:pPr>
+              <a:lnSpc>
+                <a:spcPct val="100000"/>
+              </a:lnSpc>
+              <a:spcBef>
+                <a:spcPts val="1191"/>
+              </a:spcBef>
+              <a:spcAft>
+                <a:spcPts val="992"/>
+              </a:spcAft>
+              <a:buNone/>
+            </a:pPr>
+            <a:r>
+              <a:rPr b="0" lang="es-ES" sz="2000" spc="-1" strike="noStrike">
+                <a:solidFill>
+                  <a:srgbClr val="000000"/>
+                </a:solidFill>
+                <a:latin typeface="Calibri"/>
+                <a:ea typeface="DejaVu Sans"/>
+              </a:rPr>
+              <a:t>Recomendado para la mayoría de los casos</a:t>
+            </a:r>
+            <a:endParaRPr b="0" lang="en-US" sz="2000" spc="-1" strike="noStrike">
+              <a:latin typeface="Arial"/>
+            </a:endParaRPr>
+          </a:p>
+          <a:p>
+            <a:pPr>
+              <a:lnSpc>
+                <a:spcPct val="100000"/>
+              </a:lnSpc>
+              <a:buNone/>
+            </a:pPr>
+            <a:r>
+              <a:rPr b="1" lang="es-ES" sz="2000" spc="-1" strike="noStrike">
+                <a:solidFill>
+                  <a:srgbClr val="000000"/>
+                </a:solidFill>
+                <a:latin typeface="Calibri"/>
+                <a:ea typeface="DejaVu Sans"/>
+              </a:rPr>
+              <a:t>Convergencia más rápida</a:t>
+            </a:r>
+            <a:endParaRPr b="0" lang="en-US" sz="2000" spc="-1" strike="noStrike">
+              <a:latin typeface="Arial"/>
+            </a:endParaRPr>
+          </a:p>
+          <a:p>
+            <a:pPr>
+              <a:lnSpc>
+                <a:spcPct val="100000"/>
+              </a:lnSpc>
+              <a:buNone/>
+            </a:pPr>
+            <a:r>
+              <a:rPr b="1" lang="es-ES" sz="2000" spc="-1" strike="noStrike">
+                <a:solidFill>
+                  <a:srgbClr val="000000"/>
+                </a:solidFill>
+                <a:latin typeface="Calibri"/>
+                <a:ea typeface="DejaVu Sans"/>
+              </a:rPr>
+              <a:t>Regularización:</a:t>
+            </a:r>
+            <a:r>
+              <a:rPr b="0" lang="es-ES" sz="2000" spc="-1" strike="noStrike">
+                <a:solidFill>
+                  <a:srgbClr val="000000"/>
+                </a:solidFill>
+                <a:latin typeface="Calibri"/>
+                <a:ea typeface="DejaVu Sans"/>
+              </a:rPr>
+              <a:t> Todas la características contribuyan por igual  a la penalización de la regulación, evitando que las características con rangos más grandes dominen el modelo</a:t>
+            </a:r>
+            <a:endParaRPr b="0" lang="en-US" sz="2000" spc="-1" strike="noStrike">
               <a:latin typeface="Arial"/>
             </a:endParaRPr>
           </a:p>
@@ -8132,13 +8203,13 @@
           <p:nvPr/>
         </p:nvPicPr>
         <p:blipFill>
-          <a:blip r:embed="rId1"/>
+          <a:blip r:embed="rId2"/>
           <a:stretch/>
         </p:blipFill>
         <p:spPr>
           <a:xfrm>
-            <a:off x="1980000" y="1260000"/>
-            <a:ext cx="8999280" cy="4788000"/>
+            <a:off x="1260000" y="971280"/>
+            <a:ext cx="827280" cy="827280"/>
           </a:xfrm>
           <a:prstGeom prst="rect">
             <a:avLst/>
@@ -8195,7 +8266,7 @@
         <p:spPr>
           <a:xfrm>
             <a:off x="838080" y="365040"/>
-            <a:ext cx="10508400" cy="536400"/>
+            <a:ext cx="10507320" cy="535320"/>
           </a:xfrm>
           <a:prstGeom prst="rect">
             <a:avLst/>
@@ -8243,8 +8314,8 @@
         </p:blipFill>
         <p:spPr>
           <a:xfrm>
-            <a:off x="3223080" y="1080000"/>
-            <a:ext cx="5445360" cy="5039280"/>
+            <a:off x="1980000" y="1260000"/>
+            <a:ext cx="8998200" cy="4786920"/>
           </a:xfrm>
           <a:prstGeom prst="rect">
             <a:avLst/>
@@ -8301,7 +8372,7 @@
         <p:spPr>
           <a:xfrm>
             <a:off x="838080" y="365040"/>
-            <a:ext cx="10508400" cy="536400"/>
+            <a:ext cx="10507320" cy="535320"/>
           </a:xfrm>
           <a:prstGeom prst="rect">
             <a:avLst/>
@@ -8349,8 +8420,8 @@
         </p:blipFill>
         <p:spPr>
           <a:xfrm>
-            <a:off x="3060000" y="1080000"/>
-            <a:ext cx="5939640" cy="5043600"/>
+            <a:off x="3223080" y="1080000"/>
+            <a:ext cx="5444280" cy="5038200"/>
           </a:xfrm>
           <a:prstGeom prst="rect">
             <a:avLst/>
@@ -8407,7 +8478,7 @@
         <p:spPr>
           <a:xfrm>
             <a:off x="838080" y="365040"/>
-            <a:ext cx="10508400" cy="536400"/>
+            <a:ext cx="10507320" cy="535320"/>
           </a:xfrm>
           <a:prstGeom prst="rect">
             <a:avLst/>
@@ -8455,8 +8526,8 @@
         </p:blipFill>
         <p:spPr>
           <a:xfrm>
-            <a:off x="448200" y="1484280"/>
-            <a:ext cx="11251080" cy="3735000"/>
+            <a:off x="3060000" y="1080000"/>
+            <a:ext cx="5938560" cy="5042520"/>
           </a:xfrm>
           <a:prstGeom prst="rect">
             <a:avLst/>
@@ -8513,7 +8584,7 @@
         <p:spPr>
           <a:xfrm>
             <a:off x="838080" y="365040"/>
-            <a:ext cx="10508400" cy="536400"/>
+            <a:ext cx="10507320" cy="535320"/>
           </a:xfrm>
           <a:prstGeom prst="rect">
             <a:avLst/>
@@ -8561,31 +8632,8 @@
         </p:blipFill>
         <p:spPr>
           <a:xfrm>
-            <a:off x="2136600" y="5721840"/>
-            <a:ext cx="9382680" cy="397440"/>
-          </a:xfrm>
-          <a:prstGeom prst="rect">
-            <a:avLst/>
-          </a:prstGeom>
-          <a:ln w="0">
-            <a:noFill/>
-          </a:ln>
-        </p:spPr>
-      </p:pic>
-      <p:pic>
-        <p:nvPicPr>
-          <p:cNvPr id="178" name="" descr=""/>
-          <p:cNvPicPr/>
-          <p:nvPr/>
-        </p:nvPicPr>
-        <p:blipFill>
-          <a:blip r:embed="rId2"/>
-          <a:stretch/>
-        </p:blipFill>
-        <p:spPr>
-          <a:xfrm>
-            <a:off x="1261800" y="1064880"/>
-            <a:ext cx="8997480" cy="4348800"/>
+            <a:off x="448200" y="1484280"/>
+            <a:ext cx="11250000" cy="3733920"/>
           </a:xfrm>
           <a:prstGeom prst="rect">
             <a:avLst/>
@@ -8631,7 +8679,7 @@
       </p:grpSpPr>
       <p:sp>
         <p:nvSpPr>
-          <p:cNvPr id="179" name="PlaceHolder 1"/>
+          <p:cNvPr id="178" name="PlaceHolder 1"/>
           <p:cNvSpPr>
             <a:spLocks noGrp="1"/>
           </p:cNvSpPr>
@@ -8642,7 +8690,7 @@
         <p:spPr>
           <a:xfrm>
             <a:off x="838080" y="365040"/>
-            <a:ext cx="10508400" cy="536400"/>
+            <a:ext cx="10507320" cy="535320"/>
           </a:xfrm>
           <a:prstGeom prst="rect">
             <a:avLst/>
@@ -8678,6 +8726,29 @@
           </a:p>
         </p:txBody>
       </p:sp>
+      <p:pic>
+        <p:nvPicPr>
+          <p:cNvPr id="179" name="" descr=""/>
+          <p:cNvPicPr/>
+          <p:nvPr/>
+        </p:nvPicPr>
+        <p:blipFill>
+          <a:blip r:embed="rId1"/>
+          <a:stretch/>
+        </p:blipFill>
+        <p:spPr>
+          <a:xfrm>
+            <a:off x="2136600" y="5721840"/>
+            <a:ext cx="9381600" cy="396360"/>
+          </a:xfrm>
+          <a:prstGeom prst="rect">
+            <a:avLst/>
+          </a:prstGeom>
+          <a:ln w="0">
+            <a:noFill/>
+          </a:ln>
+        </p:spPr>
+      </p:pic>
       <p:pic>
         <p:nvPicPr>
           <p:cNvPr id="180" name="" descr=""/>
@@ -8685,96 +8756,13 @@
           <p:nvPr/>
         </p:nvPicPr>
         <p:blipFill>
-          <a:blip r:embed="rId1"/>
-          <a:stretch/>
-        </p:blipFill>
-        <p:spPr>
-          <a:xfrm>
-            <a:off x="7560000" y="2266560"/>
-            <a:ext cx="4587120" cy="3328920"/>
-          </a:xfrm>
-          <a:prstGeom prst="rect">
-            <a:avLst/>
-          </a:prstGeom>
-          <a:ln w="0">
-            <a:noFill/>
-          </a:ln>
-        </p:spPr>
-      </p:pic>
-      <p:sp>
-        <p:nvSpPr>
-          <p:cNvPr id="181" name=""/>
-          <p:cNvSpPr/>
-          <p:nvPr/>
-        </p:nvSpPr>
-        <p:spPr>
-          <a:xfrm>
-            <a:off x="975240" y="1260000"/>
-            <a:ext cx="6404400" cy="399600"/>
-          </a:xfrm>
-          <a:prstGeom prst="rect">
-            <a:avLst/>
-          </a:prstGeom>
-          <a:noFill/>
-          <a:ln w="0">
-            <a:noFill/>
-          </a:ln>
-        </p:spPr>
-        <p:style>
-          <a:lnRef idx="0"/>
-          <a:fillRef idx="0"/>
-          <a:effectRef idx="0"/>
-          <a:fontRef idx="minor"/>
-        </p:style>
-        <p:txBody>
-          <a:bodyPr lIns="90000" rIns="90000" tIns="45000" bIns="45000" anchor="t">
-            <a:noAutofit/>
-          </a:bodyPr>
-          <a:p>
-            <a:pPr>
-              <a:lnSpc>
-                <a:spcPct val="100000"/>
-              </a:lnSpc>
-              <a:buNone/>
-            </a:pPr>
-            <a:r>
-              <a:rPr b="1" lang="es-ES" sz="2400" spc="-1" strike="noStrike">
-                <a:latin typeface="Calibri"/>
-              </a:rPr>
-              <a:t> </a:t>
-            </a:r>
-            <a:r>
-              <a:rPr b="1" lang="es-ES" sz="2400" spc="-1" strike="noStrike">
-                <a:latin typeface="Calibri"/>
-              </a:rPr>
-              <a:t>Función de coste: Log-Loss</a:t>
-            </a:r>
-            <a:r>
-              <a:rPr b="0" lang="es-ES" sz="2400" spc="-1" strike="noStrike">
-                <a:latin typeface="C059"/>
-              </a:rPr>
-              <a:t> </a:t>
-            </a:r>
-            <a:endParaRPr b="0" lang="en-US" sz="2400" spc="-1" strike="noStrike">
-              <a:latin typeface="Arial"/>
-            </a:endParaRPr>
-          </a:p>
-        </p:txBody>
-      </p:sp>
-      <p:pic>
-        <p:nvPicPr>
-          <p:cNvPr id="182" name="" descr=""/>
-          <p:cNvPicPr/>
-          <p:nvPr/>
-        </p:nvPicPr>
-        <p:blipFill>
           <a:blip r:embed="rId2"/>
           <a:stretch/>
         </p:blipFill>
         <p:spPr>
           <a:xfrm>
-            <a:off x="180000" y="2340000"/>
-            <a:ext cx="7232760" cy="3239640"/>
+            <a:off x="1261800" y="1064880"/>
+            <a:ext cx="8996400" cy="4347720"/>
           </a:xfrm>
           <a:prstGeom prst="rect">
             <a:avLst/>
@@ -8820,7 +8808,7 @@
       </p:grpSpPr>
       <p:sp>
         <p:nvSpPr>
-          <p:cNvPr id="183" name="PlaceHolder 1"/>
+          <p:cNvPr id="181" name="PlaceHolder 1"/>
           <p:cNvSpPr>
             <a:spLocks noGrp="1"/>
           </p:cNvSpPr>
@@ -8831,7 +8819,7 @@
         <p:spPr>
           <a:xfrm>
             <a:off x="838080" y="365040"/>
-            <a:ext cx="10508400" cy="536400"/>
+            <a:ext cx="10507320" cy="535320"/>
           </a:xfrm>
           <a:prstGeom prst="rect">
             <a:avLst/>
@@ -8867,191 +8855,124 @@
           </a:p>
         </p:txBody>
       </p:sp>
-      <p:sp>
-        <p:nvSpPr>
-          <p:cNvPr id="184" name="PlaceHolder 2"/>
-          <p:cNvSpPr>
-            <a:spLocks noGrp="1"/>
-          </p:cNvSpPr>
-          <p:nvPr>
-            <p:ph/>
-          </p:nvPr>
-        </p:nvSpPr>
-        <p:spPr>
-          <a:xfrm>
-            <a:off x="838080" y="1124640"/>
-            <a:ext cx="10508400" cy="3195000"/>
-          </a:xfrm>
-          <a:prstGeom prst="rect">
-            <a:avLst/>
-          </a:prstGeom>
-          <a:noFill/>
-          <a:ln w="0">
-            <a:noFill/>
-          </a:ln>
-        </p:spPr>
+      <p:pic>
+        <p:nvPicPr>
+          <p:cNvPr id="182" name="" descr=""/>
+          <p:cNvPicPr/>
+          <p:nvPr/>
+        </p:nvPicPr>
+        <p:blipFill>
+          <a:blip r:embed="rId1"/>
+          <a:stretch/>
+        </p:blipFill>
+        <p:spPr>
+          <a:xfrm>
+            <a:off x="7560000" y="2266560"/>
+            <a:ext cx="4586040" cy="3327840"/>
+          </a:xfrm>
+          <a:prstGeom prst="rect">
+            <a:avLst/>
+          </a:prstGeom>
+          <a:ln w="0">
+            <a:noFill/>
+          </a:ln>
+        </p:spPr>
+      </p:pic>
+      <p:sp>
+        <p:nvSpPr>
+          <p:cNvPr id="183" name=""/>
+          <p:cNvSpPr/>
+          <p:nvPr/>
+        </p:nvSpPr>
+        <p:spPr>
+          <a:xfrm>
+            <a:off x="975240" y="1260000"/>
+            <a:ext cx="6403320" cy="398520"/>
+          </a:xfrm>
+          <a:prstGeom prst="rect">
+            <a:avLst/>
+          </a:prstGeom>
+          <a:noFill/>
+          <a:ln w="0">
+            <a:noFill/>
+          </a:ln>
+        </p:spPr>
+        <p:style>
+          <a:lnRef idx="0"/>
+          <a:fillRef idx="0"/>
+          <a:effectRef idx="0"/>
+          <a:fontRef idx="minor"/>
+        </p:style>
         <p:txBody>
           <a:bodyPr lIns="90000" rIns="90000" tIns="45000" bIns="45000" anchor="t">
             <a:noAutofit/>
           </a:bodyPr>
           <a:p>
-            <a:pPr marL="432000" indent="-324000">
+            <a:pPr>
               <a:lnSpc>
                 <a:spcPct val="100000"/>
               </a:lnSpc>
-              <a:buClr>
-                <a:srgbClr val="000000"/>
-              </a:buClr>
-              <a:buFont typeface="Wingdings" charset="2"/>
-              <a:buChar char=""/>
-            </a:pPr>
-            <a:r>
-              <a:rPr b="0" lang="en-US" sz="1800" spc="-1" strike="noStrike">
-                <a:latin typeface="Arial"/>
+              <a:buNone/>
+            </a:pPr>
+            <a:r>
+              <a:rPr b="1" lang="es-ES" sz="2400" spc="-1" strike="noStrike">
+                <a:solidFill>
+                  <a:srgbClr val="000000"/>
+                </a:solidFill>
+                <a:latin typeface="Calibri"/>
+                <a:ea typeface="DejaVu Sans"/>
               </a:rPr>
               <a:t> </a:t>
             </a:r>
             <a:r>
               <a:rPr b="1" lang="es-ES" sz="2400" spc="-1" strike="noStrike">
+                <a:solidFill>
+                  <a:srgbClr val="000000"/>
+                </a:solidFill>
                 <a:latin typeface="Calibri"/>
                 <a:ea typeface="DejaVu Sans"/>
               </a:rPr>
-              <a:t>Supuestos de la regresión logística</a:t>
+              <a:t>Función de coste: Log-Loss</a:t>
+            </a:r>
+            <a:r>
+              <a:rPr b="0" lang="es-ES" sz="2400" spc="-1" strike="noStrike">
+                <a:solidFill>
+                  <a:srgbClr val="000000"/>
+                </a:solidFill>
+                <a:latin typeface="C059"/>
+                <a:ea typeface="DejaVu Sans"/>
+              </a:rPr>
+              <a:t> </a:t>
             </a:r>
             <a:endParaRPr b="0" lang="en-US" sz="2400" spc="-1" strike="noStrike">
               <a:latin typeface="Arial"/>
             </a:endParaRPr>
           </a:p>
-          <a:p>
-            <a:pPr>
-              <a:lnSpc>
-                <a:spcPct val="100000"/>
-              </a:lnSpc>
-              <a:buNone/>
-            </a:pPr>
-            <a:endParaRPr b="0" lang="en-US" sz="2000" spc="-1" strike="noStrike">
-              <a:latin typeface="Arial"/>
-            </a:endParaRPr>
-          </a:p>
-          <a:p>
-            <a:pPr marL="450360" indent="-179640">
-              <a:lnSpc>
-                <a:spcPct val="115000"/>
-              </a:lnSpc>
-              <a:spcAft>
-                <a:spcPts val="1236"/>
-              </a:spcAft>
-              <a:buNone/>
-              <a:tabLst>
-                <a:tab algn="l" pos="0"/>
-              </a:tabLst>
-            </a:pPr>
-            <a:r>
-              <a:rPr b="1" lang="en-US" sz="2000" spc="-1" strike="noStrike">
-                <a:latin typeface="Calibri"/>
-                <a:ea typeface="DejaVu Sans"/>
-              </a:rPr>
-              <a:t>Linealidad</a:t>
-            </a:r>
-            <a:r>
-              <a:rPr b="0" lang="en-US" sz="2000" spc="-1" strike="noStrike">
-                <a:latin typeface="Calibri"/>
-                <a:ea typeface="DejaVu Sans"/>
-              </a:rPr>
-              <a:t>: la relación entre variables es lineal.</a:t>
-            </a:r>
-            <a:endParaRPr b="0" lang="en-US" sz="2000" spc="-1" strike="noStrike">
-              <a:latin typeface="Arial"/>
-            </a:endParaRPr>
-          </a:p>
-          <a:p>
-            <a:pPr marL="450360" indent="-179640">
-              <a:lnSpc>
-                <a:spcPct val="115000"/>
-              </a:lnSpc>
-              <a:spcAft>
-                <a:spcPts val="1236"/>
-              </a:spcAft>
-              <a:buNone/>
-              <a:tabLst>
-                <a:tab algn="l" pos="0"/>
-              </a:tabLst>
-            </a:pPr>
-            <a:r>
-              <a:rPr b="1" lang="en-US" sz="2000" spc="-1" strike="noStrike">
-                <a:latin typeface="Calibri"/>
-                <a:ea typeface="DejaVu Sans"/>
-              </a:rPr>
-              <a:t>Independencia</a:t>
-            </a:r>
-            <a:r>
-              <a:rPr b="0" lang="en-US" sz="2000" spc="-1" strike="noStrike">
-                <a:latin typeface="Calibri"/>
-                <a:ea typeface="DejaVu Sans"/>
-              </a:rPr>
-              <a:t>: las observaciones son independientes.</a:t>
-            </a:r>
-            <a:endParaRPr b="0" lang="en-US" sz="2000" spc="-1" strike="noStrike">
-              <a:latin typeface="Arial"/>
-            </a:endParaRPr>
-          </a:p>
-          <a:p>
-            <a:pPr marL="450360" indent="-179640">
-              <a:lnSpc>
-                <a:spcPct val="115000"/>
-              </a:lnSpc>
-              <a:spcAft>
-                <a:spcPts val="1236"/>
-              </a:spcAft>
-              <a:buNone/>
-              <a:tabLst>
-                <a:tab algn="l" pos="0"/>
-              </a:tabLst>
-            </a:pPr>
-            <a:r>
-              <a:rPr b="1" lang="en-US" sz="2000" spc="-1" strike="noStrike">
-                <a:latin typeface="Calibri"/>
-                <a:ea typeface="DejaVu Sans"/>
-              </a:rPr>
-              <a:t>Tamaño de la muestra: Suficientemente grande para estimar probabilidades de forma estable</a:t>
-            </a:r>
-            <a:endParaRPr b="0" lang="en-US" sz="2000" spc="-1" strike="noStrike">
-              <a:latin typeface="Arial"/>
-            </a:endParaRPr>
-          </a:p>
-          <a:p>
-            <a:pPr marL="450360" indent="-179640">
-              <a:lnSpc>
-                <a:spcPct val="115000"/>
-              </a:lnSpc>
-              <a:spcAft>
-                <a:spcPts val="1236"/>
-              </a:spcAft>
-              <a:buNone/>
-              <a:tabLst>
-                <a:tab algn="l" pos="0"/>
-              </a:tabLst>
-            </a:pPr>
-            <a:r>
-              <a:rPr b="1" lang="en-US" sz="2000" spc="-1" strike="noStrike">
-                <a:latin typeface="Calibri"/>
-                <a:ea typeface="DejaVu Sans"/>
-              </a:rPr>
-              <a:t>No multicolinealidad excesiva</a:t>
-            </a:r>
-            <a:r>
-              <a:rPr b="0" lang="en-US" sz="2000" spc="-1" strike="noStrike">
-                <a:latin typeface="Calibri"/>
-                <a:ea typeface="DejaVu Sans"/>
-              </a:rPr>
-              <a:t>: las variables predictoras no deben estar demasiado correlacionadas entre sí.</a:t>
-            </a:r>
-            <a:endParaRPr b="0" lang="en-US" sz="2000" spc="-1" strike="noStrike">
-              <a:latin typeface="Arial"/>
-            </a:endParaRPr>
-          </a:p>
-        </p:txBody>
-      </p:sp>
+        </p:txBody>
+      </p:sp>
+      <p:pic>
+        <p:nvPicPr>
+          <p:cNvPr id="184" name="" descr=""/>
+          <p:cNvPicPr/>
+          <p:nvPr/>
+        </p:nvPicPr>
+        <p:blipFill>
+          <a:blip r:embed="rId2"/>
+          <a:stretch/>
+        </p:blipFill>
+        <p:spPr>
+          <a:xfrm>
+            <a:off x="180000" y="2340000"/>
+            <a:ext cx="7231680" cy="3238560"/>
+          </a:xfrm>
+          <a:prstGeom prst="rect">
+            <a:avLst/>
+          </a:prstGeom>
+          <a:ln w="0">
+            <a:noFill/>
+          </a:ln>
+        </p:spPr>
+      </p:pic>
     </p:spTree>
   </p:cSld>
   <mc:AlternateContent>
@@ -9099,7 +9020,7 @@
         <p:spPr>
           <a:xfrm>
             <a:off x="838080" y="365040"/>
-            <a:ext cx="10508400" cy="536400"/>
+            <a:ext cx="10507320" cy="535320"/>
           </a:xfrm>
           <a:prstGeom prst="rect">
             <a:avLst/>
@@ -9135,29 +9056,191 @@
           </a:p>
         </p:txBody>
       </p:sp>
-      <p:pic>
-        <p:nvPicPr>
-          <p:cNvPr id="186" name="" descr=""/>
-          <p:cNvPicPr/>
-          <p:nvPr/>
-        </p:nvPicPr>
-        <p:blipFill>
-          <a:blip r:embed="rId1"/>
-          <a:stretch/>
-        </p:blipFill>
-        <p:spPr>
-          <a:xfrm>
-            <a:off x="720000" y="1620000"/>
-            <a:ext cx="10913040" cy="3351240"/>
-          </a:xfrm>
-          <a:prstGeom prst="rect">
-            <a:avLst/>
-          </a:prstGeom>
-          <a:ln w="0">
-            <a:noFill/>
-          </a:ln>
-        </p:spPr>
-      </p:pic>
+      <p:sp>
+        <p:nvSpPr>
+          <p:cNvPr id="186" name="PlaceHolder 2"/>
+          <p:cNvSpPr>
+            <a:spLocks noGrp="1"/>
+          </p:cNvSpPr>
+          <p:nvPr>
+            <p:ph/>
+          </p:nvPr>
+        </p:nvSpPr>
+        <p:spPr>
+          <a:xfrm>
+            <a:off x="838080" y="1124640"/>
+            <a:ext cx="10507320" cy="3193920"/>
+          </a:xfrm>
+          <a:prstGeom prst="rect">
+            <a:avLst/>
+          </a:prstGeom>
+          <a:noFill/>
+          <a:ln w="0">
+            <a:noFill/>
+          </a:ln>
+        </p:spPr>
+        <p:txBody>
+          <a:bodyPr lIns="90000" rIns="90000" tIns="45000" bIns="45000" anchor="t">
+            <a:noAutofit/>
+          </a:bodyPr>
+          <a:p>
+            <a:pPr marL="432000" indent="-324000">
+              <a:lnSpc>
+                <a:spcPct val="100000"/>
+              </a:lnSpc>
+              <a:buClr>
+                <a:srgbClr val="000000"/>
+              </a:buClr>
+              <a:buFont typeface="Wingdings" charset="2"/>
+              <a:buChar char=""/>
+            </a:pPr>
+            <a:r>
+              <a:rPr b="0" lang="en-US" sz="1800" spc="-1" strike="noStrike">
+                <a:latin typeface="Arial"/>
+              </a:rPr>
+              <a:t> </a:t>
+            </a:r>
+            <a:r>
+              <a:rPr b="1" lang="es-ES" sz="2400" spc="-1" strike="noStrike">
+                <a:latin typeface="Calibri"/>
+                <a:ea typeface="DejaVu Sans"/>
+              </a:rPr>
+              <a:t>Supuestos de la regresión logística</a:t>
+            </a:r>
+            <a:endParaRPr b="0" lang="en-US" sz="2400" spc="-1" strike="noStrike">
+              <a:latin typeface="Arial"/>
+            </a:endParaRPr>
+          </a:p>
+          <a:p>
+            <a:pPr>
+              <a:lnSpc>
+                <a:spcPct val="100000"/>
+              </a:lnSpc>
+              <a:buNone/>
+            </a:pPr>
+            <a:endParaRPr b="0" lang="en-US" sz="2000" spc="-1" strike="noStrike">
+              <a:latin typeface="Arial"/>
+            </a:endParaRPr>
+          </a:p>
+          <a:p>
+            <a:pPr marL="450360" indent="-179640">
+              <a:lnSpc>
+                <a:spcPct val="115000"/>
+              </a:lnSpc>
+              <a:spcAft>
+                <a:spcPts val="1236"/>
+              </a:spcAft>
+              <a:buNone/>
+              <a:tabLst>
+                <a:tab algn="l" pos="0"/>
+              </a:tabLst>
+            </a:pPr>
+            <a:r>
+              <a:rPr b="1" lang="en-US" sz="2000" spc="-1" strike="noStrike">
+                <a:latin typeface="Calibri"/>
+                <a:ea typeface="DejaVu Sans"/>
+              </a:rPr>
+              <a:t>Linealidad</a:t>
+            </a:r>
+            <a:r>
+              <a:rPr b="0" lang="en-US" sz="2000" spc="-1" strike="noStrike">
+                <a:latin typeface="Calibri"/>
+                <a:ea typeface="DejaVu Sans"/>
+              </a:rPr>
+              <a:t>: la relación entre variables es lineal.</a:t>
+            </a:r>
+            <a:endParaRPr b="0" lang="en-US" sz="2000" spc="-1" strike="noStrike">
+              <a:latin typeface="Arial"/>
+            </a:endParaRPr>
+          </a:p>
+          <a:p>
+            <a:pPr marL="450360" indent="-179640">
+              <a:lnSpc>
+                <a:spcPct val="115000"/>
+              </a:lnSpc>
+              <a:spcAft>
+                <a:spcPts val="1236"/>
+              </a:spcAft>
+              <a:buNone/>
+              <a:tabLst>
+                <a:tab algn="l" pos="0"/>
+              </a:tabLst>
+            </a:pPr>
+            <a:r>
+              <a:rPr b="1" lang="en-US" sz="2000" spc="-1" strike="noStrike">
+                <a:latin typeface="Calibri"/>
+                <a:ea typeface="DejaVu Sans"/>
+              </a:rPr>
+              <a:t>Independencia</a:t>
+            </a:r>
+            <a:r>
+              <a:rPr b="0" lang="en-US" sz="2000" spc="-1" strike="noStrike">
+                <a:latin typeface="Calibri"/>
+                <a:ea typeface="DejaVu Sans"/>
+              </a:rPr>
+              <a:t>: las observaciones son independientes.</a:t>
+            </a:r>
+            <a:endParaRPr b="0" lang="en-US" sz="2000" spc="-1" strike="noStrike">
+              <a:latin typeface="Arial"/>
+            </a:endParaRPr>
+          </a:p>
+          <a:p>
+            <a:pPr marL="450360" indent="-179640">
+              <a:lnSpc>
+                <a:spcPct val="115000"/>
+              </a:lnSpc>
+              <a:spcAft>
+                <a:spcPts val="1236"/>
+              </a:spcAft>
+              <a:buNone/>
+              <a:tabLst>
+                <a:tab algn="l" pos="0"/>
+              </a:tabLst>
+            </a:pPr>
+            <a:r>
+              <a:rPr b="1" lang="en-US" sz="2000" spc="-1" strike="noStrike">
+                <a:latin typeface="Calibri"/>
+                <a:ea typeface="DejaVu Sans"/>
+              </a:rPr>
+              <a:t>Tamaño de la muestra: Suficientemente grande para estimar probabilidades de forma estable</a:t>
+            </a:r>
+            <a:endParaRPr b="0" lang="en-US" sz="2000" spc="-1" strike="noStrike">
+              <a:latin typeface="Arial"/>
+            </a:endParaRPr>
+          </a:p>
+          <a:p>
+            <a:pPr marL="450360" indent="-179640">
+              <a:lnSpc>
+                <a:spcPct val="115000"/>
+              </a:lnSpc>
+              <a:spcAft>
+                <a:spcPts val="1236"/>
+              </a:spcAft>
+              <a:buNone/>
+              <a:tabLst>
+                <a:tab algn="l" pos="0"/>
+              </a:tabLst>
+            </a:pPr>
+            <a:r>
+              <a:rPr b="1" lang="en-US" sz="2000" spc="-1" strike="noStrike">
+                <a:latin typeface="Calibri"/>
+                <a:ea typeface="DejaVu Sans"/>
+              </a:rPr>
+              <a:t>No multicolinealidad excesiva</a:t>
+            </a:r>
+            <a:r>
+              <a:rPr b="0" lang="en-US" sz="2000" spc="-1" strike="noStrike">
+                <a:latin typeface="Calibri"/>
+                <a:ea typeface="DejaVu Sans"/>
+              </a:rPr>
+              <a:t>: las variables predictoras no deben estar demasiado correlacionadas entre sí.</a:t>
+            </a:r>
+            <a:endParaRPr b="0" lang="en-US" sz="2000" spc="-1" strike="noStrike">
+              <a:latin typeface="Arial"/>
+            </a:endParaRPr>
+          </a:p>
+        </p:txBody>
+      </p:sp>
     </p:spTree>
   </p:cSld>
   <mc:AlternateContent>
@@ -9205,7 +9288,7 @@
         <p:spPr>
           <a:xfrm>
             <a:off x="838080" y="365040"/>
-            <a:ext cx="10508400" cy="536400"/>
+            <a:ext cx="10507320" cy="535320"/>
           </a:xfrm>
           <a:prstGeom prst="rect">
             <a:avLst/>
@@ -9253,8 +9336,8 @@
         </p:blipFill>
         <p:spPr>
           <a:xfrm>
-            <a:off x="2705760" y="1080000"/>
-            <a:ext cx="6293880" cy="4910760"/>
+            <a:off x="720000" y="1620000"/>
+            <a:ext cx="10911960" cy="3350160"/>
           </a:xfrm>
           <a:prstGeom prst="rect">
             <a:avLst/>
@@ -9311,7 +9394,7 @@
         <p:spPr>
           <a:xfrm>
             <a:off x="838080" y="365040"/>
-            <a:ext cx="10508400" cy="536400"/>
+            <a:ext cx="10507320" cy="535320"/>
           </a:xfrm>
           <a:prstGeom prst="rect">
             <a:avLst/>
@@ -9347,188 +9430,9 @@
           </a:p>
         </p:txBody>
       </p:sp>
-      <p:sp>
-        <p:nvSpPr>
-          <p:cNvPr id="190" name="PlaceHolder 2"/>
-          <p:cNvSpPr>
-            <a:spLocks noGrp="1"/>
-          </p:cNvSpPr>
-          <p:nvPr>
-            <p:ph/>
-          </p:nvPr>
-        </p:nvSpPr>
-        <p:spPr>
-          <a:xfrm>
-            <a:off x="3718080" y="1800000"/>
-            <a:ext cx="7981560" cy="3419640"/>
-          </a:xfrm>
-          <a:prstGeom prst="rect">
-            <a:avLst/>
-          </a:prstGeom>
-          <a:noFill/>
-          <a:ln w="0">
-            <a:noFill/>
-          </a:ln>
-        </p:spPr>
-        <p:txBody>
-          <a:bodyPr lIns="90000" rIns="90000" tIns="45000" bIns="45000" anchor="t">
-            <a:noAutofit/>
-          </a:bodyPr>
-          <a:p>
-            <a:pPr marL="432000" indent="-324000">
-              <a:lnSpc>
-                <a:spcPct val="100000"/>
-              </a:lnSpc>
-              <a:buClr>
-                <a:srgbClr val="000000"/>
-              </a:buClr>
-              <a:buFont typeface="Wingdings" charset="2"/>
-              <a:buChar char=""/>
-            </a:pPr>
-            <a:r>
-              <a:rPr b="1" lang="es-ES" sz="2400" spc="-1" strike="noStrike">
-                <a:latin typeface="Calibri"/>
-              </a:rPr>
-              <a:t> </a:t>
-            </a:r>
-            <a:r>
-              <a:rPr b="1" lang="es-ES" sz="2400" spc="-1" strike="noStrike">
-                <a:latin typeface="Calibri"/>
-              </a:rPr>
-              <a:t>Ventajas</a:t>
-            </a:r>
-            <a:endParaRPr b="0" lang="en-US" sz="2400" spc="-1" strike="noStrike">
-              <a:latin typeface="Arial"/>
-            </a:endParaRPr>
-          </a:p>
-          <a:p>
-            <a:pPr>
-              <a:lnSpc>
-                <a:spcPct val="100000"/>
-              </a:lnSpc>
-              <a:buNone/>
-            </a:pPr>
-            <a:endParaRPr b="0" lang="en-US" sz="2000" spc="-1" strike="noStrike">
-              <a:latin typeface="Arial"/>
-            </a:endParaRPr>
-          </a:p>
-          <a:p>
-            <a:pPr marL="450360" indent="-179640">
-              <a:lnSpc>
-                <a:spcPct val="100000"/>
-              </a:lnSpc>
-              <a:spcBef>
-                <a:spcPts val="1417"/>
-              </a:spcBef>
-              <a:buClr>
-                <a:srgbClr val="000000"/>
-              </a:buClr>
-              <a:buSzPct val="45000"/>
-              <a:buFont typeface="Wingdings" charset="2"/>
-              <a:buChar char=""/>
-              <a:tabLst>
-                <a:tab algn="l" pos="450360"/>
-              </a:tabLst>
-            </a:pPr>
-            <a:r>
-              <a:rPr b="0" lang="es-ES" sz="2000" spc="-1" strike="noStrike">
-                <a:latin typeface="Calibri"/>
-              </a:rPr>
-              <a:t>Fácil de implementar e interpretar.</a:t>
-            </a:r>
-            <a:endParaRPr b="0" lang="en-US" sz="2000" spc="-1" strike="noStrike">
-              <a:latin typeface="Arial"/>
-            </a:endParaRPr>
-          </a:p>
-          <a:p>
-            <a:pPr marL="450360" indent="-179640">
-              <a:lnSpc>
-                <a:spcPct val="100000"/>
-              </a:lnSpc>
-              <a:spcBef>
-                <a:spcPts val="1417"/>
-              </a:spcBef>
-              <a:buClr>
-                <a:srgbClr val="000000"/>
-              </a:buClr>
-              <a:buSzPct val="45000"/>
-              <a:buFont typeface="Wingdings" charset="2"/>
-              <a:buChar char=""/>
-              <a:tabLst>
-                <a:tab algn="l" pos="450360"/>
-              </a:tabLst>
-            </a:pPr>
-            <a:r>
-              <a:rPr b="0" lang="es-ES" sz="2000" spc="-1" strike="noStrike">
-                <a:latin typeface="Calibri"/>
-              </a:rPr>
-              <a:t>No requiere supuestos tan estrictos como la regresión lineal.</a:t>
-            </a:r>
-            <a:endParaRPr b="0" lang="en-US" sz="2000" spc="-1" strike="noStrike">
-              <a:latin typeface="Arial"/>
-            </a:endParaRPr>
-          </a:p>
-          <a:p>
-            <a:pPr marL="450360" indent="-179640">
-              <a:lnSpc>
-                <a:spcPct val="100000"/>
-              </a:lnSpc>
-              <a:spcBef>
-                <a:spcPts val="1417"/>
-              </a:spcBef>
-              <a:buClr>
-                <a:srgbClr val="000000"/>
-              </a:buClr>
-              <a:buSzPct val="45000"/>
-              <a:buFont typeface="Wingdings" charset="2"/>
-              <a:buChar char=""/>
-              <a:tabLst>
-                <a:tab algn="l" pos="450360"/>
-              </a:tabLst>
-            </a:pPr>
-            <a:r>
-              <a:rPr b="0" lang="es-ES" sz="2000" spc="-1" strike="noStrike">
-                <a:latin typeface="Calibri"/>
-              </a:rPr>
-              <a:t>Produce directamente probabilidades interpretables.</a:t>
-            </a:r>
-            <a:endParaRPr b="0" lang="en-US" sz="2000" spc="-1" strike="noStrike">
-              <a:latin typeface="Arial"/>
-            </a:endParaRPr>
-          </a:p>
-          <a:p>
-            <a:pPr marL="450360" indent="-179640">
-              <a:lnSpc>
-                <a:spcPct val="100000"/>
-              </a:lnSpc>
-              <a:spcBef>
-                <a:spcPts val="1417"/>
-              </a:spcBef>
-              <a:buClr>
-                <a:srgbClr val="000000"/>
-              </a:buClr>
-              <a:buSzPct val="45000"/>
-              <a:buFont typeface="Wingdings" charset="2"/>
-              <a:buChar char=""/>
-              <a:tabLst>
-                <a:tab algn="l" pos="450360"/>
-              </a:tabLst>
-            </a:pPr>
-            <a:r>
-              <a:rPr b="0" lang="es-ES" sz="2000" spc="-1" strike="noStrike">
-                <a:latin typeface="Calibri"/>
-              </a:rPr>
-              <a:t>Se puede extender a clasificación multiclase (softmax, regresión logística multinomial).</a:t>
-            </a:r>
-            <a:endParaRPr b="0" lang="en-US" sz="2000" spc="-1" strike="noStrike">
-              <a:latin typeface="Arial"/>
-            </a:endParaRPr>
-          </a:p>
-        </p:txBody>
-      </p:sp>
       <p:pic>
         <p:nvPicPr>
-          <p:cNvPr id="191" name="" descr=""/>
+          <p:cNvPr id="190" name="" descr=""/>
           <p:cNvPicPr/>
           <p:nvPr/>
         </p:nvPicPr>
@@ -9538,8 +9442,8 @@
         </p:blipFill>
         <p:spPr>
           <a:xfrm>
-            <a:off x="720360" y="2340360"/>
-            <a:ext cx="2159280" cy="2159280"/>
+            <a:off x="2705760" y="1080000"/>
+            <a:ext cx="6292800" cy="4909680"/>
           </a:xfrm>
           <a:prstGeom prst="rect">
             <a:avLst/>
@@ -9596,7 +9500,7 @@
         <p:spPr>
           <a:xfrm>
             <a:off x="838080" y="365040"/>
-            <a:ext cx="10508400" cy="536400"/>
+            <a:ext cx="10507320" cy="535320"/>
           </a:xfrm>
           <a:prstGeom prst="rect">
             <a:avLst/>
@@ -9645,7 +9549,7 @@
         <p:spPr>
           <a:xfrm>
             <a:off x="3420000" y="858240"/>
-            <a:ext cx="5964120" cy="5261040"/>
+            <a:ext cx="5963040" cy="5259960"/>
           </a:xfrm>
           <a:prstGeom prst="rect">
             <a:avLst/>
@@ -9691,7 +9595,7 @@
       </p:grpSpPr>
       <p:sp>
         <p:nvSpPr>
-          <p:cNvPr id="192" name="PlaceHolder 1"/>
+          <p:cNvPr id="191" name="PlaceHolder 1"/>
           <p:cNvSpPr>
             <a:spLocks noGrp="1"/>
           </p:cNvSpPr>
@@ -9702,7 +9606,7 @@
         <p:spPr>
           <a:xfrm>
             <a:off x="838080" y="365040"/>
-            <a:ext cx="10508400" cy="536400"/>
+            <a:ext cx="10507320" cy="535320"/>
           </a:xfrm>
           <a:prstGeom prst="rect">
             <a:avLst/>
@@ -9740,7 +9644,7 @@
       </p:sp>
       <p:sp>
         <p:nvSpPr>
-          <p:cNvPr id="193" name="PlaceHolder 2"/>
+          <p:cNvPr id="192" name="PlaceHolder 2"/>
           <p:cNvSpPr>
             <a:spLocks noGrp="1"/>
           </p:cNvSpPr>
@@ -9750,8 +9654,8 @@
         </p:nvSpPr>
         <p:spPr>
           <a:xfrm>
-            <a:off x="3780000" y="1980000"/>
-            <a:ext cx="7981560" cy="2475000"/>
+            <a:off x="3718080" y="1800000"/>
+            <a:ext cx="7980480" cy="3418560"/>
           </a:xfrm>
           <a:prstGeom prst="rect">
             <a:avLst/>
@@ -9777,8 +9681,8 @@
               <a:buChar char=""/>
             </a:pPr>
             <a:r>
-              <a:rPr b="1" lang="en-US" sz="2400" spc="-1" strike="noStrike">
-                <a:latin typeface="Arial"/>
+              <a:rPr b="1" lang="es-ES" sz="2400" spc="-1" strike="noStrike">
+                <a:latin typeface="Calibri"/>
               </a:rPr>
               <a:t> </a:t>
             </a:r>
@@ -9786,7 +9690,7 @@
               <a:rPr b="1" lang="es-ES" sz="2400" spc="-1" strike="noStrike">
                 <a:latin typeface="Calibri"/>
               </a:rPr>
-              <a:t>Desventajas</a:t>
+              <a:t>Ventajas</a:t>
             </a:r>
             <a:endParaRPr b="0" lang="en-US" sz="2400" spc="-1" strike="noStrike">
               <a:latin typeface="Arial"/>
@@ -9806,21 +9710,26 @@
           <a:p>
             <a:pPr marL="450360" indent="-179640">
               <a:lnSpc>
-                <a:spcPct val="115000"/>
-              </a:lnSpc>
-              <a:spcAft>
-                <a:spcPts val="1236"/>
-              </a:spcAft>
-              <a:buNone/>
+                <a:spcPct val="100000"/>
+              </a:lnSpc>
+              <a:spcBef>
+                <a:spcPts val="1417"/>
+              </a:spcBef>
+              <a:buClr>
+                <a:srgbClr val="000000"/>
+              </a:buClr>
+              <a:buSzPct val="45000"/>
+              <a:buFont typeface="Wingdings" charset="2"/>
+              <a:buChar char=""/>
               <a:tabLst>
-                <a:tab algn="l" pos="0"/>
+                <a:tab algn="l" pos="450360"/>
               </a:tabLst>
             </a:pPr>
             <a:r>
               <a:rPr b="0" lang="es-ES" sz="2000" spc="-1" strike="noStrike">
                 <a:latin typeface="Calibri"/>
               </a:rPr>
-              <a:t>Solo modela relaciones lineales en el logit.</a:t>
+              <a:t>Fácil de implementar e interpretar.</a:t>
             </a:r>
             <a:endParaRPr b="0" lang="en-US" sz="2000" spc="-1" strike="noStrike">
               <a:latin typeface="Arial"/>
@@ -9829,21 +9738,26 @@
           <a:p>
             <a:pPr marL="450360" indent="-179640">
               <a:lnSpc>
-                <a:spcPct val="115000"/>
-              </a:lnSpc>
-              <a:spcAft>
-                <a:spcPts val="1236"/>
-              </a:spcAft>
-              <a:buNone/>
+                <a:spcPct val="100000"/>
+              </a:lnSpc>
+              <a:spcBef>
+                <a:spcPts val="1417"/>
+              </a:spcBef>
+              <a:buClr>
+                <a:srgbClr val="000000"/>
+              </a:buClr>
+              <a:buSzPct val="45000"/>
+              <a:buFont typeface="Wingdings" charset="2"/>
+              <a:buChar char=""/>
               <a:tabLst>
-                <a:tab algn="l" pos="0"/>
+                <a:tab algn="l" pos="450360"/>
               </a:tabLst>
             </a:pPr>
             <a:r>
               <a:rPr b="0" lang="es-ES" sz="2000" spc="-1" strike="noStrike">
                 <a:latin typeface="Calibri"/>
               </a:rPr>
-              <a:t>Menos eficaz en relaciones no lineales (aunque puede extenderse con interacciones o polinomios).</a:t>
+              <a:t>No requiere supuestos tan estrictos como la regresión lineal.</a:t>
             </a:r>
             <a:endParaRPr b="0" lang="en-US" sz="2000" spc="-1" strike="noStrike">
               <a:latin typeface="Arial"/>
@@ -9852,21 +9766,60 @@
           <a:p>
             <a:pPr marL="450360" indent="-179640">
               <a:lnSpc>
-                <a:spcPct val="115000"/>
-              </a:lnSpc>
-              <a:spcAft>
-                <a:spcPts val="1236"/>
-              </a:spcAft>
-              <a:buNone/>
+                <a:spcPct val="100000"/>
+              </a:lnSpc>
+              <a:spcBef>
+                <a:spcPts val="1417"/>
+              </a:spcBef>
+              <a:buClr>
+                <a:srgbClr val="000000"/>
+              </a:buClr>
+              <a:buSzPct val="45000"/>
+              <a:buFont typeface="Wingdings" charset="2"/>
+              <a:buChar char=""/>
               <a:tabLst>
-                <a:tab algn="l" pos="0"/>
+                <a:tab algn="l" pos="450360"/>
               </a:tabLst>
             </a:pPr>
             <a:r>
               <a:rPr b="0" lang="es-ES" sz="2000" spc="-1" strike="noStrike">
                 <a:latin typeface="Calibri"/>
               </a:rPr>
-              <a:t>Sensible a outliers y a variables altamente correlacionadas.</a:t>
+              <a:t>Produce directamente probabilidades interpretables.</a:t>
+            </a:r>
+            <a:endParaRPr b="0" lang="en-US" sz="2000" spc="-1" strike="noStrike">
+              <a:latin typeface="Arial"/>
+            </a:endParaRPr>
+          </a:p>
+          <a:p>
+            <a:pPr marL="450360" indent="-179640">
+              <a:lnSpc>
+                <a:spcPct val="100000"/>
+              </a:lnSpc>
+              <a:spcBef>
+                <a:spcPts val="1417"/>
+              </a:spcBef>
+              <a:buClr>
+                <a:srgbClr val="000000"/>
+              </a:buClr>
+              <a:buSzPct val="45000"/>
+              <a:buFont typeface="Wingdings" charset="2"/>
+              <a:buChar char=""/>
+              <a:tabLst>
+                <a:tab algn="l" pos="450360"/>
+              </a:tabLst>
+            </a:pPr>
+            <a:r>
+              <a:rPr b="0" lang="es-ES" sz="2000" spc="-1" strike="noStrike">
+                <a:latin typeface="Calibri"/>
+              </a:rPr>
+              <a:t>Se puede extender a clasificación multiclase (softmax)</a:t>
+            </a:r>
+            <a:r>
+              <a:rPr b="0" lang="es-ES" sz="2000" spc="-1" strike="noStrike">
+                <a:latin typeface="Calibri"/>
+              </a:rPr>
+              <a:t>.</a:t>
             </a:r>
             <a:endParaRPr b="0" lang="en-US" sz="2000" spc="-1" strike="noStrike">
               <a:latin typeface="Arial"/>
@@ -9876,7 +9829,7 @@
       </p:sp>
       <p:pic>
         <p:nvPicPr>
-          <p:cNvPr id="194" name="" descr=""/>
+          <p:cNvPr id="193" name="" descr=""/>
           <p:cNvPicPr/>
           <p:nvPr/>
         </p:nvPicPr>
@@ -9886,8 +9839,8 @@
         </p:blipFill>
         <p:spPr>
           <a:xfrm>
-            <a:off x="671760" y="2160360"/>
-            <a:ext cx="2207880" cy="2159280"/>
+            <a:off x="720360" y="2340360"/>
+            <a:ext cx="2158200" cy="2158200"/>
           </a:xfrm>
           <a:prstGeom prst="rect">
             <a:avLst/>
@@ -9933,7 +9886,7 @@
       </p:grpSpPr>
       <p:sp>
         <p:nvSpPr>
-          <p:cNvPr id="195" name="PlaceHolder 1"/>
+          <p:cNvPr id="194" name="PlaceHolder 1"/>
           <p:cNvSpPr>
             <a:spLocks noGrp="1"/>
           </p:cNvSpPr>
@@ -9944,7 +9897,7 @@
         <p:spPr>
           <a:xfrm>
             <a:off x="838080" y="365040"/>
-            <a:ext cx="10508400" cy="536400"/>
+            <a:ext cx="10507320" cy="535320"/>
           </a:xfrm>
           <a:prstGeom prst="rect">
             <a:avLst/>
@@ -9975,6 +9928,142 @@
               <a:t>Regresión Logística</a:t>
             </a:r>
             <a:endParaRPr b="0" lang="en-US" sz="2400" spc="-1" strike="noStrike">
+              <a:latin typeface="Arial"/>
+            </a:endParaRPr>
+          </a:p>
+        </p:txBody>
+      </p:sp>
+      <p:sp>
+        <p:nvSpPr>
+          <p:cNvPr id="195" name="PlaceHolder 2"/>
+          <p:cNvSpPr>
+            <a:spLocks noGrp="1"/>
+          </p:cNvSpPr>
+          <p:nvPr>
+            <p:ph/>
+          </p:nvPr>
+        </p:nvSpPr>
+        <p:spPr>
+          <a:xfrm>
+            <a:off x="3780000" y="1980000"/>
+            <a:ext cx="7980480" cy="2473920"/>
+          </a:xfrm>
+          <a:prstGeom prst="rect">
+            <a:avLst/>
+          </a:prstGeom>
+          <a:noFill/>
+          <a:ln w="0">
+            <a:noFill/>
+          </a:ln>
+        </p:spPr>
+        <p:txBody>
+          <a:bodyPr lIns="90000" rIns="90000" tIns="45000" bIns="45000" anchor="t">
+            <a:noAutofit/>
+          </a:bodyPr>
+          <a:p>
+            <a:pPr marL="432000" indent="-324000">
+              <a:lnSpc>
+                <a:spcPct val="100000"/>
+              </a:lnSpc>
+              <a:buClr>
+                <a:srgbClr val="000000"/>
+              </a:buClr>
+              <a:buFont typeface="Wingdings" charset="2"/>
+              <a:buChar char=""/>
+            </a:pPr>
+            <a:r>
+              <a:rPr b="1" lang="en-US" sz="2400" spc="-1" strike="noStrike">
+                <a:latin typeface="Arial"/>
+              </a:rPr>
+              <a:t> </a:t>
+            </a:r>
+            <a:r>
+              <a:rPr b="1" lang="es-ES" sz="2400" spc="-1" strike="noStrike">
+                <a:latin typeface="Calibri"/>
+              </a:rPr>
+              <a:t>Desventajas</a:t>
+            </a:r>
+            <a:endParaRPr b="0" lang="en-US" sz="2400" spc="-1" strike="noStrike">
+              <a:latin typeface="Arial"/>
+            </a:endParaRPr>
+          </a:p>
+          <a:p>
+            <a:pPr>
+              <a:lnSpc>
+                <a:spcPct val="100000"/>
+              </a:lnSpc>
+              <a:buNone/>
+            </a:pPr>
+            <a:endParaRPr b="0" lang="en-US" sz="2000" spc="-1" strike="noStrike">
+              <a:latin typeface="Arial"/>
+            </a:endParaRPr>
+          </a:p>
+          <a:p>
+            <a:pPr marL="450360" indent="-179640">
+              <a:lnSpc>
+                <a:spcPct val="115000"/>
+              </a:lnSpc>
+              <a:spcAft>
+                <a:spcPts val="1236"/>
+              </a:spcAft>
+              <a:buNone/>
+              <a:tabLst>
+                <a:tab algn="l" pos="0"/>
+              </a:tabLst>
+            </a:pPr>
+            <a:r>
+              <a:rPr b="0" lang="es-ES" sz="2000" spc="-1" strike="noStrike">
+                <a:latin typeface="Calibri"/>
+              </a:rPr>
+              <a:t>Solo modela relaciones lineales en el logit.</a:t>
+            </a:r>
+            <a:endParaRPr b="0" lang="en-US" sz="2000" spc="-1" strike="noStrike">
+              <a:latin typeface="Arial"/>
+            </a:endParaRPr>
+          </a:p>
+          <a:p>
+            <a:pPr marL="450360" indent="-179640">
+              <a:lnSpc>
+                <a:spcPct val="115000"/>
+              </a:lnSpc>
+              <a:spcAft>
+                <a:spcPts val="1236"/>
+              </a:spcAft>
+              <a:buNone/>
+              <a:tabLst>
+                <a:tab algn="l" pos="0"/>
+              </a:tabLst>
+            </a:pPr>
+            <a:r>
+              <a:rPr b="0" lang="es-ES" sz="2000" spc="-1" strike="noStrike">
+                <a:latin typeface="Calibri"/>
+              </a:rPr>
+              <a:t>Menos eficaz en relaciones no lineales (aunque puede extenderse con interacciones o polinomios).</a:t>
+            </a:r>
+            <a:endParaRPr b="0" lang="en-US" sz="2000" spc="-1" strike="noStrike">
+              <a:latin typeface="Arial"/>
+            </a:endParaRPr>
+          </a:p>
+          <a:p>
+            <a:pPr marL="450360" indent="-179640">
+              <a:lnSpc>
+                <a:spcPct val="115000"/>
+              </a:lnSpc>
+              <a:spcAft>
+                <a:spcPts val="1236"/>
+              </a:spcAft>
+              <a:buNone/>
+              <a:tabLst>
+                <a:tab algn="l" pos="0"/>
+              </a:tabLst>
+            </a:pPr>
+            <a:r>
+              <a:rPr b="0" lang="es-ES" sz="2000" spc="-1" strike="noStrike">
+                <a:latin typeface="Calibri"/>
+              </a:rPr>
+              <a:t>Sensible a outliers y a variables altamente correlacionadas.</a:t>
+            </a:r>
+            <a:endParaRPr b="0" lang="en-US" sz="2000" spc="-1" strike="noStrike">
               <a:latin typeface="Arial"/>
             </a:endParaRPr>
           </a:p>
@@ -9988,13 +10077,12 @@
         </p:nvPicPr>
         <p:blipFill>
           <a:blip r:embed="rId1"/>
-          <a:srcRect l="0" t="0" r="0" b="12561"/>
           <a:stretch/>
         </p:blipFill>
         <p:spPr>
           <a:xfrm>
-            <a:off x="2520000" y="1080000"/>
-            <a:ext cx="7919640" cy="5008680"/>
+            <a:off x="671760" y="2160360"/>
+            <a:ext cx="2206800" cy="2158200"/>
           </a:xfrm>
           <a:prstGeom prst="rect">
             <a:avLst/>
@@ -10051,7 +10139,7 @@
         <p:spPr>
           <a:xfrm>
             <a:off x="838080" y="365040"/>
-            <a:ext cx="10508400" cy="536400"/>
+            <a:ext cx="10507320" cy="535320"/>
           </a:xfrm>
           <a:prstGeom prst="rect">
             <a:avLst/>
@@ -10095,12 +10183,13 @@
         </p:nvPicPr>
         <p:blipFill>
           <a:blip r:embed="rId1"/>
+          <a:srcRect l="0" t="0" r="0" b="12561"/>
           <a:stretch/>
         </p:blipFill>
         <p:spPr>
           <a:xfrm>
-            <a:off x="790560" y="1314000"/>
-            <a:ext cx="10613880" cy="4339800"/>
+            <a:off x="2520000" y="1080000"/>
+            <a:ext cx="7918560" cy="5007600"/>
           </a:xfrm>
           <a:prstGeom prst="rect">
             <a:avLst/>
@@ -10157,7 +10246,7 @@
         <p:spPr>
           <a:xfrm>
             <a:off x="838080" y="365040"/>
-            <a:ext cx="10508400" cy="536400"/>
+            <a:ext cx="10507320" cy="535320"/>
           </a:xfrm>
           <a:prstGeom prst="rect">
             <a:avLst/>
@@ -10205,8 +10294,8 @@
         </p:blipFill>
         <p:spPr>
           <a:xfrm>
-            <a:off x="3240000" y="1069560"/>
-            <a:ext cx="6159600" cy="4999320"/>
+            <a:off x="790560" y="1314000"/>
+            <a:ext cx="10612800" cy="4338720"/>
           </a:xfrm>
           <a:prstGeom prst="rect">
             <a:avLst/>
@@ -10263,7 +10352,7 @@
         <p:spPr>
           <a:xfrm>
             <a:off x="838080" y="365040"/>
-            <a:ext cx="10508400" cy="536400"/>
+            <a:ext cx="10507320" cy="535320"/>
           </a:xfrm>
           <a:prstGeom prst="rect">
             <a:avLst/>
@@ -10311,8 +10400,8 @@
         </p:blipFill>
         <p:spPr>
           <a:xfrm>
-            <a:off x="3600000" y="1098720"/>
-            <a:ext cx="5039640" cy="4950000"/>
+            <a:off x="3240000" y="1069560"/>
+            <a:ext cx="6158520" cy="4998240"/>
           </a:xfrm>
           <a:prstGeom prst="rect">
             <a:avLst/>
@@ -10369,7 +10458,7 @@
         <p:spPr>
           <a:xfrm>
             <a:off x="838080" y="365040"/>
-            <a:ext cx="10508400" cy="536400"/>
+            <a:ext cx="10507320" cy="535320"/>
           </a:xfrm>
           <a:prstGeom prst="rect">
             <a:avLst/>
@@ -10417,8 +10506,8 @@
         </p:blipFill>
         <p:spPr>
           <a:xfrm>
-            <a:off x="3150720" y="901800"/>
-            <a:ext cx="5308920" cy="5131440"/>
+            <a:off x="3600000" y="1098720"/>
+            <a:ext cx="5038560" cy="4948920"/>
           </a:xfrm>
           <a:prstGeom prst="rect">
             <a:avLst/>
@@ -10475,7 +10564,7 @@
         <p:spPr>
           <a:xfrm>
             <a:off x="838080" y="365040"/>
-            <a:ext cx="10508400" cy="536400"/>
+            <a:ext cx="10507320" cy="535320"/>
           </a:xfrm>
           <a:prstGeom prst="rect">
             <a:avLst/>
@@ -10523,8 +10612,8 @@
         </p:blipFill>
         <p:spPr>
           <a:xfrm>
-            <a:off x="2700000" y="1080000"/>
-            <a:ext cx="7019640" cy="4969440"/>
+            <a:off x="3150720" y="901800"/>
+            <a:ext cx="5307840" cy="5130360"/>
           </a:xfrm>
           <a:prstGeom prst="rect">
             <a:avLst/>
@@ -10581,7 +10670,7 @@
         <p:spPr>
           <a:xfrm>
             <a:off x="838080" y="365040"/>
-            <a:ext cx="10508400" cy="536400"/>
+            <a:ext cx="10507320" cy="535320"/>
           </a:xfrm>
           <a:prstGeom prst="rect">
             <a:avLst/>
@@ -10629,31 +10718,8 @@
         </p:blipFill>
         <p:spPr>
           <a:xfrm>
-            <a:off x="720000" y="1298520"/>
-            <a:ext cx="5627520" cy="4246560"/>
-          </a:xfrm>
-          <a:prstGeom prst="rect">
-            <a:avLst/>
-          </a:prstGeom>
-          <a:ln w="0">
-            <a:noFill/>
-          </a:ln>
-        </p:spPr>
-      </p:pic>
-      <p:pic>
-        <p:nvPicPr>
-          <p:cNvPr id="209" name="" descr=""/>
-          <p:cNvPicPr/>
-          <p:nvPr/>
-        </p:nvPicPr>
-        <p:blipFill>
-          <a:blip r:embed="rId2"/>
-          <a:stretch/>
-        </p:blipFill>
-        <p:spPr>
-          <a:xfrm>
-            <a:off x="6840000" y="2360520"/>
-            <a:ext cx="5018040" cy="1599120"/>
+            <a:off x="2700000" y="1080000"/>
+            <a:ext cx="7018560" cy="4968360"/>
           </a:xfrm>
           <a:prstGeom prst="rect">
             <a:avLst/>
@@ -10699,7 +10765,7 @@
       </p:grpSpPr>
       <p:sp>
         <p:nvSpPr>
-          <p:cNvPr id="210" name="PlaceHolder 1"/>
+          <p:cNvPr id="209" name="PlaceHolder 1"/>
           <p:cNvSpPr>
             <a:spLocks noGrp="1"/>
           </p:cNvSpPr>
@@ -10710,7 +10776,7 @@
         <p:spPr>
           <a:xfrm>
             <a:off x="838080" y="365040"/>
-            <a:ext cx="10508400" cy="536400"/>
+            <a:ext cx="10507320" cy="535320"/>
           </a:xfrm>
           <a:prstGeom prst="rect">
             <a:avLst/>
@@ -10725,49 +10791,73 @@
             <a:noAutofit/>
           </a:bodyPr>
           <a:p>
-            <a:pPr algn="ctr">
-              <a:buNone/>
-            </a:pPr>
-            <a:endParaRPr b="0" lang="en-US" sz="4400" spc="-1" strike="noStrike">
-              <a:latin typeface="Arial"/>
-            </a:endParaRPr>
-          </a:p>
-        </p:txBody>
-      </p:sp>
-      <p:sp>
-        <p:nvSpPr>
-          <p:cNvPr id="211" name="PlaceHolder 2"/>
-          <p:cNvSpPr>
-            <a:spLocks noGrp="1"/>
-          </p:cNvSpPr>
-          <p:nvPr>
-            <p:ph/>
-          </p:nvPr>
-        </p:nvSpPr>
-        <p:spPr>
-          <a:xfrm>
-            <a:off x="838080" y="1124640"/>
-            <a:ext cx="10508400" cy="4344120"/>
-          </a:xfrm>
-          <a:prstGeom prst="rect">
-            <a:avLst/>
-          </a:prstGeom>
-          <a:noFill/>
-          <a:ln w="0">
-            <a:noFill/>
-          </a:ln>
-        </p:spPr>
-        <p:txBody>
-          <a:bodyPr lIns="90000" rIns="90000" tIns="45000" bIns="45000" anchor="t">
-            <a:noAutofit/>
-          </a:bodyPr>
-          <a:p>
-            <a:endParaRPr b="0" lang="en-US" sz="3200" spc="-1" strike="noStrike">
-              <a:latin typeface="Arial"/>
-            </a:endParaRPr>
-          </a:p>
-        </p:txBody>
-      </p:sp>
+            <a:pPr>
+              <a:lnSpc>
+                <a:spcPct val="90000"/>
+              </a:lnSpc>
+              <a:buNone/>
+            </a:pPr>
+            <a:r>
+              <a:rPr b="1" lang="es-ES" sz="2400" spc="-1" strike="noStrike">
+                <a:solidFill>
+                  <a:srgbClr val="000000"/>
+                </a:solidFill>
+                <a:latin typeface="Calibri"/>
+              </a:rPr>
+              <a:t>Regresión Logística</a:t>
+            </a:r>
+            <a:endParaRPr b="0" lang="en-US" sz="2400" spc="-1" strike="noStrike">
+              <a:latin typeface="Arial"/>
+            </a:endParaRPr>
+          </a:p>
+        </p:txBody>
+      </p:sp>
+      <p:pic>
+        <p:nvPicPr>
+          <p:cNvPr id="210" name="" descr=""/>
+          <p:cNvPicPr/>
+          <p:nvPr/>
+        </p:nvPicPr>
+        <p:blipFill>
+          <a:blip r:embed="rId1"/>
+          <a:stretch/>
+        </p:blipFill>
+        <p:spPr>
+          <a:xfrm>
+            <a:off x="720000" y="1298520"/>
+            <a:ext cx="5626440" cy="4245480"/>
+          </a:xfrm>
+          <a:prstGeom prst="rect">
+            <a:avLst/>
+          </a:prstGeom>
+          <a:ln w="0">
+            <a:noFill/>
+          </a:ln>
+        </p:spPr>
+      </p:pic>
+      <p:pic>
+        <p:nvPicPr>
+          <p:cNvPr id="211" name="" descr=""/>
+          <p:cNvPicPr/>
+          <p:nvPr/>
+        </p:nvPicPr>
+        <p:blipFill>
+          <a:blip r:embed="rId2"/>
+          <a:stretch/>
+        </p:blipFill>
+        <p:spPr>
+          <a:xfrm>
+            <a:off x="6840000" y="2360520"/>
+            <a:ext cx="5016960" cy="1598040"/>
+          </a:xfrm>
+          <a:prstGeom prst="rect">
+            <a:avLst/>
+          </a:prstGeom>
+          <a:ln w="0">
+            <a:noFill/>
+          </a:ln>
+        </p:spPr>
+      </p:pic>
     </p:spTree>
   </p:cSld>
   <mc:AlternateContent>
@@ -10788,13 +10878,6 @@
 <file path=ppt/slides/slide49.xml><?xml version="1.0" encoding="utf-8"?>
 <p:sld xmlns:a="http://schemas.openxmlformats.org/drawingml/2006/main" xmlns:p="http://schemas.openxmlformats.org/presentationml/2006/main" xmlns:r="http://schemas.openxmlformats.org/officeDocument/2006/relationships" xmlns:p14="http://schemas.microsoft.com/office/powerpoint/2010/main" xmlns:p15="http://schemas.microsoft.com/office/powerpoint/2012/main" xmlns:mc="http://schemas.openxmlformats.org/markup-compatibility/2006">
   <p:cSld>
-    <p:bg>
-      <p:bgPr>
-        <a:solidFill>
-          <a:srgbClr val="083796"/>
-        </a:solidFill>
-      </p:bgPr>
-    </p:bg>
     <p:spTree>
       <p:nvGrpSpPr>
         <p:cNvPr id="1" name=""/>
@@ -10811,51 +10894,116 @@
       </p:grpSpPr>
       <p:sp>
         <p:nvSpPr>
-          <p:cNvPr id="212" name="10 CuadroTexto"/>
-          <p:cNvSpPr/>
-          <p:nvPr/>
-        </p:nvSpPr>
-        <p:spPr>
-          <a:xfrm>
-            <a:off x="5150160" y="5508000"/>
-            <a:ext cx="1889640" cy="455400"/>
-          </a:xfrm>
-          <a:prstGeom prst="rect">
-            <a:avLst/>
-          </a:prstGeom>
-          <a:noFill/>
-          <a:ln w="0">
-            <a:noFill/>
-          </a:ln>
-        </p:spPr>
-        <p:style>
-          <a:lnRef idx="0"/>
-          <a:fillRef idx="0"/>
-          <a:effectRef idx="0"/>
-          <a:fontRef idx="minor"/>
-        </p:style>
-        <p:txBody>
-          <a:bodyPr wrap="none" lIns="90000" rIns="90000" tIns="45000" bIns="45000" anchor="t">
-            <a:spAutoFit/>
+          <p:cNvPr id="212" name="PlaceHolder 1"/>
+          <p:cNvSpPr>
+            <a:spLocks noGrp="1"/>
+          </p:cNvSpPr>
+          <p:nvPr>
+            <p:ph type="title"/>
+          </p:nvPr>
+        </p:nvSpPr>
+        <p:spPr>
+          <a:xfrm>
+            <a:off x="838080" y="365040"/>
+            <a:ext cx="10507320" cy="535320"/>
+          </a:xfrm>
+          <a:prstGeom prst="rect">
+            <a:avLst/>
+          </a:prstGeom>
+          <a:noFill/>
+          <a:ln w="0">
+            <a:noFill/>
+          </a:ln>
+        </p:spPr>
+        <p:txBody>
+          <a:bodyPr lIns="90000" rIns="90000" tIns="45000" bIns="45000" anchor="ctr">
+            <a:noAutofit/>
           </a:bodyPr>
           <a:p>
             <a:pPr>
               <a:lnSpc>
+                <a:spcPct val="90000"/>
+              </a:lnSpc>
+              <a:buNone/>
+            </a:pPr>
+            <a:r>
+              <a:rPr b="1" lang="es-ES" sz="2400" spc="-1" strike="noStrike">
+                <a:solidFill>
+                  <a:srgbClr val="000000"/>
+                </a:solidFill>
+                <a:latin typeface="Calibri"/>
+              </a:rPr>
+              <a:t>Máquinas de vectores de soporte SVM </a:t>
+            </a:r>
+            <a:endParaRPr b="0" lang="en-US" sz="2400" spc="-1" strike="noStrike">
+              <a:latin typeface="Arial"/>
+            </a:endParaRPr>
+          </a:p>
+        </p:txBody>
+      </p:sp>
+      <p:sp>
+        <p:nvSpPr>
+          <p:cNvPr id="213" name="PlaceHolder 2"/>
+          <p:cNvSpPr>
+            <a:spLocks noGrp="1"/>
+          </p:cNvSpPr>
+          <p:nvPr>
+            <p:ph/>
+          </p:nvPr>
+        </p:nvSpPr>
+        <p:spPr>
+          <a:xfrm>
+            <a:off x="838080" y="1124640"/>
+            <a:ext cx="10507320" cy="1213560"/>
+          </a:xfrm>
+          <a:prstGeom prst="rect">
+            <a:avLst/>
+          </a:prstGeom>
+          <a:noFill/>
+          <a:ln w="0">
+            <a:noFill/>
+          </a:ln>
+        </p:spPr>
+        <p:txBody>
+          <a:bodyPr lIns="90000" rIns="90000" tIns="45000" bIns="45000" anchor="t">
+            <a:noAutofit/>
+          </a:bodyPr>
+          <a:p>
+            <a:pPr>
+              <a:lnSpc>
                 <a:spcPct val="100000"/>
               </a:lnSpc>
               <a:buNone/>
             </a:pPr>
             <a:r>
               <a:rPr b="0" lang="es-ES" sz="2400" spc="-1" strike="noStrike">
-                <a:solidFill>
-                  <a:srgbClr val="ffffff"/>
-                </a:solidFill>
-                <a:latin typeface="Calibri"/>
-                <a:ea typeface="DejaVu Sans"/>
-              </a:rPr>
-              <a:t>www.ceste.es</a:t>
+                <a:latin typeface="Calibri"/>
+              </a:rPr>
+              <a:t>Su objetivo es encontrar un hiperplano de separación óptimo entre clases, maximizando la distancia (margen) entre las observaciones más cercanas de cada clase</a:t>
             </a:r>
             <a:endParaRPr b="0" lang="en-US" sz="2400" spc="-1" strike="noStrike">
+              <a:latin typeface="Arial"/>
+            </a:endParaRPr>
+          </a:p>
+          <a:p>
+            <a:pPr>
+              <a:lnSpc>
+                <a:spcPct val="100000"/>
+              </a:lnSpc>
+              <a:buNone/>
+            </a:pPr>
+            <a:endParaRPr b="0" lang="en-US" sz="2400" spc="-1" strike="noStrike">
+              <a:latin typeface="Arial"/>
+            </a:endParaRPr>
+          </a:p>
+          <a:p>
+            <a:pPr>
+              <a:lnSpc>
+                <a:spcPct val="100000"/>
+              </a:lnSpc>
+              <a:buNone/>
+            </a:pPr>
+            <a:endParaRPr b="0" lang="en-US" sz="1800" spc="-1" strike="noStrike">
               <a:latin typeface="Arial"/>
             </a:endParaRPr>
           </a:p>
@@ -10863,7 +11011,7 @@
       </p:sp>
       <p:pic>
         <p:nvPicPr>
-          <p:cNvPr id="213" name="11 Imagen" descr=""/>
+          <p:cNvPr id="214" name="" descr=""/>
           <p:cNvPicPr/>
           <p:nvPr/>
         </p:nvPicPr>
@@ -10873,8 +11021,8 @@
         </p:blipFill>
         <p:spPr>
           <a:xfrm>
-            <a:off x="4227480" y="2349000"/>
-            <a:ext cx="3730680" cy="1818720"/>
+            <a:off x="326880" y="2935440"/>
+            <a:ext cx="11372760" cy="2284200"/>
           </a:xfrm>
           <a:prstGeom prst="rect">
             <a:avLst/>
@@ -10931,7 +11079,7 @@
         <p:spPr>
           <a:xfrm>
             <a:off x="838080" y="365040"/>
-            <a:ext cx="10508400" cy="536400"/>
+            <a:ext cx="10507320" cy="535320"/>
           </a:xfrm>
           <a:prstGeom prst="rect">
             <a:avLst/>
@@ -10980,7 +11128,2019 @@
         <p:spPr>
           <a:xfrm>
             <a:off x="1980000" y="1260000"/>
-            <a:ext cx="8999280" cy="4788000"/>
+            <a:ext cx="8998200" cy="4786920"/>
+          </a:xfrm>
+          <a:prstGeom prst="rect">
+            <a:avLst/>
+          </a:prstGeom>
+          <a:ln w="0">
+            <a:noFill/>
+          </a:ln>
+        </p:spPr>
+      </p:pic>
+    </p:spTree>
+  </p:cSld>
+  <mc:AlternateContent>
+    <mc:Choice Requires="p14">
+      <p:transition spd="med" p14:dur="700">
+        <p:fade/>
+      </p:transition>
+    </mc:Choice>
+    <mc:Fallback>
+      <p:transition spd="med">
+        <p:fade/>
+      </p:transition>
+    </mc:Fallback>
+  </mc:AlternateContent>
+</p:sld>
+</file>
+
+<file path=ppt/slides/slide50.xml><?xml version="1.0" encoding="utf-8"?>
+<p:sld xmlns:a="http://schemas.openxmlformats.org/drawingml/2006/main" xmlns:p="http://schemas.openxmlformats.org/presentationml/2006/main" xmlns:r="http://schemas.openxmlformats.org/officeDocument/2006/relationships" xmlns:p14="http://schemas.microsoft.com/office/powerpoint/2010/main" xmlns:p15="http://schemas.microsoft.com/office/powerpoint/2012/main" xmlns:mc="http://schemas.openxmlformats.org/markup-compatibility/2006">
+  <p:cSld>
+    <p:spTree>
+      <p:nvGrpSpPr>
+        <p:cNvPr id="1" name=""/>
+        <p:cNvGrpSpPr/>
+        <p:nvPr/>
+      </p:nvGrpSpPr>
+      <p:grpSpPr>
+        <a:xfrm>
+          <a:off x="0" y="0"/>
+          <a:ext cx="0" cy="0"/>
+          <a:chOff x="0" y="0"/>
+          <a:chExt cx="0" cy="0"/>
+        </a:xfrm>
+      </p:grpSpPr>
+      <p:sp>
+        <p:nvSpPr>
+          <p:cNvPr id="215" name="PlaceHolder 1"/>
+          <p:cNvSpPr>
+            <a:spLocks noGrp="1"/>
+          </p:cNvSpPr>
+          <p:nvPr>
+            <p:ph type="title"/>
+          </p:nvPr>
+        </p:nvSpPr>
+        <p:spPr>
+          <a:xfrm>
+            <a:off x="838080" y="365040"/>
+            <a:ext cx="10512720" cy="540720"/>
+          </a:xfrm>
+          <a:prstGeom prst="rect">
+            <a:avLst/>
+          </a:prstGeom>
+          <a:noFill/>
+          <a:ln w="0">
+            <a:noFill/>
+          </a:ln>
+        </p:spPr>
+        <p:txBody>
+          <a:bodyPr lIns="90000" rIns="90000" tIns="45000" bIns="45000" anchor="ctr">
+            <a:noAutofit/>
+          </a:bodyPr>
+          <a:p>
+            <a:pPr>
+              <a:lnSpc>
+                <a:spcPct val="90000"/>
+              </a:lnSpc>
+              <a:buNone/>
+            </a:pPr>
+            <a:r>
+              <a:rPr b="1" lang="es-ES" sz="2400" spc="-1" strike="noStrike">
+                <a:solidFill>
+                  <a:srgbClr val="000000"/>
+                </a:solidFill>
+                <a:latin typeface="Calibri"/>
+              </a:rPr>
+              <a:t>Máquinas de vectores de soporte SVM </a:t>
+            </a:r>
+            <a:endParaRPr b="0" lang="en-US" sz="2400" spc="-1" strike="noStrike">
+              <a:latin typeface="Arial"/>
+            </a:endParaRPr>
+          </a:p>
+        </p:txBody>
+      </p:sp>
+      <p:sp>
+        <p:nvSpPr>
+          <p:cNvPr id="216" name="PlaceHolder 2"/>
+          <p:cNvSpPr>
+            <a:spLocks noGrp="1"/>
+          </p:cNvSpPr>
+          <p:nvPr>
+            <p:ph/>
+          </p:nvPr>
+        </p:nvSpPr>
+        <p:spPr>
+          <a:xfrm>
+            <a:off x="2340000" y="1260000"/>
+            <a:ext cx="7557480" cy="537480"/>
+          </a:xfrm>
+          <a:prstGeom prst="rect">
+            <a:avLst/>
+          </a:prstGeom>
+          <a:noFill/>
+          <a:ln w="0">
+            <a:noFill/>
+          </a:ln>
+        </p:spPr>
+        <p:txBody>
+          <a:bodyPr lIns="90000" rIns="90000" tIns="45000" bIns="45000" anchor="t">
+            <a:noAutofit/>
+          </a:bodyPr>
+          <a:p>
+            <a:pPr marL="228600" indent="-228600">
+              <a:lnSpc>
+                <a:spcPct val="90000"/>
+              </a:lnSpc>
+              <a:spcBef>
+                <a:spcPts val="1001"/>
+              </a:spcBef>
+              <a:buClr>
+                <a:srgbClr val="000000"/>
+              </a:buClr>
+              <a:buFont typeface="Arial"/>
+              <a:buChar char="•"/>
+            </a:pPr>
+            <a:r>
+              <a:rPr b="0" lang="es-ES" sz="2800" spc="-1" strike="noStrike">
+                <a:solidFill>
+                  <a:srgbClr val="ff0000"/>
+                </a:solidFill>
+                <a:latin typeface="Calibri"/>
+              </a:rPr>
+              <a:t>ELIMINAR VALORES NULOS ANTES DE USAR SVM</a:t>
+            </a:r>
+            <a:endParaRPr b="0" lang="en-US" sz="2800" spc="-1" strike="noStrike">
+              <a:latin typeface="Arial"/>
+            </a:endParaRPr>
+          </a:p>
+        </p:txBody>
+      </p:sp>
+      <p:sp>
+        <p:nvSpPr>
+          <p:cNvPr id="217" name=""/>
+          <p:cNvSpPr/>
+          <p:nvPr/>
+        </p:nvSpPr>
+        <p:spPr>
+          <a:xfrm>
+            <a:off x="889920" y="2160000"/>
+            <a:ext cx="5037480" cy="959400"/>
+          </a:xfrm>
+          <a:prstGeom prst="rect">
+            <a:avLst/>
+          </a:prstGeom>
+          <a:noFill/>
+          <a:ln w="0">
+            <a:noFill/>
+          </a:ln>
+        </p:spPr>
+        <p:style>
+          <a:lnRef idx="0"/>
+          <a:fillRef idx="0"/>
+          <a:effectRef idx="0"/>
+          <a:fontRef idx="minor"/>
+        </p:style>
+        <p:txBody>
+          <a:bodyPr lIns="90000" rIns="90000" tIns="45000" bIns="45000" anchor="t">
+            <a:noAutofit/>
+          </a:bodyPr>
+          <a:p>
+            <a:pPr>
+              <a:lnSpc>
+                <a:spcPct val="100000"/>
+              </a:lnSpc>
+              <a:spcBef>
+                <a:spcPts val="1191"/>
+              </a:spcBef>
+              <a:spcAft>
+                <a:spcPts val="992"/>
+              </a:spcAft>
+              <a:buNone/>
+            </a:pPr>
+            <a:endParaRPr b="0" lang="en-US" sz="2400" spc="-1" strike="noStrike">
+              <a:latin typeface="Arial"/>
+            </a:endParaRPr>
+          </a:p>
+          <a:p>
+            <a:pPr>
+              <a:lnSpc>
+                <a:spcPct val="100000"/>
+              </a:lnSpc>
+              <a:spcBef>
+                <a:spcPts val="1191"/>
+              </a:spcBef>
+              <a:spcAft>
+                <a:spcPts val="992"/>
+              </a:spcAft>
+              <a:buNone/>
+            </a:pPr>
+            <a:endParaRPr b="0" lang="en-US" sz="2400" spc="-1" strike="noStrike">
+              <a:latin typeface="Arial"/>
+            </a:endParaRPr>
+          </a:p>
+          <a:p>
+            <a:pPr>
+              <a:lnSpc>
+                <a:spcPct val="100000"/>
+              </a:lnSpc>
+              <a:spcBef>
+                <a:spcPts val="1191"/>
+              </a:spcBef>
+              <a:spcAft>
+                <a:spcPts val="992"/>
+              </a:spcAft>
+              <a:buNone/>
+            </a:pPr>
+            <a:r>
+              <a:rPr b="1" lang="es-ES" sz="2400" spc="-1" strike="noStrike">
+                <a:solidFill>
+                  <a:srgbClr val="000000"/>
+                </a:solidFill>
+                <a:latin typeface="Calibri"/>
+                <a:ea typeface="DejaVu Sans"/>
+              </a:rPr>
+              <a:t>Los algoritmos de SVM fallan cuando se introducen valores nulos</a:t>
+            </a:r>
+            <a:endParaRPr b="0" lang="en-US" sz="2400" spc="-1" strike="noStrike">
+              <a:latin typeface="Arial"/>
+            </a:endParaRPr>
+          </a:p>
+        </p:txBody>
+      </p:sp>
+      <p:pic>
+        <p:nvPicPr>
+          <p:cNvPr id="218" name="" descr=""/>
+          <p:cNvPicPr/>
+          <p:nvPr/>
+        </p:nvPicPr>
+        <p:blipFill>
+          <a:blip r:embed="rId1"/>
+          <a:stretch/>
+        </p:blipFill>
+        <p:spPr>
+          <a:xfrm>
+            <a:off x="1260000" y="1331280"/>
+            <a:ext cx="827280" cy="827280"/>
+          </a:xfrm>
+          <a:prstGeom prst="rect">
+            <a:avLst/>
+          </a:prstGeom>
+          <a:ln w="0">
+            <a:noFill/>
+          </a:ln>
+        </p:spPr>
+      </p:pic>
+      <p:pic>
+        <p:nvPicPr>
+          <p:cNvPr id="219" name="" descr=""/>
+          <p:cNvPicPr/>
+          <p:nvPr/>
+        </p:nvPicPr>
+        <p:blipFill>
+          <a:blip r:embed="rId2"/>
+          <a:stretch/>
+        </p:blipFill>
+        <p:spPr>
+          <a:xfrm>
+            <a:off x="7740000" y="2340000"/>
+            <a:ext cx="2698560" cy="3148200"/>
+          </a:xfrm>
+          <a:prstGeom prst="rect">
+            <a:avLst/>
+          </a:prstGeom>
+          <a:ln w="0">
+            <a:noFill/>
+          </a:ln>
+        </p:spPr>
+      </p:pic>
+    </p:spTree>
+  </p:cSld>
+  <mc:AlternateContent>
+    <mc:Choice Requires="p14">
+      <p:transition spd="med" p14:dur="700">
+        <p:fade/>
+      </p:transition>
+    </mc:Choice>
+    <mc:Fallback>
+      <p:transition spd="med">
+        <p:fade/>
+      </p:transition>
+    </mc:Fallback>
+  </mc:AlternateContent>
+</p:sld>
+</file>
+
+<file path=ppt/slides/slide51.xml><?xml version="1.0" encoding="utf-8"?>
+<p:sld xmlns:a="http://schemas.openxmlformats.org/drawingml/2006/main" xmlns:p="http://schemas.openxmlformats.org/presentationml/2006/main" xmlns:r="http://schemas.openxmlformats.org/officeDocument/2006/relationships" xmlns:p14="http://schemas.microsoft.com/office/powerpoint/2010/main" xmlns:p15="http://schemas.microsoft.com/office/powerpoint/2012/main" xmlns:mc="http://schemas.openxmlformats.org/markup-compatibility/2006">
+  <p:cSld>
+    <p:spTree>
+      <p:nvGrpSpPr>
+        <p:cNvPr id="1" name=""/>
+        <p:cNvGrpSpPr/>
+        <p:nvPr/>
+      </p:nvGrpSpPr>
+      <p:grpSpPr>
+        <a:xfrm>
+          <a:off x="0" y="0"/>
+          <a:ext cx="0" cy="0"/>
+          <a:chOff x="0" y="0"/>
+          <a:chExt cx="0" cy="0"/>
+        </a:xfrm>
+      </p:grpSpPr>
+      <p:sp>
+        <p:nvSpPr>
+          <p:cNvPr id="220" name="PlaceHolder 1"/>
+          <p:cNvSpPr>
+            <a:spLocks noGrp="1"/>
+          </p:cNvSpPr>
+          <p:nvPr>
+            <p:ph type="title"/>
+          </p:nvPr>
+        </p:nvSpPr>
+        <p:spPr>
+          <a:xfrm>
+            <a:off x="838080" y="365040"/>
+            <a:ext cx="10512720" cy="540720"/>
+          </a:xfrm>
+          <a:prstGeom prst="rect">
+            <a:avLst/>
+          </a:prstGeom>
+          <a:noFill/>
+          <a:ln w="0">
+            <a:noFill/>
+          </a:ln>
+        </p:spPr>
+        <p:txBody>
+          <a:bodyPr lIns="90000" rIns="90000" tIns="45000" bIns="45000" anchor="ctr">
+            <a:noAutofit/>
+          </a:bodyPr>
+          <a:p>
+            <a:pPr>
+              <a:lnSpc>
+                <a:spcPct val="90000"/>
+              </a:lnSpc>
+              <a:buNone/>
+            </a:pPr>
+            <a:r>
+              <a:rPr b="1" lang="es-ES" sz="2400" spc="-1" strike="noStrike">
+                <a:solidFill>
+                  <a:srgbClr val="000000"/>
+                </a:solidFill>
+                <a:latin typeface="Calibri"/>
+              </a:rPr>
+              <a:t>Máquinas de vectores de soporte SVM </a:t>
+            </a:r>
+            <a:endParaRPr b="0" lang="en-US" sz="2400" spc="-1" strike="noStrike">
+              <a:latin typeface="Arial"/>
+            </a:endParaRPr>
+          </a:p>
+        </p:txBody>
+      </p:sp>
+      <p:sp>
+        <p:nvSpPr>
+          <p:cNvPr id="221" name="PlaceHolder 2"/>
+          <p:cNvSpPr>
+            <a:spLocks noGrp="1"/>
+          </p:cNvSpPr>
+          <p:nvPr>
+            <p:ph/>
+          </p:nvPr>
+        </p:nvSpPr>
+        <p:spPr>
+          <a:xfrm>
+            <a:off x="2340000" y="1260000"/>
+            <a:ext cx="8818560" cy="537480"/>
+          </a:xfrm>
+          <a:prstGeom prst="rect">
+            <a:avLst/>
+          </a:prstGeom>
+          <a:noFill/>
+          <a:ln w="0">
+            <a:noFill/>
+          </a:ln>
+        </p:spPr>
+        <p:txBody>
+          <a:bodyPr lIns="90000" rIns="90000" tIns="45000" bIns="45000" anchor="t">
+            <a:noAutofit/>
+          </a:bodyPr>
+          <a:p>
+            <a:pPr marL="228600" indent="-228600">
+              <a:lnSpc>
+                <a:spcPct val="90000"/>
+              </a:lnSpc>
+              <a:spcBef>
+                <a:spcPts val="1001"/>
+              </a:spcBef>
+              <a:buClr>
+                <a:srgbClr val="000000"/>
+              </a:buClr>
+              <a:buFont typeface="Arial"/>
+              <a:buChar char="•"/>
+            </a:pPr>
+            <a:r>
+              <a:rPr b="0" lang="es-ES" sz="2600" spc="-1" strike="noStrike">
+                <a:solidFill>
+                  <a:srgbClr val="ff0000"/>
+                </a:solidFill>
+                <a:latin typeface="Calibri"/>
+              </a:rPr>
+              <a:t>ESCALAR LOS DATOS ANTES DE USAR SVM</a:t>
+            </a:r>
+            <a:endParaRPr b="0" lang="en-US" sz="2600" spc="-1" strike="noStrike">
+              <a:latin typeface="Arial"/>
+            </a:endParaRPr>
+          </a:p>
+        </p:txBody>
+      </p:sp>
+      <p:pic>
+        <p:nvPicPr>
+          <p:cNvPr id="222" name="" descr=""/>
+          <p:cNvPicPr/>
+          <p:nvPr/>
+        </p:nvPicPr>
+        <p:blipFill>
+          <a:blip r:embed="rId1"/>
+          <a:stretch/>
+        </p:blipFill>
+        <p:spPr>
+          <a:xfrm>
+            <a:off x="7094880" y="2700000"/>
+            <a:ext cx="3882600" cy="3108600"/>
+          </a:xfrm>
+          <a:prstGeom prst="rect">
+            <a:avLst/>
+          </a:prstGeom>
+          <a:ln w="0">
+            <a:noFill/>
+          </a:ln>
+        </p:spPr>
+      </p:pic>
+      <p:sp>
+        <p:nvSpPr>
+          <p:cNvPr id="223" name=""/>
+          <p:cNvSpPr/>
+          <p:nvPr/>
+        </p:nvSpPr>
+        <p:spPr>
+          <a:xfrm>
+            <a:off x="889920" y="2160000"/>
+            <a:ext cx="5037480" cy="959400"/>
+          </a:xfrm>
+          <a:prstGeom prst="rect">
+            <a:avLst/>
+          </a:prstGeom>
+          <a:noFill/>
+          <a:ln w="0">
+            <a:noFill/>
+          </a:ln>
+        </p:spPr>
+        <p:style>
+          <a:lnRef idx="0"/>
+          <a:fillRef idx="0"/>
+          <a:effectRef idx="0"/>
+          <a:fontRef idx="minor"/>
+        </p:style>
+        <p:txBody>
+          <a:bodyPr lIns="90000" rIns="90000" tIns="45000" bIns="45000" anchor="t">
+            <a:noAutofit/>
+          </a:bodyPr>
+          <a:p>
+            <a:pPr>
+              <a:lnSpc>
+                <a:spcPct val="100000"/>
+              </a:lnSpc>
+              <a:spcBef>
+                <a:spcPts val="1191"/>
+              </a:spcBef>
+              <a:spcAft>
+                <a:spcPts val="992"/>
+              </a:spcAft>
+              <a:buNone/>
+            </a:pPr>
+            <a:r>
+              <a:rPr b="1" lang="en-US" sz="2400" spc="-1" strike="noStrike">
+                <a:solidFill>
+                  <a:srgbClr val="000000"/>
+                </a:solidFill>
+                <a:latin typeface="Arial"/>
+                <a:ea typeface="DejaVu Sans"/>
+              </a:rPr>
+              <a:t>No es obligatorio, pero es una práctica recomendada</a:t>
+            </a:r>
+            <a:endParaRPr b="0" lang="en-US" sz="2400" spc="-1" strike="noStrike">
+              <a:latin typeface="Arial"/>
+            </a:endParaRPr>
+          </a:p>
+          <a:p>
+            <a:pPr>
+              <a:lnSpc>
+                <a:spcPct val="100000"/>
+              </a:lnSpc>
+              <a:spcBef>
+                <a:spcPts val="1191"/>
+              </a:spcBef>
+              <a:spcAft>
+                <a:spcPts val="992"/>
+              </a:spcAft>
+              <a:buNone/>
+            </a:pPr>
+            <a:r>
+              <a:rPr b="1" lang="en-US" sz="2400" spc="-1" strike="noStrike">
+                <a:solidFill>
+                  <a:srgbClr val="000000"/>
+                </a:solidFill>
+                <a:latin typeface="Arial"/>
+                <a:ea typeface="DejaVu Sans"/>
+              </a:rPr>
+              <a:t>StandardScaler</a:t>
+            </a:r>
+            <a:endParaRPr b="0" lang="en-US" sz="2400" spc="-1" strike="noStrike">
+              <a:latin typeface="Arial"/>
+            </a:endParaRPr>
+          </a:p>
+          <a:p>
+            <a:pPr>
+              <a:lnSpc>
+                <a:spcPct val="100000"/>
+              </a:lnSpc>
+              <a:spcBef>
+                <a:spcPts val="1191"/>
+              </a:spcBef>
+              <a:spcAft>
+                <a:spcPts val="992"/>
+              </a:spcAft>
+              <a:buNone/>
+            </a:pPr>
+            <a:r>
+              <a:rPr b="0" lang="es-ES" sz="2000" spc="-1" strike="noStrike">
+                <a:solidFill>
+                  <a:srgbClr val="000000"/>
+                </a:solidFill>
+                <a:latin typeface="Calibri"/>
+                <a:ea typeface="DejaVu Sans"/>
+              </a:rPr>
+              <a:t>Recomendado para la mayoría de los casos</a:t>
+            </a:r>
+            <a:endParaRPr b="0" lang="en-US" sz="2000" spc="-1" strike="noStrike">
+              <a:latin typeface="Arial"/>
+            </a:endParaRPr>
+          </a:p>
+          <a:p>
+            <a:pPr>
+              <a:lnSpc>
+                <a:spcPct val="100000"/>
+              </a:lnSpc>
+              <a:buNone/>
+            </a:pPr>
+            <a:r>
+              <a:rPr b="1" lang="es-ES" sz="2000" spc="-1" strike="noStrike">
+                <a:solidFill>
+                  <a:srgbClr val="000000"/>
+                </a:solidFill>
+                <a:latin typeface="Calibri"/>
+                <a:ea typeface="DejaVu Sans"/>
+              </a:rPr>
+              <a:t>Convergencia más rápida</a:t>
+            </a:r>
+            <a:endParaRPr b="0" lang="en-US" sz="2000" spc="-1" strike="noStrike">
+              <a:latin typeface="Arial"/>
+            </a:endParaRPr>
+          </a:p>
+          <a:p>
+            <a:pPr>
+              <a:lnSpc>
+                <a:spcPct val="100000"/>
+              </a:lnSpc>
+              <a:buNone/>
+            </a:pPr>
+            <a:r>
+              <a:rPr b="1" lang="es-ES" sz="2000" spc="-1" strike="noStrike">
+                <a:solidFill>
+                  <a:srgbClr val="000000"/>
+                </a:solidFill>
+                <a:latin typeface="Calibri"/>
+                <a:ea typeface="DejaVu Sans"/>
+              </a:rPr>
+              <a:t>Regularización:</a:t>
+            </a:r>
+            <a:r>
+              <a:rPr b="0" lang="es-ES" sz="2000" spc="-1" strike="noStrike">
+                <a:solidFill>
+                  <a:srgbClr val="000000"/>
+                </a:solidFill>
+                <a:latin typeface="Calibri"/>
+                <a:ea typeface="DejaVu Sans"/>
+              </a:rPr>
+              <a:t> Todas la características contribuyan por igual  a la penalización de la regulación, evitando que las características con rangos más grandes dominen el modelo</a:t>
+            </a:r>
+            <a:endParaRPr b="0" lang="en-US" sz="2000" spc="-1" strike="noStrike">
+              <a:latin typeface="Arial"/>
+            </a:endParaRPr>
+          </a:p>
+        </p:txBody>
+      </p:sp>
+      <p:pic>
+        <p:nvPicPr>
+          <p:cNvPr id="224" name="" descr=""/>
+          <p:cNvPicPr/>
+          <p:nvPr/>
+        </p:nvPicPr>
+        <p:blipFill>
+          <a:blip r:embed="rId2"/>
+          <a:stretch/>
+        </p:blipFill>
+        <p:spPr>
+          <a:xfrm>
+            <a:off x="1260000" y="971280"/>
+            <a:ext cx="827280" cy="827280"/>
+          </a:xfrm>
+          <a:prstGeom prst="rect">
+            <a:avLst/>
+          </a:prstGeom>
+          <a:ln w="0">
+            <a:noFill/>
+          </a:ln>
+        </p:spPr>
+      </p:pic>
+    </p:spTree>
+  </p:cSld>
+  <mc:AlternateContent>
+    <mc:Choice Requires="p14">
+      <p:transition spd="med" p14:dur="700">
+        <p:fade/>
+      </p:transition>
+    </mc:Choice>
+    <mc:Fallback>
+      <p:transition spd="med">
+        <p:fade/>
+      </p:transition>
+    </mc:Fallback>
+  </mc:AlternateContent>
+</p:sld>
+</file>
+
+<file path=ppt/slides/slide52.xml><?xml version="1.0" encoding="utf-8"?>
+<p:sld xmlns:a="http://schemas.openxmlformats.org/drawingml/2006/main" xmlns:p="http://schemas.openxmlformats.org/presentationml/2006/main" xmlns:r="http://schemas.openxmlformats.org/officeDocument/2006/relationships" xmlns:p14="http://schemas.microsoft.com/office/powerpoint/2010/main" xmlns:p15="http://schemas.microsoft.com/office/powerpoint/2012/main" xmlns:mc="http://schemas.openxmlformats.org/markup-compatibility/2006">
+  <p:cSld>
+    <p:spTree>
+      <p:nvGrpSpPr>
+        <p:cNvPr id="1" name=""/>
+        <p:cNvGrpSpPr/>
+        <p:nvPr/>
+      </p:nvGrpSpPr>
+      <p:grpSpPr>
+        <a:xfrm>
+          <a:off x="0" y="0"/>
+          <a:ext cx="0" cy="0"/>
+          <a:chOff x="0" y="0"/>
+          <a:chExt cx="0" cy="0"/>
+        </a:xfrm>
+      </p:grpSpPr>
+      <p:sp>
+        <p:nvSpPr>
+          <p:cNvPr id="225" name="PlaceHolder 1"/>
+          <p:cNvSpPr>
+            <a:spLocks noGrp="1"/>
+          </p:cNvSpPr>
+          <p:nvPr>
+            <p:ph type="title"/>
+          </p:nvPr>
+        </p:nvSpPr>
+        <p:spPr>
+          <a:xfrm>
+            <a:off x="838080" y="365040"/>
+            <a:ext cx="10507320" cy="535320"/>
+          </a:xfrm>
+          <a:prstGeom prst="rect">
+            <a:avLst/>
+          </a:prstGeom>
+          <a:noFill/>
+          <a:ln w="0">
+            <a:noFill/>
+          </a:ln>
+        </p:spPr>
+        <p:txBody>
+          <a:bodyPr lIns="90000" rIns="90000" tIns="45000" bIns="45000" anchor="ctr">
+            <a:noAutofit/>
+          </a:bodyPr>
+          <a:p>
+            <a:pPr>
+              <a:lnSpc>
+                <a:spcPct val="90000"/>
+              </a:lnSpc>
+              <a:buNone/>
+            </a:pPr>
+            <a:r>
+              <a:rPr b="1" lang="es-ES" sz="2400" spc="-1" strike="noStrike">
+                <a:solidFill>
+                  <a:srgbClr val="000000"/>
+                </a:solidFill>
+                <a:latin typeface="Calibri"/>
+              </a:rPr>
+              <a:t>Máquinas de vectores de soporte SVM </a:t>
+            </a:r>
+            <a:endParaRPr b="0" lang="en-US" sz="2400" spc="-1" strike="noStrike">
+              <a:latin typeface="Arial"/>
+            </a:endParaRPr>
+          </a:p>
+        </p:txBody>
+      </p:sp>
+      <p:pic>
+        <p:nvPicPr>
+          <p:cNvPr id="226" name="" descr=""/>
+          <p:cNvPicPr/>
+          <p:nvPr/>
+        </p:nvPicPr>
+        <p:blipFill>
+          <a:blip r:embed="rId1"/>
+          <a:stretch/>
+        </p:blipFill>
+        <p:spPr>
+          <a:xfrm>
+            <a:off x="1980000" y="1260000"/>
+            <a:ext cx="8998200" cy="4786920"/>
+          </a:xfrm>
+          <a:prstGeom prst="rect">
+            <a:avLst/>
+          </a:prstGeom>
+          <a:ln w="0">
+            <a:noFill/>
+          </a:ln>
+        </p:spPr>
+      </p:pic>
+    </p:spTree>
+  </p:cSld>
+  <mc:AlternateContent>
+    <mc:Choice Requires="p14">
+      <p:transition spd="med" p14:dur="700">
+        <p:fade/>
+      </p:transition>
+    </mc:Choice>
+    <mc:Fallback>
+      <p:transition spd="med">
+        <p:fade/>
+      </p:transition>
+    </mc:Fallback>
+  </mc:AlternateContent>
+</p:sld>
+</file>
+
+<file path=ppt/slides/slide53.xml><?xml version="1.0" encoding="utf-8"?>
+<p:sld xmlns:a="http://schemas.openxmlformats.org/drawingml/2006/main" xmlns:p="http://schemas.openxmlformats.org/presentationml/2006/main" xmlns:r="http://schemas.openxmlformats.org/officeDocument/2006/relationships" xmlns:p14="http://schemas.microsoft.com/office/powerpoint/2010/main" xmlns:p15="http://schemas.microsoft.com/office/powerpoint/2012/main" xmlns:mc="http://schemas.openxmlformats.org/markup-compatibility/2006">
+  <p:cSld>
+    <p:spTree>
+      <p:nvGrpSpPr>
+        <p:cNvPr id="1" name=""/>
+        <p:cNvGrpSpPr/>
+        <p:nvPr/>
+      </p:nvGrpSpPr>
+      <p:grpSpPr>
+        <a:xfrm>
+          <a:off x="0" y="0"/>
+          <a:ext cx="0" cy="0"/>
+          <a:chOff x="0" y="0"/>
+          <a:chExt cx="0" cy="0"/>
+        </a:xfrm>
+      </p:grpSpPr>
+      <p:sp>
+        <p:nvSpPr>
+          <p:cNvPr id="227" name="PlaceHolder 1"/>
+          <p:cNvSpPr>
+            <a:spLocks noGrp="1"/>
+          </p:cNvSpPr>
+          <p:nvPr>
+            <p:ph type="title"/>
+          </p:nvPr>
+        </p:nvSpPr>
+        <p:spPr>
+          <a:xfrm>
+            <a:off x="838080" y="365040"/>
+            <a:ext cx="10507320" cy="535320"/>
+          </a:xfrm>
+          <a:prstGeom prst="rect">
+            <a:avLst/>
+          </a:prstGeom>
+          <a:noFill/>
+          <a:ln w="0">
+            <a:noFill/>
+          </a:ln>
+        </p:spPr>
+        <p:txBody>
+          <a:bodyPr lIns="90000" rIns="90000" tIns="45000" bIns="45000" anchor="ctr">
+            <a:noAutofit/>
+          </a:bodyPr>
+          <a:p>
+            <a:pPr>
+              <a:lnSpc>
+                <a:spcPct val="90000"/>
+              </a:lnSpc>
+              <a:buNone/>
+            </a:pPr>
+            <a:r>
+              <a:rPr b="1" lang="es-ES" sz="2400" spc="-1" strike="noStrike">
+                <a:solidFill>
+                  <a:srgbClr val="000000"/>
+                </a:solidFill>
+                <a:latin typeface="Calibri"/>
+              </a:rPr>
+              <a:t>Máquinas de vectores de soporte SVM </a:t>
+            </a:r>
+            <a:endParaRPr b="0" lang="en-US" sz="2400" spc="-1" strike="noStrike">
+              <a:latin typeface="Arial"/>
+            </a:endParaRPr>
+          </a:p>
+        </p:txBody>
+      </p:sp>
+      <p:sp>
+        <p:nvSpPr>
+          <p:cNvPr id="228" name="PlaceHolder 2"/>
+          <p:cNvSpPr>
+            <a:spLocks noGrp="1"/>
+          </p:cNvSpPr>
+          <p:nvPr>
+            <p:ph/>
+          </p:nvPr>
+        </p:nvSpPr>
+        <p:spPr>
+          <a:xfrm>
+            <a:off x="838080" y="1124640"/>
+            <a:ext cx="10507320" cy="1213560"/>
+          </a:xfrm>
+          <a:prstGeom prst="rect">
+            <a:avLst/>
+          </a:prstGeom>
+          <a:noFill/>
+          <a:ln w="0">
+            <a:noFill/>
+          </a:ln>
+        </p:spPr>
+        <p:txBody>
+          <a:bodyPr lIns="90000" rIns="90000" tIns="45000" bIns="45000" anchor="t">
+            <a:noAutofit/>
+          </a:bodyPr>
+          <a:p>
+            <a:pPr>
+              <a:lnSpc>
+                <a:spcPct val="100000"/>
+              </a:lnSpc>
+              <a:buNone/>
+            </a:pPr>
+            <a:r>
+              <a:rPr b="0" lang="es-ES" sz="2400" spc="-1" strike="noStrike">
+                <a:latin typeface="Calibri"/>
+              </a:rPr>
+              <a:t>En un problema de clasificación binaria, SVM busca un hiperplano que separe las dos clases en el espacio de características.</a:t>
+            </a:r>
+            <a:endParaRPr b="0" lang="en-US" sz="2400" spc="-1" strike="noStrike">
+              <a:latin typeface="Arial"/>
+            </a:endParaRPr>
+          </a:p>
+          <a:p>
+            <a:pPr>
+              <a:lnSpc>
+                <a:spcPct val="100000"/>
+              </a:lnSpc>
+              <a:buNone/>
+            </a:pPr>
+            <a:r>
+              <a:rPr b="0" lang="es-ES" sz="2400" spc="-1" strike="noStrike">
+                <a:latin typeface="Calibri"/>
+              </a:rPr>
+              <a:t>El “mejor” hiperplano no es cualquiera, sino el que maximiza el margen (la distancia entre el hiperplano y los vectores de soporte más cercanos).</a:t>
+            </a:r>
+            <a:endParaRPr b="0" lang="en-US" sz="2400" spc="-1" strike="noStrike">
+              <a:latin typeface="Arial"/>
+            </a:endParaRPr>
+          </a:p>
+          <a:p>
+            <a:pPr>
+              <a:lnSpc>
+                <a:spcPct val="100000"/>
+              </a:lnSpc>
+              <a:buNone/>
+            </a:pPr>
+            <a:endParaRPr b="0" lang="en-US" sz="2400" spc="-1" strike="noStrike">
+              <a:latin typeface="Arial"/>
+            </a:endParaRPr>
+          </a:p>
+          <a:p>
+            <a:pPr>
+              <a:lnSpc>
+                <a:spcPct val="100000"/>
+              </a:lnSpc>
+              <a:buNone/>
+            </a:pPr>
+            <a:endParaRPr b="0" lang="en-US" sz="1800" spc="-1" strike="noStrike">
+              <a:latin typeface="Arial"/>
+            </a:endParaRPr>
+          </a:p>
+        </p:txBody>
+      </p:sp>
+      <p:pic>
+        <p:nvPicPr>
+          <p:cNvPr id="229" name="" descr=""/>
+          <p:cNvPicPr/>
+          <p:nvPr/>
+        </p:nvPicPr>
+        <p:blipFill>
+          <a:blip r:embed="rId1"/>
+          <a:srcRect l="2822" t="0" r="3238" b="0"/>
+          <a:stretch/>
+        </p:blipFill>
+        <p:spPr>
+          <a:xfrm>
+            <a:off x="3420000" y="3060000"/>
+            <a:ext cx="5219280" cy="3111120"/>
+          </a:xfrm>
+          <a:prstGeom prst="rect">
+            <a:avLst/>
+          </a:prstGeom>
+          <a:ln w="0">
+            <a:noFill/>
+          </a:ln>
+        </p:spPr>
+      </p:pic>
+    </p:spTree>
+  </p:cSld>
+  <mc:AlternateContent>
+    <mc:Choice Requires="p14">
+      <p:transition spd="med" p14:dur="700">
+        <p:fade/>
+      </p:transition>
+    </mc:Choice>
+    <mc:Fallback>
+      <p:transition spd="med">
+        <p:fade/>
+      </p:transition>
+    </mc:Fallback>
+  </mc:AlternateContent>
+</p:sld>
+</file>
+
+<file path=ppt/slides/slide54.xml><?xml version="1.0" encoding="utf-8"?>
+<p:sld xmlns:a="http://schemas.openxmlformats.org/drawingml/2006/main" xmlns:p="http://schemas.openxmlformats.org/presentationml/2006/main" xmlns:r="http://schemas.openxmlformats.org/officeDocument/2006/relationships" xmlns:p14="http://schemas.microsoft.com/office/powerpoint/2010/main" xmlns:p15="http://schemas.microsoft.com/office/powerpoint/2012/main" xmlns:mc="http://schemas.openxmlformats.org/markup-compatibility/2006">
+  <p:cSld>
+    <p:spTree>
+      <p:nvGrpSpPr>
+        <p:cNvPr id="1" name=""/>
+        <p:cNvGrpSpPr/>
+        <p:nvPr/>
+      </p:nvGrpSpPr>
+      <p:grpSpPr>
+        <a:xfrm>
+          <a:off x="0" y="0"/>
+          <a:ext cx="0" cy="0"/>
+          <a:chOff x="0" y="0"/>
+          <a:chExt cx="0" cy="0"/>
+        </a:xfrm>
+      </p:grpSpPr>
+      <p:sp>
+        <p:nvSpPr>
+          <p:cNvPr id="230" name="PlaceHolder 1"/>
+          <p:cNvSpPr>
+            <a:spLocks noGrp="1"/>
+          </p:cNvSpPr>
+          <p:nvPr>
+            <p:ph type="title"/>
+          </p:nvPr>
+        </p:nvSpPr>
+        <p:spPr>
+          <a:xfrm>
+            <a:off x="838080" y="365040"/>
+            <a:ext cx="10507320" cy="535320"/>
+          </a:xfrm>
+          <a:prstGeom prst="rect">
+            <a:avLst/>
+          </a:prstGeom>
+          <a:noFill/>
+          <a:ln w="0">
+            <a:noFill/>
+          </a:ln>
+        </p:spPr>
+        <p:txBody>
+          <a:bodyPr lIns="90000" rIns="90000" tIns="45000" bIns="45000" anchor="ctr">
+            <a:noAutofit/>
+          </a:bodyPr>
+          <a:p>
+            <a:pPr>
+              <a:lnSpc>
+                <a:spcPct val="90000"/>
+              </a:lnSpc>
+              <a:buNone/>
+            </a:pPr>
+            <a:r>
+              <a:rPr b="1" lang="es-ES" sz="2400" spc="-1" strike="noStrike">
+                <a:solidFill>
+                  <a:srgbClr val="000000"/>
+                </a:solidFill>
+                <a:latin typeface="Calibri"/>
+              </a:rPr>
+              <a:t>Máquinas de vectores de soporte SVM </a:t>
+            </a:r>
+            <a:endParaRPr b="0" lang="en-US" sz="2400" spc="-1" strike="noStrike">
+              <a:latin typeface="Arial"/>
+            </a:endParaRPr>
+          </a:p>
+        </p:txBody>
+      </p:sp>
+      <p:sp>
+        <p:nvSpPr>
+          <p:cNvPr id="231" name="PlaceHolder 2"/>
+          <p:cNvSpPr>
+            <a:spLocks noGrp="1"/>
+          </p:cNvSpPr>
+          <p:nvPr>
+            <p:ph/>
+          </p:nvPr>
+        </p:nvSpPr>
+        <p:spPr>
+          <a:xfrm>
+            <a:off x="838080" y="1124640"/>
+            <a:ext cx="10507320" cy="1575000"/>
+          </a:xfrm>
+          <a:prstGeom prst="rect">
+            <a:avLst/>
+          </a:prstGeom>
+          <a:noFill/>
+          <a:ln w="0">
+            <a:noFill/>
+          </a:ln>
+        </p:spPr>
+        <p:txBody>
+          <a:bodyPr lIns="90000" rIns="90000" tIns="45000" bIns="45000" anchor="t">
+            <a:noAutofit/>
+          </a:bodyPr>
+          <a:p>
+            <a:pPr>
+              <a:lnSpc>
+                <a:spcPct val="100000"/>
+              </a:lnSpc>
+              <a:buNone/>
+            </a:pPr>
+            <a:r>
+              <a:rPr b="1" lang="es-ES" sz="2400" spc="-1" strike="noStrike">
+                <a:latin typeface="Calibri"/>
+              </a:rPr>
+              <a:t>Kernel</a:t>
+            </a:r>
+            <a:r>
+              <a:rPr b="0" lang="es-ES" sz="2400" spc="-1" strike="noStrike">
+                <a:latin typeface="Calibri"/>
+              </a:rPr>
+              <a:t>: es una función matemática que permite manejar datos que no son linealmente separables en su espacio original. Su función principal es transformar estos datos a un espacio dimensional superior donde la separación entre clases pueda realizarse mediante un hiperplano lineal</a:t>
+            </a:r>
+            <a:endParaRPr b="0" lang="en-US" sz="2400" spc="-1" strike="noStrike">
+              <a:latin typeface="Arial"/>
+            </a:endParaRPr>
+          </a:p>
+          <a:p>
+            <a:pPr>
+              <a:lnSpc>
+                <a:spcPct val="100000"/>
+              </a:lnSpc>
+              <a:buNone/>
+            </a:pPr>
+            <a:endParaRPr b="0" lang="en-US" sz="2400" spc="-1" strike="noStrike">
+              <a:latin typeface="Arial"/>
+            </a:endParaRPr>
+          </a:p>
+          <a:p>
+            <a:pPr>
+              <a:lnSpc>
+                <a:spcPct val="100000"/>
+              </a:lnSpc>
+              <a:buNone/>
+            </a:pPr>
+            <a:endParaRPr b="0" lang="en-US" sz="1800" spc="-1" strike="noStrike">
+              <a:latin typeface="Arial"/>
+            </a:endParaRPr>
+          </a:p>
+        </p:txBody>
+      </p:sp>
+      <p:pic>
+        <p:nvPicPr>
+          <p:cNvPr id="232" name="" descr=""/>
+          <p:cNvPicPr/>
+          <p:nvPr/>
+        </p:nvPicPr>
+        <p:blipFill>
+          <a:blip r:embed="rId1"/>
+          <a:stretch/>
+        </p:blipFill>
+        <p:spPr>
+          <a:xfrm>
+            <a:off x="1260000" y="2880000"/>
+            <a:ext cx="9539640" cy="3111480"/>
+          </a:xfrm>
+          <a:prstGeom prst="rect">
+            <a:avLst/>
+          </a:prstGeom>
+          <a:ln w="0">
+            <a:noFill/>
+          </a:ln>
+        </p:spPr>
+      </p:pic>
+    </p:spTree>
+  </p:cSld>
+  <mc:AlternateContent>
+    <mc:Choice Requires="p14">
+      <p:transition spd="med" p14:dur="700">
+        <p:fade/>
+      </p:transition>
+    </mc:Choice>
+    <mc:Fallback>
+      <p:transition spd="med">
+        <p:fade/>
+      </p:transition>
+    </mc:Fallback>
+  </mc:AlternateContent>
+</p:sld>
+</file>
+
+<file path=ppt/slides/slide55.xml><?xml version="1.0" encoding="utf-8"?>
+<p:sld xmlns:a="http://schemas.openxmlformats.org/drawingml/2006/main" xmlns:p="http://schemas.openxmlformats.org/presentationml/2006/main" xmlns:r="http://schemas.openxmlformats.org/officeDocument/2006/relationships" xmlns:p14="http://schemas.microsoft.com/office/powerpoint/2010/main" xmlns:p15="http://schemas.microsoft.com/office/powerpoint/2012/main" xmlns:mc="http://schemas.openxmlformats.org/markup-compatibility/2006">
+  <p:cSld>
+    <p:spTree>
+      <p:nvGrpSpPr>
+        <p:cNvPr id="1" name=""/>
+        <p:cNvGrpSpPr/>
+        <p:nvPr/>
+      </p:nvGrpSpPr>
+      <p:grpSpPr>
+        <a:xfrm>
+          <a:off x="0" y="0"/>
+          <a:ext cx="0" cy="0"/>
+          <a:chOff x="0" y="0"/>
+          <a:chExt cx="0" cy="0"/>
+        </a:xfrm>
+      </p:grpSpPr>
+      <p:sp>
+        <p:nvSpPr>
+          <p:cNvPr id="233" name="PlaceHolder 1"/>
+          <p:cNvSpPr>
+            <a:spLocks noGrp="1"/>
+          </p:cNvSpPr>
+          <p:nvPr>
+            <p:ph type="title"/>
+          </p:nvPr>
+        </p:nvSpPr>
+        <p:spPr>
+          <a:xfrm>
+            <a:off x="838080" y="365040"/>
+            <a:ext cx="10507320" cy="535320"/>
+          </a:xfrm>
+          <a:prstGeom prst="rect">
+            <a:avLst/>
+          </a:prstGeom>
+          <a:noFill/>
+          <a:ln w="0">
+            <a:noFill/>
+          </a:ln>
+        </p:spPr>
+        <p:txBody>
+          <a:bodyPr lIns="90000" rIns="90000" tIns="45000" bIns="45000" anchor="ctr">
+            <a:noAutofit/>
+          </a:bodyPr>
+          <a:p>
+            <a:pPr>
+              <a:lnSpc>
+                <a:spcPct val="90000"/>
+              </a:lnSpc>
+              <a:buNone/>
+            </a:pPr>
+            <a:r>
+              <a:rPr b="1" lang="es-ES" sz="2400" spc="-1" strike="noStrike">
+                <a:solidFill>
+                  <a:srgbClr val="000000"/>
+                </a:solidFill>
+                <a:latin typeface="Calibri"/>
+              </a:rPr>
+              <a:t>Máquinas de vectores de soporte SVM </a:t>
+            </a:r>
+            <a:endParaRPr b="0" lang="en-US" sz="2400" spc="-1" strike="noStrike">
+              <a:latin typeface="Arial"/>
+            </a:endParaRPr>
+          </a:p>
+        </p:txBody>
+      </p:sp>
+      <p:sp>
+        <p:nvSpPr>
+          <p:cNvPr id="234" name="PlaceHolder 2"/>
+          <p:cNvSpPr>
+            <a:spLocks noGrp="1"/>
+          </p:cNvSpPr>
+          <p:nvPr>
+            <p:ph/>
+          </p:nvPr>
+        </p:nvSpPr>
+        <p:spPr>
+          <a:xfrm>
+            <a:off x="832320" y="1260000"/>
+            <a:ext cx="10507320" cy="1575000"/>
+          </a:xfrm>
+          <a:prstGeom prst="rect">
+            <a:avLst/>
+          </a:prstGeom>
+          <a:noFill/>
+          <a:ln w="0">
+            <a:noFill/>
+          </a:ln>
+        </p:spPr>
+        <p:txBody>
+          <a:bodyPr lIns="90000" rIns="90000" tIns="45000" bIns="45000" anchor="t">
+            <a:noAutofit/>
+          </a:bodyPr>
+          <a:p>
+            <a:pPr>
+              <a:lnSpc>
+                <a:spcPct val="100000"/>
+              </a:lnSpc>
+              <a:buNone/>
+            </a:pPr>
+            <a:r>
+              <a:rPr b="1" lang="es-ES" sz="2400" spc="-1" strike="noStrike">
+                <a:latin typeface="Calibri"/>
+              </a:rPr>
+              <a:t>Kernel Lineal (Linear Kernel):</a:t>
+            </a:r>
+            <a:r>
+              <a:rPr b="0" lang="es-ES" sz="2400" spc="-1" strike="noStrike">
+                <a:latin typeface="Calibri"/>
+              </a:rPr>
+              <a:t> Es la opción más básica y computacionalmente eficiente, adecuada cuando existe una relación lineal entre las clases de datos. No realiza ninguna transformación de espacio, operando directamente en el espacio de entrada</a:t>
+            </a:r>
+            <a:endParaRPr b="0" lang="en-US" sz="2400" spc="-1" strike="noStrike">
+              <a:latin typeface="Arial"/>
+            </a:endParaRPr>
+          </a:p>
+          <a:p>
+            <a:pPr>
+              <a:lnSpc>
+                <a:spcPct val="100000"/>
+              </a:lnSpc>
+              <a:buNone/>
+            </a:pPr>
+            <a:endParaRPr b="0" lang="en-US" sz="2400" spc="-1" strike="noStrike">
+              <a:latin typeface="Arial"/>
+            </a:endParaRPr>
+          </a:p>
+          <a:p>
+            <a:pPr>
+              <a:lnSpc>
+                <a:spcPct val="100000"/>
+              </a:lnSpc>
+              <a:buNone/>
+            </a:pPr>
+            <a:endParaRPr b="0" lang="en-US" sz="1800" spc="-1" strike="noStrike">
+              <a:latin typeface="Arial"/>
+            </a:endParaRPr>
+          </a:p>
+        </p:txBody>
+      </p:sp>
+      <p:pic>
+        <p:nvPicPr>
+          <p:cNvPr id="235" name="" descr=""/>
+          <p:cNvPicPr/>
+          <p:nvPr/>
+        </p:nvPicPr>
+        <p:blipFill>
+          <a:blip r:embed="rId1"/>
+          <a:stretch/>
+        </p:blipFill>
+        <p:spPr>
+          <a:xfrm>
+            <a:off x="900000" y="3350160"/>
+            <a:ext cx="7807680" cy="1329480"/>
+          </a:xfrm>
+          <a:prstGeom prst="rect">
+            <a:avLst/>
+          </a:prstGeom>
+          <a:ln w="0">
+            <a:noFill/>
+          </a:ln>
+        </p:spPr>
+      </p:pic>
+    </p:spTree>
+  </p:cSld>
+  <mc:AlternateContent>
+    <mc:Choice Requires="p14">
+      <p:transition spd="med" p14:dur="700">
+        <p:fade/>
+      </p:transition>
+    </mc:Choice>
+    <mc:Fallback>
+      <p:transition spd="med">
+        <p:fade/>
+      </p:transition>
+    </mc:Fallback>
+  </mc:AlternateContent>
+</p:sld>
+</file>
+
+<file path=ppt/slides/slide56.xml><?xml version="1.0" encoding="utf-8"?>
+<p:sld xmlns:a="http://schemas.openxmlformats.org/drawingml/2006/main" xmlns:p="http://schemas.openxmlformats.org/presentationml/2006/main" xmlns:r="http://schemas.openxmlformats.org/officeDocument/2006/relationships" xmlns:p14="http://schemas.microsoft.com/office/powerpoint/2010/main" xmlns:p15="http://schemas.microsoft.com/office/powerpoint/2012/main" xmlns:mc="http://schemas.openxmlformats.org/markup-compatibility/2006">
+  <p:cSld>
+    <p:spTree>
+      <p:nvGrpSpPr>
+        <p:cNvPr id="1" name=""/>
+        <p:cNvGrpSpPr/>
+        <p:nvPr/>
+      </p:nvGrpSpPr>
+      <p:grpSpPr>
+        <a:xfrm>
+          <a:off x="0" y="0"/>
+          <a:ext cx="0" cy="0"/>
+          <a:chOff x="0" y="0"/>
+          <a:chExt cx="0" cy="0"/>
+        </a:xfrm>
+      </p:grpSpPr>
+      <p:sp>
+        <p:nvSpPr>
+          <p:cNvPr id="236" name="PlaceHolder 1"/>
+          <p:cNvSpPr>
+            <a:spLocks noGrp="1"/>
+          </p:cNvSpPr>
+          <p:nvPr>
+            <p:ph type="title"/>
+          </p:nvPr>
+        </p:nvSpPr>
+        <p:spPr>
+          <a:xfrm>
+            <a:off x="838080" y="365040"/>
+            <a:ext cx="10507320" cy="535320"/>
+          </a:xfrm>
+          <a:prstGeom prst="rect">
+            <a:avLst/>
+          </a:prstGeom>
+          <a:noFill/>
+          <a:ln w="0">
+            <a:noFill/>
+          </a:ln>
+        </p:spPr>
+        <p:txBody>
+          <a:bodyPr lIns="90000" rIns="90000" tIns="45000" bIns="45000" anchor="ctr">
+            <a:noAutofit/>
+          </a:bodyPr>
+          <a:p>
+            <a:pPr>
+              <a:lnSpc>
+                <a:spcPct val="90000"/>
+              </a:lnSpc>
+              <a:buNone/>
+            </a:pPr>
+            <a:r>
+              <a:rPr b="1" lang="es-ES" sz="2400" spc="-1" strike="noStrike">
+                <a:solidFill>
+                  <a:srgbClr val="000000"/>
+                </a:solidFill>
+                <a:latin typeface="Calibri"/>
+              </a:rPr>
+              <a:t>Máquinas de vectores de soporte SVM </a:t>
+            </a:r>
+            <a:endParaRPr b="0" lang="en-US" sz="2400" spc="-1" strike="noStrike">
+              <a:latin typeface="Arial"/>
+            </a:endParaRPr>
+          </a:p>
+        </p:txBody>
+      </p:sp>
+      <p:sp>
+        <p:nvSpPr>
+          <p:cNvPr id="237" name="PlaceHolder 2"/>
+          <p:cNvSpPr>
+            <a:spLocks noGrp="1"/>
+          </p:cNvSpPr>
+          <p:nvPr>
+            <p:ph/>
+          </p:nvPr>
+        </p:nvSpPr>
+        <p:spPr>
+          <a:xfrm>
+            <a:off x="832320" y="1260000"/>
+            <a:ext cx="10507320" cy="1575000"/>
+          </a:xfrm>
+          <a:prstGeom prst="rect">
+            <a:avLst/>
+          </a:prstGeom>
+          <a:noFill/>
+          <a:ln w="0">
+            <a:noFill/>
+          </a:ln>
+        </p:spPr>
+        <p:txBody>
+          <a:bodyPr lIns="90000" rIns="90000" tIns="45000" bIns="45000" anchor="t">
+            <a:noAutofit/>
+          </a:bodyPr>
+          <a:p>
+            <a:pPr>
+              <a:lnSpc>
+                <a:spcPct val="100000"/>
+              </a:lnSpc>
+              <a:buNone/>
+            </a:pPr>
+            <a:r>
+              <a:rPr b="1" lang="es-ES" sz="2400" spc="-1" strike="noStrike">
+                <a:latin typeface="Calibri"/>
+              </a:rPr>
+              <a:t>Kernel Polinómico (Polynomial Kernel):</a:t>
+            </a:r>
+            <a:r>
+              <a:rPr b="0" lang="es-ES" sz="2400" spc="-1" strike="noStrike">
+                <a:latin typeface="Calibri"/>
+              </a:rPr>
+              <a:t> Este kernel permite la creación de fronteras de decisión curvas al mapear implícitamente los datos a un espacio de características de mayor dimensión mediante funciones polinómicas de grado d</a:t>
+            </a:r>
+            <a:endParaRPr b="0" lang="en-US" sz="2400" spc="-1" strike="noStrike">
+              <a:latin typeface="Arial"/>
+            </a:endParaRPr>
+          </a:p>
+          <a:p>
+            <a:pPr>
+              <a:lnSpc>
+                <a:spcPct val="100000"/>
+              </a:lnSpc>
+              <a:buNone/>
+            </a:pPr>
+            <a:endParaRPr b="0" lang="en-US" sz="2400" spc="-1" strike="noStrike">
+              <a:latin typeface="Arial"/>
+            </a:endParaRPr>
+          </a:p>
+          <a:p>
+            <a:pPr>
+              <a:lnSpc>
+                <a:spcPct val="100000"/>
+              </a:lnSpc>
+              <a:buNone/>
+            </a:pPr>
+            <a:endParaRPr b="0" lang="en-US" sz="1800" spc="-1" strike="noStrike">
+              <a:latin typeface="Arial"/>
+            </a:endParaRPr>
+          </a:p>
+        </p:txBody>
+      </p:sp>
+      <p:pic>
+        <p:nvPicPr>
+          <p:cNvPr id="238" name="" descr=""/>
+          <p:cNvPicPr/>
+          <p:nvPr/>
+        </p:nvPicPr>
+        <p:blipFill>
+          <a:blip r:embed="rId1"/>
+          <a:stretch/>
+        </p:blipFill>
+        <p:spPr>
+          <a:xfrm>
+            <a:off x="1252800" y="2700000"/>
+            <a:ext cx="8646840" cy="3239640"/>
+          </a:xfrm>
+          <a:prstGeom prst="rect">
+            <a:avLst/>
+          </a:prstGeom>
+          <a:ln w="0">
+            <a:noFill/>
+          </a:ln>
+        </p:spPr>
+      </p:pic>
+    </p:spTree>
+  </p:cSld>
+  <mc:AlternateContent>
+    <mc:Choice Requires="p14">
+      <p:transition spd="med" p14:dur="700">
+        <p:fade/>
+      </p:transition>
+    </mc:Choice>
+    <mc:Fallback>
+      <p:transition spd="med">
+        <p:fade/>
+      </p:transition>
+    </mc:Fallback>
+  </mc:AlternateContent>
+</p:sld>
+</file>
+
+<file path=ppt/slides/slide57.xml><?xml version="1.0" encoding="utf-8"?>
+<p:sld xmlns:a="http://schemas.openxmlformats.org/drawingml/2006/main" xmlns:p="http://schemas.openxmlformats.org/presentationml/2006/main" xmlns:r="http://schemas.openxmlformats.org/officeDocument/2006/relationships" xmlns:p14="http://schemas.microsoft.com/office/powerpoint/2010/main" xmlns:p15="http://schemas.microsoft.com/office/powerpoint/2012/main" xmlns:mc="http://schemas.openxmlformats.org/markup-compatibility/2006">
+  <p:cSld>
+    <p:spTree>
+      <p:nvGrpSpPr>
+        <p:cNvPr id="1" name=""/>
+        <p:cNvGrpSpPr/>
+        <p:nvPr/>
+      </p:nvGrpSpPr>
+      <p:grpSpPr>
+        <a:xfrm>
+          <a:off x="0" y="0"/>
+          <a:ext cx="0" cy="0"/>
+          <a:chOff x="0" y="0"/>
+          <a:chExt cx="0" cy="0"/>
+        </a:xfrm>
+      </p:grpSpPr>
+      <p:sp>
+        <p:nvSpPr>
+          <p:cNvPr id="239" name="PlaceHolder 1"/>
+          <p:cNvSpPr>
+            <a:spLocks noGrp="1"/>
+          </p:cNvSpPr>
+          <p:nvPr>
+            <p:ph type="title"/>
+          </p:nvPr>
+        </p:nvSpPr>
+        <p:spPr>
+          <a:xfrm>
+            <a:off x="838080" y="365040"/>
+            <a:ext cx="10507320" cy="535320"/>
+          </a:xfrm>
+          <a:prstGeom prst="rect">
+            <a:avLst/>
+          </a:prstGeom>
+          <a:noFill/>
+          <a:ln w="0">
+            <a:noFill/>
+          </a:ln>
+        </p:spPr>
+        <p:txBody>
+          <a:bodyPr lIns="90000" rIns="90000" tIns="45000" bIns="45000" anchor="ctr">
+            <a:noAutofit/>
+          </a:bodyPr>
+          <a:p>
+            <a:pPr>
+              <a:lnSpc>
+                <a:spcPct val="90000"/>
+              </a:lnSpc>
+              <a:buNone/>
+            </a:pPr>
+            <a:r>
+              <a:rPr b="1" lang="es-ES" sz="2400" spc="-1" strike="noStrike">
+                <a:solidFill>
+                  <a:srgbClr val="000000"/>
+                </a:solidFill>
+                <a:latin typeface="Calibri"/>
+              </a:rPr>
+              <a:t>Máquinas de vectores de soporte SVM </a:t>
+            </a:r>
+            <a:endParaRPr b="0" lang="en-US" sz="2400" spc="-1" strike="noStrike">
+              <a:latin typeface="Arial"/>
+            </a:endParaRPr>
+          </a:p>
+        </p:txBody>
+      </p:sp>
+      <p:pic>
+        <p:nvPicPr>
+          <p:cNvPr id="240" name="" descr=""/>
+          <p:cNvPicPr/>
+          <p:nvPr/>
+        </p:nvPicPr>
+        <p:blipFill>
+          <a:blip r:embed="rId1"/>
+          <a:stretch/>
+        </p:blipFill>
+        <p:spPr>
+          <a:xfrm>
+            <a:off x="2700000" y="1080000"/>
+            <a:ext cx="6659640" cy="4994640"/>
+          </a:xfrm>
+          <a:prstGeom prst="rect">
+            <a:avLst/>
+          </a:prstGeom>
+          <a:ln w="0">
+            <a:noFill/>
+          </a:ln>
+        </p:spPr>
+      </p:pic>
+    </p:spTree>
+  </p:cSld>
+  <mc:AlternateContent>
+    <mc:Choice Requires="p14">
+      <p:transition spd="med" p14:dur="700">
+        <p:fade/>
+      </p:transition>
+    </mc:Choice>
+    <mc:Fallback>
+      <p:transition spd="med">
+        <p:fade/>
+      </p:transition>
+    </mc:Fallback>
+  </mc:AlternateContent>
+</p:sld>
+</file>
+
+<file path=ppt/slides/slide58.xml><?xml version="1.0" encoding="utf-8"?>
+<p:sld xmlns:a="http://schemas.openxmlformats.org/drawingml/2006/main" xmlns:p="http://schemas.openxmlformats.org/presentationml/2006/main" xmlns:r="http://schemas.openxmlformats.org/officeDocument/2006/relationships" xmlns:p14="http://schemas.microsoft.com/office/powerpoint/2010/main" xmlns:p15="http://schemas.microsoft.com/office/powerpoint/2012/main" xmlns:mc="http://schemas.openxmlformats.org/markup-compatibility/2006">
+  <p:cSld>
+    <p:spTree>
+      <p:nvGrpSpPr>
+        <p:cNvPr id="1" name=""/>
+        <p:cNvGrpSpPr/>
+        <p:nvPr/>
+      </p:nvGrpSpPr>
+      <p:grpSpPr>
+        <a:xfrm>
+          <a:off x="0" y="0"/>
+          <a:ext cx="0" cy="0"/>
+          <a:chOff x="0" y="0"/>
+          <a:chExt cx="0" cy="0"/>
+        </a:xfrm>
+      </p:grpSpPr>
+      <p:sp>
+        <p:nvSpPr>
+          <p:cNvPr id="241" name="PlaceHolder 1"/>
+          <p:cNvSpPr>
+            <a:spLocks noGrp="1"/>
+          </p:cNvSpPr>
+          <p:nvPr>
+            <p:ph type="title"/>
+          </p:nvPr>
+        </p:nvSpPr>
+        <p:spPr>
+          <a:xfrm>
+            <a:off x="838080" y="365040"/>
+            <a:ext cx="10507320" cy="535320"/>
+          </a:xfrm>
+          <a:prstGeom prst="rect">
+            <a:avLst/>
+          </a:prstGeom>
+          <a:noFill/>
+          <a:ln w="0">
+            <a:noFill/>
+          </a:ln>
+        </p:spPr>
+        <p:txBody>
+          <a:bodyPr lIns="90000" rIns="90000" tIns="45000" bIns="45000" anchor="ctr">
+            <a:noAutofit/>
+          </a:bodyPr>
+          <a:p>
+            <a:pPr>
+              <a:lnSpc>
+                <a:spcPct val="90000"/>
+              </a:lnSpc>
+              <a:buNone/>
+            </a:pPr>
+            <a:r>
+              <a:rPr b="1" lang="es-ES" sz="2400" spc="-1" strike="noStrike">
+                <a:solidFill>
+                  <a:srgbClr val="000000"/>
+                </a:solidFill>
+                <a:latin typeface="Calibri"/>
+              </a:rPr>
+              <a:t>Máquinas de vectores de soporte SVM </a:t>
+            </a:r>
+            <a:endParaRPr b="0" lang="en-US" sz="2400" spc="-1" strike="noStrike">
+              <a:latin typeface="Arial"/>
+            </a:endParaRPr>
+          </a:p>
+        </p:txBody>
+      </p:sp>
+      <p:sp>
+        <p:nvSpPr>
+          <p:cNvPr id="242" name="PlaceHolder 2"/>
+          <p:cNvSpPr>
+            <a:spLocks noGrp="1"/>
+          </p:cNvSpPr>
+          <p:nvPr>
+            <p:ph/>
+          </p:nvPr>
+        </p:nvSpPr>
+        <p:spPr>
+          <a:xfrm>
+            <a:off x="832320" y="1260000"/>
+            <a:ext cx="10507320" cy="1575000"/>
+          </a:xfrm>
+          <a:prstGeom prst="rect">
+            <a:avLst/>
+          </a:prstGeom>
+          <a:noFill/>
+          <a:ln w="0">
+            <a:noFill/>
+          </a:ln>
+        </p:spPr>
+        <p:txBody>
+          <a:bodyPr lIns="90000" rIns="90000" tIns="45000" bIns="45000" anchor="t">
+            <a:noAutofit/>
+          </a:bodyPr>
+          <a:p>
+            <a:pPr>
+              <a:lnSpc>
+                <a:spcPct val="100000"/>
+              </a:lnSpc>
+              <a:buNone/>
+            </a:pPr>
+            <a:r>
+              <a:rPr b="1" lang="es-ES" sz="2400" spc="-1" strike="noStrike">
+                <a:latin typeface="Calibri"/>
+              </a:rPr>
+              <a:t>Kernel de Base Radial Gaussiano (RBF Kernel / Gaussian Kernel):</a:t>
+            </a:r>
+            <a:r>
+              <a:rPr b="0" lang="es-ES" sz="2400" spc="-1" strike="noStrike">
+                <a:latin typeface="Calibri"/>
+              </a:rPr>
+              <a:t> El RBF es el kernel predeterminado y más ampliamente utilizado debido a su versatilidad. Proyecta implícitamente los datos a un espacio de dimensión infinita, permitiendo la creación de fronteras de decisión complejas y localizadas.</a:t>
+            </a:r>
+            <a:endParaRPr b="0" lang="en-US" sz="2400" spc="-1" strike="noStrike">
+              <a:latin typeface="Arial"/>
+            </a:endParaRPr>
+          </a:p>
+          <a:p>
+            <a:pPr>
+              <a:lnSpc>
+                <a:spcPct val="100000"/>
+              </a:lnSpc>
+              <a:buNone/>
+            </a:pPr>
+            <a:endParaRPr b="0" lang="en-US" sz="2400" spc="-1" strike="noStrike">
+              <a:latin typeface="Arial"/>
+            </a:endParaRPr>
+          </a:p>
+          <a:p>
+            <a:pPr>
+              <a:lnSpc>
+                <a:spcPct val="100000"/>
+              </a:lnSpc>
+              <a:buNone/>
+            </a:pPr>
+            <a:endParaRPr b="0" lang="en-US" sz="1800" spc="-1" strike="noStrike">
+              <a:latin typeface="Arial"/>
+            </a:endParaRPr>
+          </a:p>
+        </p:txBody>
+      </p:sp>
+      <p:pic>
+        <p:nvPicPr>
+          <p:cNvPr id="243" name="" descr=""/>
+          <p:cNvPicPr/>
+          <p:nvPr/>
+        </p:nvPicPr>
+        <p:blipFill>
+          <a:blip r:embed="rId1"/>
+          <a:srcRect l="0" t="0" r="70298" b="66633"/>
+          <a:stretch/>
+        </p:blipFill>
+        <p:spPr>
+          <a:xfrm>
+            <a:off x="720000" y="3060000"/>
+            <a:ext cx="2159280" cy="359280"/>
+          </a:xfrm>
+          <a:prstGeom prst="rect">
+            <a:avLst/>
+          </a:prstGeom>
+          <a:ln w="0">
+            <a:noFill/>
+          </a:ln>
+        </p:spPr>
+      </p:pic>
+      <p:pic>
+        <p:nvPicPr>
+          <p:cNvPr id="244" name="" descr=""/>
+          <p:cNvPicPr/>
+          <p:nvPr/>
+        </p:nvPicPr>
+        <p:blipFill>
+          <a:blip r:embed="rId2"/>
+          <a:stretch/>
+        </p:blipFill>
+        <p:spPr>
+          <a:xfrm>
+            <a:off x="2333160" y="4362480"/>
+            <a:ext cx="3966480" cy="1577160"/>
+          </a:xfrm>
+          <a:prstGeom prst="rect">
+            <a:avLst/>
+          </a:prstGeom>
+          <a:ln w="0">
+            <a:noFill/>
+          </a:ln>
+        </p:spPr>
+      </p:pic>
+      <p:pic>
+        <p:nvPicPr>
+          <p:cNvPr id="245" name="" descr=""/>
+          <p:cNvPicPr/>
+          <p:nvPr/>
+        </p:nvPicPr>
+        <p:blipFill>
+          <a:blip r:embed="rId3"/>
+          <a:stretch/>
+        </p:blipFill>
+        <p:spPr>
+          <a:xfrm>
+            <a:off x="6660000" y="3420000"/>
+            <a:ext cx="5284440" cy="2519640"/>
+          </a:xfrm>
+          <a:prstGeom prst="rect">
+            <a:avLst/>
+          </a:prstGeom>
+          <a:ln w="0">
+            <a:noFill/>
+          </a:ln>
+        </p:spPr>
+      </p:pic>
+      <p:pic>
+        <p:nvPicPr>
+          <p:cNvPr id="246" name="" descr=""/>
+          <p:cNvPicPr/>
+          <p:nvPr/>
+        </p:nvPicPr>
+        <p:blipFill>
+          <a:blip r:embed="rId4"/>
+          <a:srcRect l="45544" t="33265" r="0" b="0"/>
+          <a:stretch/>
+        </p:blipFill>
+        <p:spPr>
+          <a:xfrm>
+            <a:off x="2340000" y="3240000"/>
+            <a:ext cx="3959640" cy="719640"/>
+          </a:xfrm>
+          <a:prstGeom prst="rect">
+            <a:avLst/>
+          </a:prstGeom>
+          <a:ln w="0">
+            <a:noFill/>
+          </a:ln>
+        </p:spPr>
+      </p:pic>
+    </p:spTree>
+  </p:cSld>
+  <mc:AlternateContent>
+    <mc:Choice Requires="p14">
+      <p:transition spd="med" p14:dur="700">
+        <p:fade/>
+      </p:transition>
+    </mc:Choice>
+    <mc:Fallback>
+      <p:transition spd="med">
+        <p:fade/>
+      </p:transition>
+    </mc:Fallback>
+  </mc:AlternateContent>
+</p:sld>
+</file>
+
+<file path=ppt/slides/slide59.xml><?xml version="1.0" encoding="utf-8"?>
+<p:sld xmlns:a="http://schemas.openxmlformats.org/drawingml/2006/main" xmlns:p="http://schemas.openxmlformats.org/presentationml/2006/main" xmlns:r="http://schemas.openxmlformats.org/officeDocument/2006/relationships" xmlns:p14="http://schemas.microsoft.com/office/powerpoint/2010/main" xmlns:p15="http://schemas.microsoft.com/office/powerpoint/2012/main" xmlns:mc="http://schemas.openxmlformats.org/markup-compatibility/2006">
+  <p:cSld>
+    <p:spTree>
+      <p:nvGrpSpPr>
+        <p:cNvPr id="1" name=""/>
+        <p:cNvGrpSpPr/>
+        <p:nvPr/>
+      </p:nvGrpSpPr>
+      <p:grpSpPr>
+        <a:xfrm>
+          <a:off x="0" y="0"/>
+          <a:ext cx="0" cy="0"/>
+          <a:chOff x="0" y="0"/>
+          <a:chExt cx="0" cy="0"/>
+        </a:xfrm>
+      </p:grpSpPr>
+      <p:sp>
+        <p:nvSpPr>
+          <p:cNvPr id="247" name="PlaceHolder 1"/>
+          <p:cNvSpPr>
+            <a:spLocks noGrp="1"/>
+          </p:cNvSpPr>
+          <p:nvPr>
+            <p:ph type="title"/>
+          </p:nvPr>
+        </p:nvSpPr>
+        <p:spPr>
+          <a:xfrm>
+            <a:off x="838080" y="365040"/>
+            <a:ext cx="10507320" cy="535320"/>
+          </a:xfrm>
+          <a:prstGeom prst="rect">
+            <a:avLst/>
+          </a:prstGeom>
+          <a:noFill/>
+          <a:ln w="0">
+            <a:noFill/>
+          </a:ln>
+        </p:spPr>
+        <p:txBody>
+          <a:bodyPr lIns="90000" rIns="90000" tIns="45000" bIns="45000" anchor="ctr">
+            <a:noAutofit/>
+          </a:bodyPr>
+          <a:p>
+            <a:pPr>
+              <a:lnSpc>
+                <a:spcPct val="90000"/>
+              </a:lnSpc>
+              <a:buNone/>
+            </a:pPr>
+            <a:r>
+              <a:rPr b="1" lang="es-ES" sz="2400" spc="-1" strike="noStrike">
+                <a:solidFill>
+                  <a:srgbClr val="000000"/>
+                </a:solidFill>
+                <a:latin typeface="Calibri"/>
+              </a:rPr>
+              <a:t>Máquinas de vectores de soporte SVM </a:t>
+            </a:r>
+            <a:endParaRPr b="0" lang="en-US" sz="2400" spc="-1" strike="noStrike">
+              <a:latin typeface="Arial"/>
+            </a:endParaRPr>
+          </a:p>
+        </p:txBody>
+      </p:sp>
+      <p:sp>
+        <p:nvSpPr>
+          <p:cNvPr id="248" name="PlaceHolder 2"/>
+          <p:cNvSpPr>
+            <a:spLocks noGrp="1"/>
+          </p:cNvSpPr>
+          <p:nvPr>
+            <p:ph/>
+          </p:nvPr>
+        </p:nvSpPr>
+        <p:spPr>
+          <a:xfrm>
+            <a:off x="832320" y="1260000"/>
+            <a:ext cx="10507320" cy="1575000"/>
+          </a:xfrm>
+          <a:prstGeom prst="rect">
+            <a:avLst/>
+          </a:prstGeom>
+          <a:noFill/>
+          <a:ln w="0">
+            <a:noFill/>
+          </a:ln>
+        </p:spPr>
+        <p:txBody>
+          <a:bodyPr lIns="90000" rIns="90000" tIns="45000" bIns="45000" anchor="t">
+            <a:noAutofit/>
+          </a:bodyPr>
+          <a:p>
+            <a:pPr>
+              <a:lnSpc>
+                <a:spcPct val="100000"/>
+              </a:lnSpc>
+              <a:buNone/>
+            </a:pPr>
+            <a:r>
+              <a:rPr b="1" lang="es-ES" sz="2400" spc="-1" strike="noStrike">
+                <a:latin typeface="Calibri"/>
+              </a:rPr>
+              <a:t>Kernel Sigmoidal (Sigmoid Kernel):</a:t>
+            </a:r>
+            <a:r>
+              <a:rPr b="0" lang="es-ES" sz="2400" spc="-1" strike="noStrike">
+                <a:latin typeface="Calibri"/>
+              </a:rPr>
+              <a:t> Utiliza la función de tangente hiperbólica como base. Es relevante por su conexión teórica con las funciones de activación utilizadas en redes neuronales, aunque su rendimiento puede variar significativamente.</a:t>
+            </a:r>
+            <a:endParaRPr b="0" lang="en-US" sz="2400" spc="-1" strike="noStrike">
+              <a:latin typeface="Arial"/>
+            </a:endParaRPr>
+          </a:p>
+          <a:p>
+            <a:pPr>
+              <a:lnSpc>
+                <a:spcPct val="100000"/>
+              </a:lnSpc>
+              <a:buNone/>
+            </a:pPr>
+            <a:endParaRPr b="0" lang="en-US" sz="2400" spc="-1" strike="noStrike">
+              <a:latin typeface="Arial"/>
+            </a:endParaRPr>
+          </a:p>
+          <a:p>
+            <a:pPr>
+              <a:lnSpc>
+                <a:spcPct val="100000"/>
+              </a:lnSpc>
+              <a:buNone/>
+            </a:pPr>
+            <a:endParaRPr b="0" lang="en-US" sz="2400" spc="-1" strike="noStrike">
+              <a:latin typeface="Arial"/>
+            </a:endParaRPr>
+          </a:p>
+          <a:p>
+            <a:pPr>
+              <a:lnSpc>
+                <a:spcPct val="100000"/>
+              </a:lnSpc>
+              <a:buNone/>
+            </a:pPr>
+            <a:endParaRPr b="0" lang="en-US" sz="1800" spc="-1" strike="noStrike">
+              <a:latin typeface="Arial"/>
+            </a:endParaRPr>
+          </a:p>
+        </p:txBody>
+      </p:sp>
+      <p:pic>
+        <p:nvPicPr>
+          <p:cNvPr id="249" name="" descr=""/>
+          <p:cNvPicPr/>
+          <p:nvPr/>
+        </p:nvPicPr>
+        <p:blipFill>
+          <a:blip r:embed="rId1"/>
+          <a:stretch/>
+        </p:blipFill>
+        <p:spPr>
+          <a:xfrm>
+            <a:off x="720000" y="3060000"/>
+            <a:ext cx="9878040" cy="1439640"/>
           </a:xfrm>
           <a:prstGeom prst="rect">
             <a:avLst/>
@@ -11037,7 +13197,7 @@
         <p:spPr>
           <a:xfrm>
             <a:off x="838080" y="365040"/>
-            <a:ext cx="10513800" cy="541800"/>
+            <a:ext cx="10512720" cy="540720"/>
           </a:xfrm>
           <a:prstGeom prst="rect">
             <a:avLst/>
@@ -11086,7 +13246,7 @@
         <p:spPr>
           <a:xfrm>
             <a:off x="2340000" y="1260000"/>
-            <a:ext cx="7558560" cy="538560"/>
+            <a:ext cx="7557480" cy="537480"/>
           </a:xfrm>
           <a:prstGeom prst="rect">
             <a:avLst/>
@@ -11138,7 +13298,7 @@
         <p:spPr>
           <a:xfrm>
             <a:off x="889920" y="2160000"/>
-            <a:ext cx="5038560" cy="960480"/>
+            <a:ext cx="5037480" cy="959400"/>
           </a:xfrm>
           <a:prstGeom prst="rect">
             <a:avLst/>
@@ -11234,7 +13394,7 @@
         <p:spPr>
           <a:xfrm>
             <a:off x="1260000" y="1331280"/>
-            <a:ext cx="828360" cy="828360"/>
+            <a:ext cx="827280" cy="827280"/>
           </a:xfrm>
           <a:prstGeom prst="rect">
             <a:avLst/>
@@ -11257,7 +13417,993 @@
         <p:spPr>
           <a:xfrm>
             <a:off x="7740000" y="2340000"/>
-            <a:ext cx="2699640" cy="3149280"/>
+            <a:ext cx="2698560" cy="3148200"/>
+          </a:xfrm>
+          <a:prstGeom prst="rect">
+            <a:avLst/>
+          </a:prstGeom>
+          <a:ln w="0">
+            <a:noFill/>
+          </a:ln>
+        </p:spPr>
+      </p:pic>
+    </p:spTree>
+  </p:cSld>
+  <mc:AlternateContent>
+    <mc:Choice Requires="p14">
+      <p:transition spd="med" p14:dur="700">
+        <p:fade/>
+      </p:transition>
+    </mc:Choice>
+    <mc:Fallback>
+      <p:transition spd="med">
+        <p:fade/>
+      </p:transition>
+    </mc:Fallback>
+  </mc:AlternateContent>
+</p:sld>
+</file>
+
+<file path=ppt/slides/slide60.xml><?xml version="1.0" encoding="utf-8"?>
+<p:sld xmlns:a="http://schemas.openxmlformats.org/drawingml/2006/main" xmlns:p="http://schemas.openxmlformats.org/presentationml/2006/main" xmlns:r="http://schemas.openxmlformats.org/officeDocument/2006/relationships" xmlns:p14="http://schemas.microsoft.com/office/powerpoint/2010/main" xmlns:p15="http://schemas.microsoft.com/office/powerpoint/2012/main" xmlns:mc="http://schemas.openxmlformats.org/markup-compatibility/2006">
+  <p:cSld>
+    <p:spTree>
+      <p:nvGrpSpPr>
+        <p:cNvPr id="1" name=""/>
+        <p:cNvGrpSpPr/>
+        <p:nvPr/>
+      </p:nvGrpSpPr>
+      <p:grpSpPr>
+        <a:xfrm>
+          <a:off x="0" y="0"/>
+          <a:ext cx="0" cy="0"/>
+          <a:chOff x="0" y="0"/>
+          <a:chExt cx="0" cy="0"/>
+        </a:xfrm>
+      </p:grpSpPr>
+      <p:sp>
+        <p:nvSpPr>
+          <p:cNvPr id="250" name="PlaceHolder 1"/>
+          <p:cNvSpPr>
+            <a:spLocks noGrp="1"/>
+          </p:cNvSpPr>
+          <p:nvPr>
+            <p:ph type="title"/>
+          </p:nvPr>
+        </p:nvSpPr>
+        <p:spPr>
+          <a:xfrm>
+            <a:off x="838080" y="365040"/>
+            <a:ext cx="10507320" cy="535320"/>
+          </a:xfrm>
+          <a:prstGeom prst="rect">
+            <a:avLst/>
+          </a:prstGeom>
+          <a:noFill/>
+          <a:ln w="0">
+            <a:noFill/>
+          </a:ln>
+        </p:spPr>
+        <p:txBody>
+          <a:bodyPr lIns="90000" rIns="90000" tIns="45000" bIns="45000" anchor="ctr">
+            <a:noAutofit/>
+          </a:bodyPr>
+          <a:p>
+            <a:pPr>
+              <a:lnSpc>
+                <a:spcPct val="90000"/>
+              </a:lnSpc>
+              <a:buNone/>
+            </a:pPr>
+            <a:r>
+              <a:rPr b="1" lang="es-ES" sz="2400" spc="-1" strike="noStrike">
+                <a:solidFill>
+                  <a:srgbClr val="000000"/>
+                </a:solidFill>
+                <a:latin typeface="Calibri"/>
+              </a:rPr>
+              <a:t>Máquinas de vectores de soporte SVM </a:t>
+            </a:r>
+            <a:endParaRPr b="0" lang="en-US" sz="2400" spc="-1" strike="noStrike">
+              <a:latin typeface="Arial"/>
+            </a:endParaRPr>
+          </a:p>
+        </p:txBody>
+      </p:sp>
+      <p:sp>
+        <p:nvSpPr>
+          <p:cNvPr id="251" name="PlaceHolder 2"/>
+          <p:cNvSpPr>
+            <a:spLocks noGrp="1"/>
+          </p:cNvSpPr>
+          <p:nvPr>
+            <p:ph/>
+          </p:nvPr>
+        </p:nvSpPr>
+        <p:spPr>
+          <a:xfrm>
+            <a:off x="832320" y="1260000"/>
+            <a:ext cx="10507320" cy="2879640"/>
+          </a:xfrm>
+          <a:prstGeom prst="rect">
+            <a:avLst/>
+          </a:prstGeom>
+          <a:noFill/>
+          <a:ln w="0">
+            <a:noFill/>
+          </a:ln>
+        </p:spPr>
+        <p:txBody>
+          <a:bodyPr lIns="90000" rIns="90000" tIns="45000" bIns="45000" anchor="t">
+            <a:noAutofit/>
+          </a:bodyPr>
+          <a:p>
+            <a:pPr>
+              <a:lnSpc>
+                <a:spcPct val="100000"/>
+              </a:lnSpc>
+              <a:buNone/>
+            </a:pPr>
+            <a:r>
+              <a:rPr b="1" lang="es-ES" sz="2400" spc="-1" strike="noStrike">
+                <a:latin typeface="Calibri"/>
+              </a:rPr>
+              <a:t>Soft Margin:</a:t>
+            </a:r>
+            <a:r>
+              <a:rPr b="0" lang="es-ES" sz="2400" spc="-1" strike="noStrike">
+                <a:latin typeface="Calibri"/>
+              </a:rPr>
+              <a:t> SVM busca el hiperplano que maximiza el margen (la distancia entre la línea de decisión y los puntos de datos más cercanos, llamados vectores de soporte). Sin embargo, en el mundo real, los datos a menudo no son perfectamente separables o contienen ruido y valores atípicos.</a:t>
+            </a:r>
+            <a:endParaRPr b="0" lang="en-US" sz="2400" spc="-1" strike="noStrike">
+              <a:latin typeface="Arial"/>
+            </a:endParaRPr>
+          </a:p>
+          <a:p>
+            <a:pPr>
+              <a:lnSpc>
+                <a:spcPct val="100000"/>
+              </a:lnSpc>
+              <a:buNone/>
+            </a:pPr>
+            <a:endParaRPr b="0" lang="en-US" sz="2400" spc="-1" strike="noStrike">
+              <a:latin typeface="Arial"/>
+            </a:endParaRPr>
+          </a:p>
+          <a:p>
+            <a:pPr marL="432000" indent="-324000">
+              <a:lnSpc>
+                <a:spcPct val="100000"/>
+              </a:lnSpc>
+              <a:buClr>
+                <a:srgbClr val="000000"/>
+              </a:buClr>
+              <a:buFont typeface="utkal"/>
+              <a:buChar char="➢"/>
+            </a:pPr>
+            <a:r>
+              <a:rPr b="0" lang="es-ES" sz="2400" spc="-1" strike="noStrike">
+                <a:latin typeface="Calibri"/>
+              </a:rPr>
+              <a:t>Aquí es donde entra el parámetro C, que permite un "margen suave" (soft margin), tolerando cierto grado de error para lograr una mejor generalización.</a:t>
+            </a:r>
+            <a:endParaRPr b="0" lang="en-US" sz="2400" spc="-1" strike="noStrike">
+              <a:latin typeface="Arial"/>
+            </a:endParaRPr>
+          </a:p>
+          <a:p>
+            <a:pPr>
+              <a:lnSpc>
+                <a:spcPct val="100000"/>
+              </a:lnSpc>
+              <a:buNone/>
+            </a:pPr>
+            <a:endParaRPr b="0" lang="en-US" sz="2400" spc="-1" strike="noStrike">
+              <a:latin typeface="Arial"/>
+            </a:endParaRPr>
+          </a:p>
+          <a:p>
+            <a:pPr>
+              <a:lnSpc>
+                <a:spcPct val="100000"/>
+              </a:lnSpc>
+              <a:buNone/>
+            </a:pPr>
+            <a:endParaRPr b="0" lang="en-US" sz="2400" spc="-1" strike="noStrike">
+              <a:latin typeface="Arial"/>
+            </a:endParaRPr>
+          </a:p>
+          <a:p>
+            <a:pPr>
+              <a:lnSpc>
+                <a:spcPct val="100000"/>
+              </a:lnSpc>
+              <a:buNone/>
+            </a:pPr>
+            <a:endParaRPr b="0" lang="en-US" sz="1800" spc="-1" strike="noStrike">
+              <a:latin typeface="Arial"/>
+            </a:endParaRPr>
+          </a:p>
+        </p:txBody>
+      </p:sp>
+      <p:pic>
+        <p:nvPicPr>
+          <p:cNvPr id="252" name="" descr=""/>
+          <p:cNvPicPr/>
+          <p:nvPr/>
+        </p:nvPicPr>
+        <p:blipFill>
+          <a:blip r:embed="rId1"/>
+          <a:stretch/>
+        </p:blipFill>
+        <p:spPr>
+          <a:xfrm>
+            <a:off x="2131200" y="4320000"/>
+            <a:ext cx="8488440" cy="1799640"/>
+          </a:xfrm>
+          <a:prstGeom prst="rect">
+            <a:avLst/>
+          </a:prstGeom>
+          <a:ln w="0">
+            <a:noFill/>
+          </a:ln>
+        </p:spPr>
+      </p:pic>
+    </p:spTree>
+  </p:cSld>
+  <mc:AlternateContent>
+    <mc:Choice Requires="p14">
+      <p:transition spd="med" p14:dur="700">
+        <p:fade/>
+      </p:transition>
+    </mc:Choice>
+    <mc:Fallback>
+      <p:transition spd="med">
+        <p:fade/>
+      </p:transition>
+    </mc:Fallback>
+  </mc:AlternateContent>
+</p:sld>
+</file>
+
+<file path=ppt/slides/slide61.xml><?xml version="1.0" encoding="utf-8"?>
+<p:sld xmlns:a="http://schemas.openxmlformats.org/drawingml/2006/main" xmlns:p="http://schemas.openxmlformats.org/presentationml/2006/main" xmlns:r="http://schemas.openxmlformats.org/officeDocument/2006/relationships" xmlns:p14="http://schemas.microsoft.com/office/powerpoint/2010/main" xmlns:p15="http://schemas.microsoft.com/office/powerpoint/2012/main" xmlns:mc="http://schemas.openxmlformats.org/markup-compatibility/2006">
+  <p:cSld>
+    <p:spTree>
+      <p:nvGrpSpPr>
+        <p:cNvPr id="1" name=""/>
+        <p:cNvGrpSpPr/>
+        <p:nvPr/>
+      </p:nvGrpSpPr>
+      <p:grpSpPr>
+        <a:xfrm>
+          <a:off x="0" y="0"/>
+          <a:ext cx="0" cy="0"/>
+          <a:chOff x="0" y="0"/>
+          <a:chExt cx="0" cy="0"/>
+        </a:xfrm>
+      </p:grpSpPr>
+      <p:sp>
+        <p:nvSpPr>
+          <p:cNvPr id="253" name="PlaceHolder 1"/>
+          <p:cNvSpPr>
+            <a:spLocks noGrp="1"/>
+          </p:cNvSpPr>
+          <p:nvPr>
+            <p:ph type="title"/>
+          </p:nvPr>
+        </p:nvSpPr>
+        <p:spPr>
+          <a:xfrm>
+            <a:off x="838080" y="365040"/>
+            <a:ext cx="10507320" cy="535320"/>
+          </a:xfrm>
+          <a:prstGeom prst="rect">
+            <a:avLst/>
+          </a:prstGeom>
+          <a:noFill/>
+          <a:ln w="0">
+            <a:noFill/>
+          </a:ln>
+        </p:spPr>
+        <p:txBody>
+          <a:bodyPr lIns="90000" rIns="90000" tIns="45000" bIns="45000" anchor="ctr">
+            <a:noAutofit/>
+          </a:bodyPr>
+          <a:p>
+            <a:pPr>
+              <a:lnSpc>
+                <a:spcPct val="90000"/>
+              </a:lnSpc>
+              <a:buNone/>
+            </a:pPr>
+            <a:r>
+              <a:rPr b="1" lang="es-ES" sz="2400" spc="-1" strike="noStrike">
+                <a:solidFill>
+                  <a:srgbClr val="000000"/>
+                </a:solidFill>
+                <a:latin typeface="Calibri"/>
+              </a:rPr>
+              <a:t>Regresión Logística</a:t>
+            </a:r>
+            <a:endParaRPr b="0" lang="en-US" sz="2400" spc="-1" strike="noStrike">
+              <a:latin typeface="Arial"/>
+            </a:endParaRPr>
+          </a:p>
+        </p:txBody>
+      </p:sp>
+      <p:sp>
+        <p:nvSpPr>
+          <p:cNvPr id="254" name="PlaceHolder 2"/>
+          <p:cNvSpPr>
+            <a:spLocks noGrp="1"/>
+          </p:cNvSpPr>
+          <p:nvPr>
+            <p:ph/>
+          </p:nvPr>
+        </p:nvSpPr>
+        <p:spPr>
+          <a:xfrm>
+            <a:off x="3718080" y="1800000"/>
+            <a:ext cx="7980480" cy="3418560"/>
+          </a:xfrm>
+          <a:prstGeom prst="rect">
+            <a:avLst/>
+          </a:prstGeom>
+          <a:noFill/>
+          <a:ln w="0">
+            <a:noFill/>
+          </a:ln>
+        </p:spPr>
+        <p:txBody>
+          <a:bodyPr lIns="90000" rIns="90000" tIns="45000" bIns="45000" anchor="t">
+            <a:noAutofit/>
+          </a:bodyPr>
+          <a:p>
+            <a:pPr marL="432000" indent="-324000">
+              <a:lnSpc>
+                <a:spcPct val="100000"/>
+              </a:lnSpc>
+              <a:buClr>
+                <a:srgbClr val="000000"/>
+              </a:buClr>
+              <a:buFont typeface="Wingdings" charset="2"/>
+              <a:buChar char=""/>
+            </a:pPr>
+            <a:r>
+              <a:rPr b="1" lang="es-ES" sz="2400" spc="-1" strike="noStrike">
+                <a:latin typeface="Calibri"/>
+              </a:rPr>
+              <a:t> </a:t>
+            </a:r>
+            <a:r>
+              <a:rPr b="1" lang="es-ES" sz="2400" spc="-1" strike="noStrike">
+                <a:latin typeface="Calibri"/>
+              </a:rPr>
+              <a:t>Ventajas</a:t>
+            </a:r>
+            <a:endParaRPr b="0" lang="en-US" sz="2400" spc="-1" strike="noStrike">
+              <a:latin typeface="Arial"/>
+            </a:endParaRPr>
+          </a:p>
+          <a:p>
+            <a:pPr>
+              <a:lnSpc>
+                <a:spcPct val="100000"/>
+              </a:lnSpc>
+              <a:buNone/>
+            </a:pPr>
+            <a:endParaRPr b="0" lang="en-US" sz="2000" spc="-1" strike="noStrike">
+              <a:latin typeface="Arial"/>
+            </a:endParaRPr>
+          </a:p>
+          <a:p>
+            <a:pPr marL="450360" indent="-179640">
+              <a:lnSpc>
+                <a:spcPct val="115000"/>
+              </a:lnSpc>
+              <a:spcAft>
+                <a:spcPts val="1236"/>
+              </a:spcAft>
+              <a:buClr>
+                <a:srgbClr val="000000"/>
+              </a:buClr>
+              <a:buSzPct val="45000"/>
+              <a:buFont typeface="Wingdings" charset="2"/>
+              <a:buChar char=""/>
+              <a:tabLst>
+                <a:tab algn="l" pos="450360"/>
+              </a:tabLst>
+            </a:pPr>
+            <a:r>
+              <a:rPr b="0" lang="es-ES" sz="2000" spc="-1" strike="noStrike">
+                <a:latin typeface="Calibri"/>
+              </a:rPr>
+              <a:t>Alta capacidad de generalización, especialmente en espacios de alta dimensión.</a:t>
+            </a:r>
+            <a:endParaRPr b="0" lang="en-US" sz="2000" spc="-1" strike="noStrike">
+              <a:latin typeface="Arial"/>
+            </a:endParaRPr>
+          </a:p>
+          <a:p>
+            <a:pPr marL="450360" indent="-179640">
+              <a:lnSpc>
+                <a:spcPct val="115000"/>
+              </a:lnSpc>
+              <a:spcAft>
+                <a:spcPts val="1236"/>
+              </a:spcAft>
+              <a:buClr>
+                <a:srgbClr val="000000"/>
+              </a:buClr>
+              <a:buSzPct val="45000"/>
+              <a:buFont typeface="Wingdings" charset="2"/>
+              <a:buChar char=""/>
+              <a:tabLst>
+                <a:tab algn="l" pos="450360"/>
+              </a:tabLst>
+            </a:pPr>
+            <a:r>
+              <a:rPr b="0" lang="es-ES" sz="2000" spc="-1" strike="noStrike">
+                <a:latin typeface="Calibri"/>
+              </a:rPr>
+              <a:t>Flexible gracias al uso de kernels.</a:t>
+            </a:r>
+            <a:endParaRPr b="0" lang="en-US" sz="2000" spc="-1" strike="noStrike">
+              <a:latin typeface="Arial"/>
+            </a:endParaRPr>
+          </a:p>
+          <a:p>
+            <a:pPr marL="450360" indent="-179640">
+              <a:lnSpc>
+                <a:spcPct val="115000"/>
+              </a:lnSpc>
+              <a:spcAft>
+                <a:spcPts val="1236"/>
+              </a:spcAft>
+              <a:buClr>
+                <a:srgbClr val="000000"/>
+              </a:buClr>
+              <a:buSzPct val="45000"/>
+              <a:buFont typeface="Wingdings" charset="2"/>
+              <a:buChar char=""/>
+              <a:tabLst>
+                <a:tab algn="l" pos="450360"/>
+              </a:tabLst>
+            </a:pPr>
+            <a:r>
+              <a:rPr b="0" lang="es-ES" sz="2000" spc="-1" strike="noStrike">
+                <a:latin typeface="Calibri"/>
+              </a:rPr>
+              <a:t>Menos propenso al sobreajuste en datasets pequeños y con gran número de variables.</a:t>
+            </a:r>
+            <a:endParaRPr b="0" lang="en-US" sz="2000" spc="-1" strike="noStrike">
+              <a:latin typeface="Arial"/>
+            </a:endParaRPr>
+          </a:p>
+        </p:txBody>
+      </p:sp>
+      <p:pic>
+        <p:nvPicPr>
+          <p:cNvPr id="255" name="" descr=""/>
+          <p:cNvPicPr/>
+          <p:nvPr/>
+        </p:nvPicPr>
+        <p:blipFill>
+          <a:blip r:embed="rId1"/>
+          <a:stretch/>
+        </p:blipFill>
+        <p:spPr>
+          <a:xfrm>
+            <a:off x="720360" y="2340360"/>
+            <a:ext cx="2158200" cy="2158200"/>
+          </a:xfrm>
+          <a:prstGeom prst="rect">
+            <a:avLst/>
+          </a:prstGeom>
+          <a:ln w="0">
+            <a:noFill/>
+          </a:ln>
+        </p:spPr>
+      </p:pic>
+    </p:spTree>
+  </p:cSld>
+  <mc:AlternateContent>
+    <mc:Choice Requires="p14">
+      <p:transition spd="med" p14:dur="700">
+        <p:fade/>
+      </p:transition>
+    </mc:Choice>
+    <mc:Fallback>
+      <p:transition spd="med">
+        <p:fade/>
+      </p:transition>
+    </mc:Fallback>
+  </mc:AlternateContent>
+</p:sld>
+</file>
+
+<file path=ppt/slides/slide62.xml><?xml version="1.0" encoding="utf-8"?>
+<p:sld xmlns:a="http://schemas.openxmlformats.org/drawingml/2006/main" xmlns:p="http://schemas.openxmlformats.org/presentationml/2006/main" xmlns:r="http://schemas.openxmlformats.org/officeDocument/2006/relationships" xmlns:p14="http://schemas.microsoft.com/office/powerpoint/2010/main" xmlns:p15="http://schemas.microsoft.com/office/powerpoint/2012/main" xmlns:mc="http://schemas.openxmlformats.org/markup-compatibility/2006">
+  <p:cSld>
+    <p:spTree>
+      <p:nvGrpSpPr>
+        <p:cNvPr id="1" name=""/>
+        <p:cNvGrpSpPr/>
+        <p:nvPr/>
+      </p:nvGrpSpPr>
+      <p:grpSpPr>
+        <a:xfrm>
+          <a:off x="0" y="0"/>
+          <a:ext cx="0" cy="0"/>
+          <a:chOff x="0" y="0"/>
+          <a:chExt cx="0" cy="0"/>
+        </a:xfrm>
+      </p:grpSpPr>
+      <p:sp>
+        <p:nvSpPr>
+          <p:cNvPr id="256" name="PlaceHolder 1"/>
+          <p:cNvSpPr>
+            <a:spLocks noGrp="1"/>
+          </p:cNvSpPr>
+          <p:nvPr>
+            <p:ph type="title"/>
+          </p:nvPr>
+        </p:nvSpPr>
+        <p:spPr>
+          <a:xfrm>
+            <a:off x="838080" y="365040"/>
+            <a:ext cx="10507320" cy="535320"/>
+          </a:xfrm>
+          <a:prstGeom prst="rect">
+            <a:avLst/>
+          </a:prstGeom>
+          <a:noFill/>
+          <a:ln w="0">
+            <a:noFill/>
+          </a:ln>
+        </p:spPr>
+        <p:txBody>
+          <a:bodyPr lIns="90000" rIns="90000" tIns="45000" bIns="45000" anchor="ctr">
+            <a:noAutofit/>
+          </a:bodyPr>
+          <a:p>
+            <a:pPr>
+              <a:lnSpc>
+                <a:spcPct val="90000"/>
+              </a:lnSpc>
+              <a:buNone/>
+            </a:pPr>
+            <a:r>
+              <a:rPr b="1" lang="es-ES" sz="2400" spc="-1" strike="noStrike">
+                <a:solidFill>
+                  <a:srgbClr val="000000"/>
+                </a:solidFill>
+                <a:latin typeface="Calibri"/>
+              </a:rPr>
+              <a:t>Regresión Logística</a:t>
+            </a:r>
+            <a:endParaRPr b="0" lang="en-US" sz="2400" spc="-1" strike="noStrike">
+              <a:latin typeface="Arial"/>
+            </a:endParaRPr>
+          </a:p>
+        </p:txBody>
+      </p:sp>
+      <p:sp>
+        <p:nvSpPr>
+          <p:cNvPr id="257" name="PlaceHolder 2"/>
+          <p:cNvSpPr>
+            <a:spLocks noGrp="1"/>
+          </p:cNvSpPr>
+          <p:nvPr>
+            <p:ph/>
+          </p:nvPr>
+        </p:nvSpPr>
+        <p:spPr>
+          <a:xfrm>
+            <a:off x="3780000" y="1980000"/>
+            <a:ext cx="7980480" cy="2473920"/>
+          </a:xfrm>
+          <a:prstGeom prst="rect">
+            <a:avLst/>
+          </a:prstGeom>
+          <a:noFill/>
+          <a:ln w="0">
+            <a:noFill/>
+          </a:ln>
+        </p:spPr>
+        <p:txBody>
+          <a:bodyPr lIns="90000" rIns="90000" tIns="45000" bIns="45000" anchor="t">
+            <a:noAutofit/>
+          </a:bodyPr>
+          <a:p>
+            <a:pPr marL="432000" indent="-324000">
+              <a:lnSpc>
+                <a:spcPct val="100000"/>
+              </a:lnSpc>
+              <a:buClr>
+                <a:srgbClr val="000000"/>
+              </a:buClr>
+              <a:buFont typeface="Wingdings" charset="2"/>
+              <a:buChar char=""/>
+            </a:pPr>
+            <a:r>
+              <a:rPr b="1" lang="en-US" sz="2400" spc="-1" strike="noStrike">
+                <a:latin typeface="Arial"/>
+              </a:rPr>
+              <a:t> </a:t>
+            </a:r>
+            <a:r>
+              <a:rPr b="1" lang="es-ES" sz="2400" spc="-1" strike="noStrike">
+                <a:latin typeface="Calibri"/>
+              </a:rPr>
+              <a:t>Desventajas</a:t>
+            </a:r>
+            <a:endParaRPr b="0" lang="en-US" sz="2400" spc="-1" strike="noStrike">
+              <a:latin typeface="Arial"/>
+            </a:endParaRPr>
+          </a:p>
+          <a:p>
+            <a:pPr>
+              <a:lnSpc>
+                <a:spcPct val="100000"/>
+              </a:lnSpc>
+              <a:buNone/>
+            </a:pPr>
+            <a:endParaRPr b="0" lang="en-US" sz="2000" spc="-1" strike="noStrike">
+              <a:latin typeface="Arial"/>
+            </a:endParaRPr>
+          </a:p>
+          <a:p>
+            <a:pPr marL="450360" indent="-179640">
+              <a:lnSpc>
+                <a:spcPct val="115000"/>
+              </a:lnSpc>
+              <a:spcAft>
+                <a:spcPts val="1236"/>
+              </a:spcAft>
+              <a:buClr>
+                <a:srgbClr val="000000"/>
+              </a:buClr>
+              <a:buSzPct val="45000"/>
+              <a:buFont typeface="Wingdings" charset="2"/>
+              <a:buChar char=""/>
+              <a:tabLst>
+                <a:tab algn="l" pos="450360"/>
+              </a:tabLst>
+            </a:pPr>
+            <a:r>
+              <a:rPr b="0" lang="es-ES" sz="2000" spc="-1" strike="noStrike">
+                <a:latin typeface="Calibri"/>
+              </a:rPr>
+              <a:t>Escalabilidad: entrenamiento costoso en datasets muy grandes.</a:t>
+            </a:r>
+            <a:endParaRPr b="0" lang="en-US" sz="2000" spc="-1" strike="noStrike">
+              <a:latin typeface="Arial"/>
+            </a:endParaRPr>
+          </a:p>
+          <a:p>
+            <a:pPr marL="450360" indent="-179640">
+              <a:lnSpc>
+                <a:spcPct val="115000"/>
+              </a:lnSpc>
+              <a:spcAft>
+                <a:spcPts val="1236"/>
+              </a:spcAft>
+              <a:buClr>
+                <a:srgbClr val="000000"/>
+              </a:buClr>
+              <a:buSzPct val="45000"/>
+              <a:buFont typeface="Wingdings" charset="2"/>
+              <a:buChar char=""/>
+              <a:tabLst>
+                <a:tab algn="l" pos="450360"/>
+              </a:tabLst>
+            </a:pPr>
+            <a:r>
+              <a:rPr b="0" lang="es-ES" sz="2000" spc="-1" strike="noStrike">
+                <a:latin typeface="Calibri"/>
+              </a:rPr>
+              <a:t>Selección del kernel adecuado puede ser compleja.</a:t>
+            </a:r>
+            <a:endParaRPr b="0" lang="en-US" sz="2000" spc="-1" strike="noStrike">
+              <a:latin typeface="Arial"/>
+            </a:endParaRPr>
+          </a:p>
+          <a:p>
+            <a:pPr marL="450360" indent="-179640">
+              <a:lnSpc>
+                <a:spcPct val="115000"/>
+              </a:lnSpc>
+              <a:spcAft>
+                <a:spcPts val="1236"/>
+              </a:spcAft>
+              <a:buClr>
+                <a:srgbClr val="000000"/>
+              </a:buClr>
+              <a:buSzPct val="45000"/>
+              <a:buFont typeface="Wingdings" charset="2"/>
+              <a:buChar char=""/>
+              <a:tabLst>
+                <a:tab algn="l" pos="450360"/>
+              </a:tabLst>
+            </a:pPr>
+            <a:r>
+              <a:rPr b="0" lang="es-ES" sz="2000" spc="-1" strike="noStrike">
+                <a:latin typeface="Calibri"/>
+              </a:rPr>
+              <a:t>Menos interpretable que modelos simples</a:t>
+            </a:r>
+            <a:endParaRPr b="0" lang="en-US" sz="2000" spc="-1" strike="noStrike">
+              <a:latin typeface="Arial"/>
+            </a:endParaRPr>
+          </a:p>
+          <a:p>
+            <a:pPr marL="450360" indent="-179640">
+              <a:lnSpc>
+                <a:spcPct val="115000"/>
+              </a:lnSpc>
+              <a:spcAft>
+                <a:spcPts val="1236"/>
+              </a:spcAft>
+              <a:buClr>
+                <a:srgbClr val="000000"/>
+              </a:buClr>
+              <a:buSzPct val="45000"/>
+              <a:buFont typeface="Wingdings" charset="2"/>
+              <a:buChar char=""/>
+              <a:tabLst>
+                <a:tab algn="l" pos="450360"/>
+              </a:tabLst>
+            </a:pPr>
+            <a:r>
+              <a:rPr b="0" lang="es-ES" sz="2000" spc="-1" strike="noStrike">
+                <a:latin typeface="Calibri"/>
+              </a:rPr>
+              <a:t>Sensible a valores de hiperparametros</a:t>
+            </a:r>
+            <a:endParaRPr b="0" lang="en-US" sz="2000" spc="-1" strike="noStrike">
+              <a:latin typeface="Arial"/>
+            </a:endParaRPr>
+          </a:p>
+        </p:txBody>
+      </p:sp>
+      <p:pic>
+        <p:nvPicPr>
+          <p:cNvPr id="258" name="" descr=""/>
+          <p:cNvPicPr/>
+          <p:nvPr/>
+        </p:nvPicPr>
+        <p:blipFill>
+          <a:blip r:embed="rId1"/>
+          <a:stretch/>
+        </p:blipFill>
+        <p:spPr>
+          <a:xfrm>
+            <a:off x="671760" y="2160360"/>
+            <a:ext cx="2206800" cy="2158200"/>
+          </a:xfrm>
+          <a:prstGeom prst="rect">
+            <a:avLst/>
+          </a:prstGeom>
+          <a:ln w="0">
+            <a:noFill/>
+          </a:ln>
+        </p:spPr>
+      </p:pic>
+    </p:spTree>
+  </p:cSld>
+  <mc:AlternateContent>
+    <mc:Choice Requires="p14">
+      <p:transition spd="med" p14:dur="700">
+        <p:fade/>
+      </p:transition>
+    </mc:Choice>
+    <mc:Fallback>
+      <p:transition spd="med">
+        <p:fade/>
+      </p:transition>
+    </mc:Fallback>
+  </mc:AlternateContent>
+</p:sld>
+</file>
+
+<file path=ppt/slides/slide63.xml><?xml version="1.0" encoding="utf-8"?>
+<p:sld xmlns:a="http://schemas.openxmlformats.org/drawingml/2006/main" xmlns:p="http://schemas.openxmlformats.org/presentationml/2006/main" xmlns:r="http://schemas.openxmlformats.org/officeDocument/2006/relationships" xmlns:p14="http://schemas.microsoft.com/office/powerpoint/2010/main" xmlns:p15="http://schemas.microsoft.com/office/powerpoint/2012/main" xmlns:mc="http://schemas.openxmlformats.org/markup-compatibility/2006">
+  <p:cSld>
+    <p:spTree>
+      <p:nvGrpSpPr>
+        <p:cNvPr id="1" name=""/>
+        <p:cNvGrpSpPr/>
+        <p:nvPr/>
+      </p:nvGrpSpPr>
+      <p:grpSpPr>
+        <a:xfrm>
+          <a:off x="0" y="0"/>
+          <a:ext cx="0" cy="0"/>
+          <a:chOff x="0" y="0"/>
+          <a:chExt cx="0" cy="0"/>
+        </a:xfrm>
+      </p:grpSpPr>
+      <p:sp>
+        <p:nvSpPr>
+          <p:cNvPr id="259" name="PlaceHolder 1"/>
+          <p:cNvSpPr>
+            <a:spLocks noGrp="1"/>
+          </p:cNvSpPr>
+          <p:nvPr>
+            <p:ph type="title"/>
+          </p:nvPr>
+        </p:nvSpPr>
+        <p:spPr>
+          <a:xfrm>
+            <a:off x="838080" y="365040"/>
+            <a:ext cx="10507320" cy="535320"/>
+          </a:xfrm>
+          <a:prstGeom prst="rect">
+            <a:avLst/>
+          </a:prstGeom>
+          <a:noFill/>
+          <a:ln w="0">
+            <a:noFill/>
+          </a:ln>
+        </p:spPr>
+        <p:txBody>
+          <a:bodyPr lIns="90000" rIns="90000" tIns="45000" bIns="45000" anchor="ctr">
+            <a:noAutofit/>
+          </a:bodyPr>
+          <a:p>
+            <a:pPr algn="ctr">
+              <a:buNone/>
+            </a:pPr>
+            <a:endParaRPr b="0" lang="en-US" sz="4400" spc="-1" strike="noStrike">
+              <a:latin typeface="Arial"/>
+            </a:endParaRPr>
+          </a:p>
+        </p:txBody>
+      </p:sp>
+      <p:sp>
+        <p:nvSpPr>
+          <p:cNvPr id="260" name="PlaceHolder 2"/>
+          <p:cNvSpPr>
+            <a:spLocks noGrp="1"/>
+          </p:cNvSpPr>
+          <p:nvPr>
+            <p:ph/>
+          </p:nvPr>
+        </p:nvSpPr>
+        <p:spPr>
+          <a:xfrm>
+            <a:off x="838080" y="1124640"/>
+            <a:ext cx="10507320" cy="4343040"/>
+          </a:xfrm>
+          <a:prstGeom prst="rect">
+            <a:avLst/>
+          </a:prstGeom>
+          <a:noFill/>
+          <a:ln w="0">
+            <a:noFill/>
+          </a:ln>
+        </p:spPr>
+        <p:txBody>
+          <a:bodyPr lIns="90000" rIns="90000" tIns="45000" bIns="45000" anchor="t">
+            <a:noAutofit/>
+          </a:bodyPr>
+          <a:p>
+            <a:endParaRPr b="0" lang="en-US" sz="3200" spc="-1" strike="noStrike">
+              <a:latin typeface="Arial"/>
+            </a:endParaRPr>
+          </a:p>
+        </p:txBody>
+      </p:sp>
+    </p:spTree>
+  </p:cSld>
+  <mc:AlternateContent>
+    <mc:Choice Requires="p14">
+      <p:transition spd="med" p14:dur="700">
+        <p:fade/>
+      </p:transition>
+    </mc:Choice>
+    <mc:Fallback>
+      <p:transition spd="med">
+        <p:fade/>
+      </p:transition>
+    </mc:Fallback>
+  </mc:AlternateContent>
+</p:sld>
+</file>
+
+<file path=ppt/slides/slide64.xml><?xml version="1.0" encoding="utf-8"?>
+<p:sld xmlns:a="http://schemas.openxmlformats.org/drawingml/2006/main" xmlns:p="http://schemas.openxmlformats.org/presentationml/2006/main" xmlns:r="http://schemas.openxmlformats.org/officeDocument/2006/relationships" xmlns:p14="http://schemas.microsoft.com/office/powerpoint/2010/main" xmlns:p15="http://schemas.microsoft.com/office/powerpoint/2012/main" xmlns:mc="http://schemas.openxmlformats.org/markup-compatibility/2006">
+  <p:cSld>
+    <p:bg>
+      <p:bgPr>
+        <a:solidFill>
+          <a:srgbClr val="083796"/>
+        </a:solidFill>
+      </p:bgPr>
+    </p:bg>
+    <p:spTree>
+      <p:nvGrpSpPr>
+        <p:cNvPr id="1" name=""/>
+        <p:cNvGrpSpPr/>
+        <p:nvPr/>
+      </p:nvGrpSpPr>
+      <p:grpSpPr>
+        <a:xfrm>
+          <a:off x="0" y="0"/>
+          <a:ext cx="0" cy="0"/>
+          <a:chOff x="0" y="0"/>
+          <a:chExt cx="0" cy="0"/>
+        </a:xfrm>
+      </p:grpSpPr>
+      <p:sp>
+        <p:nvSpPr>
+          <p:cNvPr id="261" name="10 CuadroTexto"/>
+          <p:cNvSpPr/>
+          <p:nvPr/>
+        </p:nvSpPr>
+        <p:spPr>
+          <a:xfrm>
+            <a:off x="5150160" y="5508000"/>
+            <a:ext cx="1889640" cy="455400"/>
+          </a:xfrm>
+          <a:prstGeom prst="rect">
+            <a:avLst/>
+          </a:prstGeom>
+          <a:noFill/>
+          <a:ln w="0">
+            <a:noFill/>
+          </a:ln>
+        </p:spPr>
+        <p:style>
+          <a:lnRef idx="0"/>
+          <a:fillRef idx="0"/>
+          <a:effectRef idx="0"/>
+          <a:fontRef idx="minor"/>
+        </p:style>
+        <p:txBody>
+          <a:bodyPr wrap="none" lIns="90000" rIns="90000" tIns="45000" bIns="45000" anchor="t">
+            <a:spAutoFit/>
+          </a:bodyPr>
+          <a:p>
+            <a:pPr>
+              <a:lnSpc>
+                <a:spcPct val="100000"/>
+              </a:lnSpc>
+              <a:buNone/>
+            </a:pPr>
+            <a:r>
+              <a:rPr b="0" lang="es-ES" sz="2400" spc="-1" strike="noStrike">
+                <a:solidFill>
+                  <a:srgbClr val="ffffff"/>
+                </a:solidFill>
+                <a:latin typeface="Calibri"/>
+                <a:ea typeface="DejaVu Sans"/>
+              </a:rPr>
+              <a:t>www.ceste.es</a:t>
+            </a:r>
+            <a:endParaRPr b="0" lang="en-US" sz="2400" spc="-1" strike="noStrike">
+              <a:latin typeface="Arial"/>
+            </a:endParaRPr>
+          </a:p>
+        </p:txBody>
+      </p:sp>
+      <p:pic>
+        <p:nvPicPr>
+          <p:cNvPr id="262" name="11 Imagen" descr=""/>
+          <p:cNvPicPr/>
+          <p:nvPr/>
+        </p:nvPicPr>
+        <p:blipFill>
+          <a:blip r:embed="rId1"/>
+          <a:stretch/>
+        </p:blipFill>
+        <p:spPr>
+          <a:xfrm>
+            <a:off x="4227480" y="2349000"/>
+            <a:ext cx="3729600" cy="1817640"/>
           </a:xfrm>
           <a:prstGeom prst="rect">
             <a:avLst/>
@@ -11314,7 +14460,7 @@
         <p:spPr>
           <a:xfrm>
             <a:off x="838080" y="365040"/>
-            <a:ext cx="10513800" cy="541800"/>
+            <a:ext cx="10512720" cy="540720"/>
           </a:xfrm>
           <a:prstGeom prst="rect">
             <a:avLst/>
@@ -11363,7 +14509,7 @@
         <p:spPr>
           <a:xfrm>
             <a:off x="2340000" y="1260000"/>
-            <a:ext cx="7558560" cy="538560"/>
+            <a:ext cx="7557480" cy="537480"/>
           </a:xfrm>
           <a:prstGeom prst="rect">
             <a:avLst/>
@@ -11419,7 +14565,7 @@
         <p:spPr>
           <a:xfrm>
             <a:off x="7094880" y="2700000"/>
-            <a:ext cx="3883680" cy="3109680"/>
+            <a:ext cx="3882600" cy="3108600"/>
           </a:xfrm>
           <a:prstGeom prst="rect">
             <a:avLst/>
@@ -11438,7 +14584,7 @@
         <p:spPr>
           <a:xfrm>
             <a:off x="889920" y="2160000"/>
-            <a:ext cx="5038560" cy="960480"/>
+            <a:ext cx="5037480" cy="959400"/>
           </a:xfrm>
           <a:prstGeom prst="rect">
             <a:avLst/>
@@ -11570,7 +14716,7 @@
         <p:spPr>
           <a:xfrm>
             <a:off x="1260000" y="1260000"/>
-            <a:ext cx="828360" cy="828360"/>
+            <a:ext cx="827280" cy="827280"/>
           </a:xfrm>
           <a:prstGeom prst="rect">
             <a:avLst/>
@@ -11627,7 +14773,7 @@
         <p:spPr>
           <a:xfrm>
             <a:off x="838080" y="365040"/>
-            <a:ext cx="10508400" cy="536400"/>
+            <a:ext cx="10507320" cy="535320"/>
           </a:xfrm>
           <a:prstGeom prst="rect">
             <a:avLst/>
@@ -11676,7 +14822,7 @@
         <p:spPr>
           <a:xfrm>
             <a:off x="855720" y="1089360"/>
-            <a:ext cx="10508400" cy="4344120"/>
+            <a:ext cx="10507320" cy="4343040"/>
           </a:xfrm>
           <a:prstGeom prst="rect">
             <a:avLst/>
@@ -11871,7 +15017,7 @@
         <p:spPr>
           <a:xfrm>
             <a:off x="3600000" y="1980000"/>
-            <a:ext cx="4859280" cy="584640"/>
+            <a:ext cx="4858200" cy="583560"/>
           </a:xfrm>
           <a:prstGeom prst="rect">
             <a:avLst/>
@@ -11928,7 +15074,7 @@
         <p:spPr>
           <a:xfrm>
             <a:off x="838080" y="365040"/>
-            <a:ext cx="10508400" cy="536400"/>
+            <a:ext cx="10507320" cy="535320"/>
           </a:xfrm>
           <a:prstGeom prst="rect">
             <a:avLst/>
@@ -11977,7 +15123,7 @@
         <p:spPr>
           <a:xfrm>
             <a:off x="3420000" y="902160"/>
-            <a:ext cx="5039280" cy="5060880"/>
+            <a:ext cx="5038200" cy="5059800"/>
           </a:xfrm>
           <a:prstGeom prst="rect">
             <a:avLst/>
